--- a/Doc-Intelligence-PID-Presentation.pptx
+++ b/Doc-Intelligence-PID-Presentation.pptx
@@ -309,7 +309,7 @@
           <a:p>
             <a:fld id="{5BCAD085-E8A6-8845-BD4E-CB4CCA059FC4}" type="datetimeFigureOut">
               <a:rPr lang="en-US" smtClean="0"/>
-              <a:t>6/9/2026</a:t>
+              <a:t>6/11/2026</a:t>
             </a:fld>
             <a:endParaRPr lang="en-US"/>
           </a:p>
@@ -477,7 +477,7 @@
           <a:p>
             <a:fld id="{5BCAD085-E8A6-8845-BD4E-CB4CCA059FC4}" type="datetimeFigureOut">
               <a:rPr lang="en-US" smtClean="0"/>
-              <a:t>6/9/2026</a:t>
+              <a:t>6/11/2026</a:t>
             </a:fld>
             <a:endParaRPr lang="en-US"/>
           </a:p>
@@ -655,7 +655,7 @@
           <a:p>
             <a:fld id="{5BCAD085-E8A6-8845-BD4E-CB4CCA059FC4}" type="datetimeFigureOut">
               <a:rPr lang="en-US" smtClean="0"/>
-              <a:t>6/9/2026</a:t>
+              <a:t>6/11/2026</a:t>
             </a:fld>
             <a:endParaRPr lang="en-US"/>
           </a:p>
@@ -823,7 +823,7 @@
           <a:p>
             <a:fld id="{5BCAD085-E8A6-8845-BD4E-CB4CCA059FC4}" type="datetimeFigureOut">
               <a:rPr lang="en-US" smtClean="0"/>
-              <a:t>6/9/2026</a:t>
+              <a:t>6/11/2026</a:t>
             </a:fld>
             <a:endParaRPr lang="en-US"/>
           </a:p>
@@ -1068,7 +1068,7 @@
           <a:p>
             <a:fld id="{5BCAD085-E8A6-8845-BD4E-CB4CCA059FC4}" type="datetimeFigureOut">
               <a:rPr lang="en-US" smtClean="0"/>
-              <a:t>6/9/2026</a:t>
+              <a:t>6/11/2026</a:t>
             </a:fld>
             <a:endParaRPr lang="en-US"/>
           </a:p>
@@ -1353,7 +1353,7 @@
           <a:p>
             <a:fld id="{5BCAD085-E8A6-8845-BD4E-CB4CCA059FC4}" type="datetimeFigureOut">
               <a:rPr lang="en-US" smtClean="0"/>
-              <a:t>6/9/2026</a:t>
+              <a:t>6/11/2026</a:t>
             </a:fld>
             <a:endParaRPr lang="en-US"/>
           </a:p>
@@ -1772,7 +1772,7 @@
           <a:p>
             <a:fld id="{5BCAD085-E8A6-8845-BD4E-CB4CCA059FC4}" type="datetimeFigureOut">
               <a:rPr lang="en-US" smtClean="0"/>
-              <a:t>6/9/2026</a:t>
+              <a:t>6/11/2026</a:t>
             </a:fld>
             <a:endParaRPr lang="en-US"/>
           </a:p>
@@ -1889,7 +1889,7 @@
           <a:p>
             <a:fld id="{5BCAD085-E8A6-8845-BD4E-CB4CCA059FC4}" type="datetimeFigureOut">
               <a:rPr lang="en-US" smtClean="0"/>
-              <a:t>6/9/2026</a:t>
+              <a:t>6/11/2026</a:t>
             </a:fld>
             <a:endParaRPr lang="en-US"/>
           </a:p>
@@ -1984,7 +1984,7 @@
           <a:p>
             <a:fld id="{5BCAD085-E8A6-8845-BD4E-CB4CCA059FC4}" type="datetimeFigureOut">
               <a:rPr lang="en-US" smtClean="0"/>
-              <a:t>6/9/2026</a:t>
+              <a:t>6/11/2026</a:t>
             </a:fld>
             <a:endParaRPr lang="en-US"/>
           </a:p>
@@ -2259,7 +2259,7 @@
           <a:p>
             <a:fld id="{5BCAD085-E8A6-8845-BD4E-CB4CCA059FC4}" type="datetimeFigureOut">
               <a:rPr lang="en-US" smtClean="0"/>
-              <a:t>6/9/2026</a:t>
+              <a:t>6/11/2026</a:t>
             </a:fld>
             <a:endParaRPr lang="en-US"/>
           </a:p>
@@ -2511,7 +2511,7 @@
           <a:p>
             <a:fld id="{5BCAD085-E8A6-8845-BD4E-CB4CCA059FC4}" type="datetimeFigureOut">
               <a:rPr lang="en-US" smtClean="0"/>
-              <a:t>6/9/2026</a:t>
+              <a:t>6/11/2026</a:t>
             </a:fld>
             <a:endParaRPr lang="en-US"/>
           </a:p>
@@ -2722,7 +2722,7 @@
           <a:p>
             <a:fld id="{5BCAD085-E8A6-8845-BD4E-CB4CCA059FC4}" type="datetimeFigureOut">
               <a:rPr lang="en-US" smtClean="0"/>
-              <a:t>6/9/2026</a:t>
+              <a:t>6/11/2026</a:t>
             </a:fld>
             <a:endParaRPr lang="en-US"/>
           </a:p>
@@ -3204,8 +3204,8 @@
         </p:nvSpPr>
         <p:spPr>
           <a:xfrm>
-            <a:off x="845654" y="1828800"/>
-            <a:ext cx="9738693" cy="1077218"/>
+            <a:off x="1164777" y="2031321"/>
+            <a:ext cx="9738692" cy="3170099"/>
           </a:xfrm>
           <a:prstGeom prst="rect">
             <a:avLst/>
@@ -3263,6 +3263,10 @@
               <a:t>vLLM</a:t>
             </a:r>
             <a:r>
+              <a:rPr lang="en-US" dirty="0"/>
+              <a:t> with Vision (for OCR)</a:t>
+            </a:r>
+            <a:r>
               <a:rPr dirty="0"/>
               <a:t>: Qwen2.5</a:t>
             </a:r>
@@ -3297,20 +3301,111 @@
             </a:r>
             <a:r>
               <a:rPr lang="en-US" dirty="0"/>
-              <a:t> and </a:t>
-            </a:r>
-            <a:r>
-              <a:rPr lang="en-US" dirty="0" err="1"/>
-              <a:t>redered</a:t>
-            </a:r>
-            <a:r>
-              <a:rPr lang="en-US" dirty="0"/>
-              <a:t> by </a:t>
+              <a:t> and rendered by </a:t>
             </a:r>
             <a:r>
               <a:rPr dirty="0"/>
               <a:t>React UI</a:t>
             </a:r>
+            <a:endParaRPr lang="en-US" dirty="0"/>
+          </a:p>
+          <a:p>
+            <a:pPr algn="ctr">
+              <a:defRPr sz="1800">
+                <a:solidFill>
+                  <a:srgbClr val="38BDF8"/>
+                </a:solidFill>
+              </a:defRPr>
+            </a:pPr>
+            <a:r>
+              <a:rPr lang="en-IN" dirty="0"/>
+              <a:t>Customized and Restricted Backend Filters are used as Guard Rail</a:t>
+            </a:r>
+          </a:p>
+          <a:p>
+            <a:pPr algn="ctr">
+              <a:defRPr sz="1800">
+                <a:solidFill>
+                  <a:srgbClr val="38BDF8"/>
+                </a:solidFill>
+              </a:defRPr>
+            </a:pPr>
+            <a:endParaRPr lang="en-IN" dirty="0"/>
+          </a:p>
+          <a:p>
+            <a:pPr algn="ctr">
+              <a:defRPr sz="1800">
+                <a:solidFill>
+                  <a:srgbClr val="38BDF8"/>
+                </a:solidFill>
+              </a:defRPr>
+            </a:pPr>
+            <a:r>
+              <a:rPr lang="en-IN" sz="2800" dirty="0">
+                <a:solidFill>
+                  <a:schemeClr val="bg1"/>
+                </a:solidFill>
+              </a:rPr>
+              <a:t>Target Audience</a:t>
+            </a:r>
+          </a:p>
+          <a:p>
+            <a:pPr algn="ctr">
+              <a:defRPr sz="1800">
+                <a:solidFill>
+                  <a:srgbClr val="38BDF8"/>
+                </a:solidFill>
+              </a:defRPr>
+            </a:pPr>
+            <a:r>
+              <a:rPr lang="en-IN" dirty="0"/>
+              <a:t>Personal Insurance Service Executives</a:t>
+            </a:r>
+          </a:p>
+          <a:p>
+            <a:pPr algn="ctr">
+              <a:defRPr sz="1800">
+                <a:solidFill>
+                  <a:srgbClr val="38BDF8"/>
+                </a:solidFill>
+              </a:defRPr>
+            </a:pPr>
+            <a:r>
+              <a:rPr lang="en-IN" dirty="0"/>
+              <a:t>Personal Insurance </a:t>
+            </a:r>
+            <a:r>
+              <a:rPr lang="en-IN" dirty="0" err="1"/>
+              <a:t>SPoC</a:t>
+            </a:r>
+            <a:endParaRPr lang="en-IN" dirty="0"/>
+          </a:p>
+          <a:p>
+            <a:pPr algn="ctr">
+              <a:defRPr sz="1800">
+                <a:solidFill>
+                  <a:srgbClr val="38BDF8"/>
+                </a:solidFill>
+              </a:defRPr>
+            </a:pPr>
+            <a:r>
+              <a:rPr lang="en-IN" dirty="0"/>
+              <a:t>Serving existing PID data</a:t>
+            </a:r>
+          </a:p>
+          <a:p>
+            <a:pPr algn="ctr">
+              <a:defRPr sz="1800">
+                <a:solidFill>
+                  <a:srgbClr val="38BDF8"/>
+                </a:solidFill>
+              </a:defRPr>
+            </a:pPr>
+            <a:r>
+              <a:rPr lang="en-IN" dirty="0"/>
+              <a:t>(Not PID Sales)</a:t>
+            </a:r>
+            <a:endParaRPr dirty="0"/>
           </a:p>
         </p:txBody>
       </p:sp>
@@ -3345,6 +3440,41 @@
             </a:pPr>
             <a:r>
               <a:t>Doc-Intelligence-PID | Architecture Presentation</a:t>
+            </a:r>
+          </a:p>
+        </p:txBody>
+      </p:sp>
+      <p:sp>
+        <p:nvSpPr>
+          <p:cNvPr id="7" name="TextBox 6">
+            <a:extLst>
+              <a:ext uri="{FF2B5EF4-FFF2-40B4-BE49-F238E27FC236}">
+                <a16:creationId xmlns:a16="http://schemas.microsoft.com/office/drawing/2014/main" id="{6346C588-C60D-5D55-3A16-5C8846BB6152}"/>
+              </a:ext>
+            </a:extLst>
+          </p:cNvPr>
+          <p:cNvSpPr txBox="1"/>
+          <p:nvPr/>
+        </p:nvSpPr>
+        <p:spPr>
+          <a:xfrm>
+            <a:off x="3048512" y="3245868"/>
+            <a:ext cx="6097022" cy="369332"/>
+          </a:xfrm>
+          <a:prstGeom prst="rect">
+            <a:avLst/>
+          </a:prstGeom>
+          <a:noFill/>
+        </p:spPr>
+        <p:txBody>
+          <a:bodyPr wrap="square">
+            <a:spAutoFit/>
+          </a:bodyPr>
+          <a:lstStyle/>
+          <a:p>
+            <a:r>
+              <a:rPr lang="en-IN" dirty="0"/>
+              <a:t>Insurance</a:t>
             </a:r>
           </a:p>
         </p:txBody>
@@ -3940,7 +4070,7 @@
         <p:spPr>
           <a:xfrm>
             <a:off x="6656832" y="1645920"/>
-            <a:ext cx="2377440" cy="1371600"/>
+            <a:ext cx="2377440" cy="646331"/>
           </a:xfrm>
           <a:prstGeom prst="rect">
             <a:avLst/>
@@ -3961,8 +4091,14 @@
               </a:defRPr>
             </a:pPr>
             <a:r>
-              <a:t>Sentence Transformers L5</a:t>
-            </a:r>
+              <a:rPr dirty="0"/>
+              <a:t>Sentence Transformers </a:t>
+            </a:r>
+            <a:r>
+              <a:rPr lang="en-US" dirty="0"/>
+              <a:t>mini LLM</a:t>
+            </a:r>
+            <a:endParaRPr dirty="0"/>
           </a:p>
           <a:p>
             <a:pPr>
@@ -3973,6 +4109,7 @@
               </a:defRPr>
             </a:pPr>
             <a:r>
+              <a:rPr dirty="0"/>
               <a:t>Request/response orchestration</a:t>
             </a:r>
           </a:p>
@@ -3985,6 +4122,7 @@
               </a:defRPr>
             </a:pPr>
             <a:r>
+              <a:rPr dirty="0"/>
               <a:t>Context building for retrieval</a:t>
             </a:r>
           </a:p>
@@ -7608,7 +7746,7 @@
         <p:spPr>
           <a:xfrm>
             <a:off x="822960" y="1371600"/>
-            <a:ext cx="10515600" cy="3477875"/>
+            <a:ext cx="10515600" cy="4093428"/>
           </a:xfrm>
           <a:prstGeom prst="rect">
             <a:avLst/>
@@ -7788,7 +7926,7 @@
             </a:r>
             <a:r>
               <a:rPr lang="en-US" dirty="0"/>
-              <a:t>respond </a:t>
+              <a:t>responded </a:t>
             </a:r>
             <a:r>
               <a:rPr dirty="0"/>
@@ -7833,6 +7971,30 @@
             <a:r>
               <a:rPr dirty="0"/>
               <a:t>eployment model: local, privacy-friendly, modular for future scaling</a:t>
+            </a:r>
+            <a:endParaRPr lang="en-US" dirty="0"/>
+          </a:p>
+          <a:p>
+            <a:pPr>
+              <a:defRPr sz="2000">
+                <a:solidFill>
+                  <a:srgbClr val="E2E8F0"/>
+                </a:solidFill>
+              </a:defRPr>
+            </a:pPr>
+            <a:endParaRPr lang="en-IN" dirty="0"/>
+          </a:p>
+          <a:p>
+            <a:pPr>
+              <a:defRPr sz="2000">
+                <a:solidFill>
+                  <a:srgbClr val="E2E8F0"/>
+                </a:solidFill>
+              </a:defRPr>
+            </a:pPr>
+            <a:r>
+              <a:rPr lang="en-IN" dirty="0"/>
+              <a:t>Sematic + NLP restricted filters are used as GUARD Rail</a:t>
             </a:r>
             <a:endParaRPr lang="en-US" dirty="0"/>
           </a:p>

--- a/Doc-Intelligence-PID-Presentation.pptx
+++ b/Doc-Intelligence-PID-Presentation.pptx
@@ -3444,46 +3444,19 @@
           </a:p>
         </p:txBody>
       </p:sp>
-      <p:sp>
-        <p:nvSpPr>
-          <p:cNvPr id="7" name="TextBox 6">
-            <a:extLst>
-              <a:ext uri="{FF2B5EF4-FFF2-40B4-BE49-F238E27FC236}">
-                <a16:creationId xmlns:a16="http://schemas.microsoft.com/office/drawing/2014/main" id="{6346C588-C60D-5D55-3A16-5C8846BB6152}"/>
-              </a:ext>
-            </a:extLst>
-          </p:cNvPr>
-          <p:cNvSpPr txBox="1"/>
-          <p:nvPr/>
-        </p:nvSpPr>
-        <p:spPr>
-          <a:xfrm>
-            <a:off x="3048512" y="3245868"/>
-            <a:ext cx="6097022" cy="369332"/>
-          </a:xfrm>
-          <a:prstGeom prst="rect">
-            <a:avLst/>
-          </a:prstGeom>
-          <a:noFill/>
-        </p:spPr>
-        <p:txBody>
-          <a:bodyPr wrap="square">
-            <a:spAutoFit/>
-          </a:bodyPr>
-          <a:lstStyle/>
-          <a:p>
-            <a:r>
-              <a:rPr lang="en-IN" dirty="0"/>
-              <a:t>Insurance</a:t>
-            </a:r>
-          </a:p>
-        </p:txBody>
-      </p:sp>
     </p:spTree>
   </p:cSld>
   <p:clrMapOvr>
     <a:masterClrMapping/>
   </p:clrMapOvr>
+  <mc:AlternateContent xmlns:mc="http://schemas.openxmlformats.org/markup-compatibility/2006">
+    <mc:Choice xmlns:p14="http://schemas.microsoft.com/office/powerpoint/2010/main" Requires="p14">
+      <p:transition spd="slow" p14:dur="2000" advTm="306"/>
+    </mc:Choice>
+    <mc:Fallback>
+      <p:transition spd="slow" advTm="306"/>
+    </mc:Fallback>
+  </mc:AlternateContent>
 </p:sld>
 </file>
 
@@ -7994,7 +7967,7 @@
             </a:pPr>
             <a:r>
               <a:rPr lang="en-IN" dirty="0"/>
-              <a:t>Sematic + NLP restricted filters are used as GUARD Rail</a:t>
+              <a:t>Sematic + NLP content restricted filters are used as GUARD Rail</a:t>
             </a:r>
             <a:endParaRPr lang="en-US" dirty="0"/>
           </a:p>

--- a/Doc-Intelligence-PID-Presentation.pptx
+++ b/Doc-Intelligence-PID-Presentation.pptx
@@ -5,14 +5,16 @@
     <p:sldMasterId id="2147483648" r:id="rId1"/>
   </p:sldMasterIdLst>
   <p:sldIdLst>
-    <p:sldId id="256" r:id="rId2"/>
-    <p:sldId id="257" r:id="rId3"/>
-    <p:sldId id="258" r:id="rId4"/>
-    <p:sldId id="259" r:id="rId5"/>
-    <p:sldId id="260" r:id="rId6"/>
-    <p:sldId id="261" r:id="rId7"/>
-    <p:sldId id="262" r:id="rId8"/>
-    <p:sldId id="263" r:id="rId9"/>
+    <p:sldId id="264" r:id="rId2"/>
+    <p:sldId id="256" r:id="rId3"/>
+    <p:sldId id="257" r:id="rId4"/>
+    <p:sldId id="258" r:id="rId5"/>
+    <p:sldId id="259" r:id="rId6"/>
+    <p:sldId id="260" r:id="rId7"/>
+    <p:sldId id="261" r:id="rId8"/>
+    <p:sldId id="262" r:id="rId9"/>
+    <p:sldId id="263" r:id="rId10"/>
+    <p:sldId id="265" r:id="rId11"/>
   </p:sldIdLst>
   <p:sldSz cx="12192000" cy="6858000"/>
   <p:notesSz cx="6858000" cy="9144000"/>
@@ -3083,14 +3085,6 @@
 <file path=ppt/slides/slide1.xml><?xml version="1.0" encoding="utf-8"?>
 <p:sld xmlns:a="http://schemas.openxmlformats.org/drawingml/2006/main" xmlns:r="http://schemas.openxmlformats.org/officeDocument/2006/relationships" xmlns:p="http://schemas.openxmlformats.org/presentationml/2006/main">
   <p:cSld>
-    <p:bg>
-      <p:bgPr>
-        <a:solidFill>
-          <a:srgbClr val="0F172A"/>
-        </a:solidFill>
-        <a:effectLst/>
-      </p:bgPr>
-    </p:bg>
     <p:spTree>
       <p:nvGrpSpPr>
         <p:cNvPr id="1" name=""/>
@@ -3105,358 +3099,106 @@
           <a:chExt cx="0" cy="0"/>
         </a:xfrm>
       </p:grpSpPr>
-      <p:sp>
-        <p:nvSpPr>
-          <p:cNvPr id="2" name="TextBox 1"/>
-          <p:cNvSpPr txBox="1"/>
-          <p:nvPr/>
-        </p:nvSpPr>
-        <p:spPr>
-          <a:xfrm>
-            <a:off x="548640" y="320040"/>
-            <a:ext cx="11064240" cy="822960"/>
+      <p:pic>
+        <p:nvPicPr>
+          <p:cNvPr id="5" name="Picture 4">
+            <a:extLst>
+              <a:ext uri="{FF2B5EF4-FFF2-40B4-BE49-F238E27FC236}">
+                <a16:creationId xmlns:a16="http://schemas.microsoft.com/office/drawing/2014/main" id="{73B91939-49D9-A9BB-FB50-D10DCAD5E79A}"/>
+              </a:ext>
+            </a:extLst>
+          </p:cNvPr>
+          <p:cNvPicPr>
+            <a:picLocks noChangeAspect="1"/>
+          </p:cNvPicPr>
+          <p:nvPr/>
+        </p:nvPicPr>
+        <p:blipFill>
+          <a:blip r:embed="rId2"/>
+          <a:stretch>
+            <a:fillRect/>
+          </a:stretch>
+        </p:blipFill>
+        <p:spPr>
+          <a:xfrm>
+            <a:off x="0" y="0"/>
+            <a:ext cx="12192000" cy="6858000"/>
           </a:xfrm>
           <a:prstGeom prst="rect">
             <a:avLst/>
           </a:prstGeom>
-          <a:noFill/>
-        </p:spPr>
-        <p:txBody>
-          <a:bodyPr wrap="none">
-            <a:spAutoFit/>
-          </a:bodyPr>
-          <a:lstStyle/>
-          <a:p>
-            <a:r>
-              <a:rPr sz="2800" b="1">
-                <a:solidFill>
-                  <a:srgbClr val="E2E8F0"/>
-                </a:solidFill>
-              </a:rPr>
-              <a:t>Doc-Intelligence-PID</a:t>
-            </a:r>
-          </a:p>
-          <a:p>
-            <a:pPr>
-              <a:defRPr sz="1200">
-                <a:solidFill>
-                  <a:srgbClr val="94A3B8"/>
-                </a:solidFill>
-              </a:defRPr>
-            </a:pPr>
-            <a:r>
-              <a:t>PowerPoint summary of the ultra-modern architecture and processing flow</a:t>
-            </a:r>
-          </a:p>
-        </p:txBody>
-      </p:sp>
-      <p:sp>
-        <p:nvSpPr>
-          <p:cNvPr id="3" name="Rounded Rectangle 2"/>
-          <p:cNvSpPr/>
-          <p:nvPr/>
-        </p:nvSpPr>
-        <p:spPr>
-          <a:xfrm>
-            <a:off x="640080" y="1280160"/>
-            <a:ext cx="10972800" cy="4389120"/>
-          </a:xfrm>
-          <a:prstGeom prst="roundRect">
-            <a:avLst/>
-          </a:prstGeom>
-          <a:solidFill>
-            <a:srgbClr val="1E293B"/>
-          </a:solidFill>
-          <a:ln w="25400">
-            <a:solidFill>
-              <a:srgbClr val="38BDF8"/>
-            </a:solidFill>
-          </a:ln>
-        </p:spPr>
-        <p:style>
-          <a:lnRef idx="1">
-            <a:schemeClr val="accent1"/>
-          </a:lnRef>
-          <a:fillRef idx="3">
-            <a:schemeClr val="accent1"/>
-          </a:fillRef>
-          <a:effectRef idx="2">
-            <a:schemeClr val="accent1"/>
-          </a:effectRef>
-          <a:fontRef idx="minor">
-            <a:schemeClr val="lt1"/>
-          </a:fontRef>
-        </p:style>
-        <p:txBody>
-          <a:bodyPr rtlCol="0" anchor="ctr"/>
-          <a:lstStyle/>
-          <a:p>
-            <a:pPr algn="ctr"/>
-            <a:endParaRPr/>
-          </a:p>
-        </p:txBody>
-      </p:sp>
-      <p:sp>
-        <p:nvSpPr>
-          <p:cNvPr id="4" name="TextBox 3"/>
-          <p:cNvSpPr txBox="1"/>
-          <p:nvPr/>
-        </p:nvSpPr>
-        <p:spPr>
-          <a:xfrm>
-            <a:off x="1164777" y="2031321"/>
-            <a:ext cx="9738692" cy="3170099"/>
-          </a:xfrm>
-          <a:prstGeom prst="rect">
-            <a:avLst/>
-          </a:prstGeom>
-          <a:noFill/>
-        </p:spPr>
-        <p:txBody>
-          <a:bodyPr wrap="none">
-            <a:spAutoFit/>
-          </a:bodyPr>
-          <a:lstStyle/>
-          <a:p>
-            <a:pPr algn="ctr">
-              <a:defRPr sz="3000" b="1">
-                <a:solidFill>
-                  <a:srgbClr val="E2E8F0"/>
-                </a:solidFill>
-              </a:defRPr>
-            </a:pPr>
-            <a:r>
-              <a:rPr dirty="0"/>
-              <a:t>AI Document Intelligence for Personal Insurance Documents</a:t>
-            </a:r>
-          </a:p>
-          <a:p>
-            <a:pPr algn="ctr">
-              <a:defRPr sz="1600">
-                <a:solidFill>
-                  <a:srgbClr val="94A3B8"/>
-                </a:solidFill>
-              </a:defRPr>
-            </a:pPr>
-            <a:r>
-              <a:rPr dirty="0"/>
-              <a:t>Frontend: ReactJS • Backend: </a:t>
-            </a:r>
-            <a:r>
-              <a:rPr dirty="0" err="1"/>
-              <a:t>FastAPI</a:t>
-            </a:r>
-            <a:r>
-              <a:rPr dirty="0"/>
-              <a:t> • Retrieval: </a:t>
-            </a:r>
-            <a:r>
-              <a:rPr lang="en-US" dirty="0"/>
-              <a:t>Agentic AI + </a:t>
-            </a:r>
-            <a:r>
-              <a:rPr dirty="0"/>
-              <a:t>FAISS • </a:t>
-            </a:r>
-            <a:r>
-              <a:rPr dirty="0" err="1"/>
-              <a:t>vLLM</a:t>
-            </a:r>
-            <a:r>
-              <a:rPr lang="en-US" dirty="0"/>
-              <a:t> with Vision (for OCR)</a:t>
-            </a:r>
-            <a:r>
-              <a:rPr dirty="0"/>
-              <a:t>: Qwen2.5</a:t>
-            </a:r>
-          </a:p>
-          <a:p>
-            <a:pPr algn="ctr">
-              <a:defRPr sz="1800">
-                <a:solidFill>
-                  <a:srgbClr val="38BDF8"/>
-                </a:solidFill>
-              </a:defRPr>
-            </a:pPr>
-            <a:r>
-              <a:rPr dirty="0"/>
-              <a:t>Output: Extracted text and </a:t>
-            </a:r>
-            <a:r>
-              <a:rPr lang="en-US" dirty="0"/>
-              <a:t>PID</a:t>
-            </a:r>
-            <a:r>
-              <a:rPr dirty="0"/>
-              <a:t> data </a:t>
-            </a:r>
-            <a:r>
-              <a:rPr lang="en-US" dirty="0"/>
-              <a:t>Served by </a:t>
-            </a:r>
-            <a:r>
-              <a:rPr lang="en-US" dirty="0" err="1"/>
-              <a:t>FastAPI</a:t>
-            </a:r>
-            <a:r>
-              <a:rPr lang="en-US" dirty="0"/>
-              <a:t> and rendered by </a:t>
-            </a:r>
-            <a:r>
-              <a:rPr dirty="0"/>
-              <a:t>React UI</a:t>
-            </a:r>
-            <a:endParaRPr lang="en-US" dirty="0"/>
-          </a:p>
-          <a:p>
-            <a:pPr algn="ctr">
-              <a:defRPr sz="1800">
-                <a:solidFill>
-                  <a:srgbClr val="38BDF8"/>
-                </a:solidFill>
-              </a:defRPr>
-            </a:pPr>
-            <a:r>
-              <a:rPr lang="en-IN" dirty="0"/>
-              <a:t>Customized and Restricted Backend Filters are used as Guard Rail</a:t>
-            </a:r>
-          </a:p>
-          <a:p>
-            <a:pPr algn="ctr">
-              <a:defRPr sz="1800">
-                <a:solidFill>
-                  <a:srgbClr val="38BDF8"/>
-                </a:solidFill>
-              </a:defRPr>
-            </a:pPr>
-            <a:endParaRPr lang="en-IN" dirty="0"/>
-          </a:p>
-          <a:p>
-            <a:pPr algn="ctr">
-              <a:defRPr sz="1800">
-                <a:solidFill>
-                  <a:srgbClr val="38BDF8"/>
-                </a:solidFill>
-              </a:defRPr>
-            </a:pPr>
-            <a:r>
-              <a:rPr lang="en-IN" sz="2800" dirty="0">
-                <a:solidFill>
-                  <a:schemeClr val="bg1"/>
-                </a:solidFill>
-              </a:rPr>
-              <a:t>Target Audience</a:t>
-            </a:r>
-          </a:p>
-          <a:p>
-            <a:pPr algn="ctr">
-              <a:defRPr sz="1800">
-                <a:solidFill>
-                  <a:srgbClr val="38BDF8"/>
-                </a:solidFill>
-              </a:defRPr>
-            </a:pPr>
-            <a:r>
-              <a:rPr lang="en-IN" dirty="0"/>
-              <a:t>Personal Insurance Service Executives</a:t>
-            </a:r>
-          </a:p>
-          <a:p>
-            <a:pPr algn="ctr">
-              <a:defRPr sz="1800">
-                <a:solidFill>
-                  <a:srgbClr val="38BDF8"/>
-                </a:solidFill>
-              </a:defRPr>
-            </a:pPr>
-            <a:r>
-              <a:rPr lang="en-IN" dirty="0"/>
-              <a:t>Personal Insurance </a:t>
-            </a:r>
-            <a:r>
-              <a:rPr lang="en-IN" dirty="0" err="1"/>
-              <a:t>SPoC</a:t>
-            </a:r>
-            <a:endParaRPr lang="en-IN" dirty="0"/>
-          </a:p>
-          <a:p>
-            <a:pPr algn="ctr">
-              <a:defRPr sz="1800">
-                <a:solidFill>
-                  <a:srgbClr val="38BDF8"/>
-                </a:solidFill>
-              </a:defRPr>
-            </a:pPr>
-            <a:r>
-              <a:rPr lang="en-IN" dirty="0"/>
-              <a:t>Serving existing PID data</a:t>
-            </a:r>
-          </a:p>
-          <a:p>
-            <a:pPr algn="ctr">
-              <a:defRPr sz="1800">
-                <a:solidFill>
-                  <a:srgbClr val="38BDF8"/>
-                </a:solidFill>
-              </a:defRPr>
-            </a:pPr>
-            <a:r>
-              <a:rPr lang="en-IN" dirty="0"/>
-              <a:t>(Not PID Sales)</a:t>
-            </a:r>
-            <a:endParaRPr dirty="0"/>
-          </a:p>
-        </p:txBody>
-      </p:sp>
-      <p:sp>
-        <p:nvSpPr>
-          <p:cNvPr id="5" name="TextBox 4"/>
-          <p:cNvSpPr txBox="1"/>
-          <p:nvPr/>
-        </p:nvSpPr>
-        <p:spPr>
-          <a:xfrm>
-            <a:off x="548640" y="6400800"/>
-            <a:ext cx="10972800" cy="228600"/>
-          </a:xfrm>
-          <a:prstGeom prst="rect">
-            <a:avLst/>
-          </a:prstGeom>
-          <a:noFill/>
-        </p:spPr>
-        <p:txBody>
-          <a:bodyPr wrap="none">
-            <a:spAutoFit/>
-          </a:bodyPr>
-          <a:lstStyle/>
-          <a:p>
-            <a:pPr algn="r">
-              <a:defRPr sz="900">
-                <a:solidFill>
-                  <a:srgbClr val="94A3B8"/>
-                </a:solidFill>
-              </a:defRPr>
-            </a:pPr>
-            <a:r>
-              <a:t>Doc-Intelligence-PID | Architecture Presentation</a:t>
-            </a:r>
-          </a:p>
-        </p:txBody>
-      </p:sp>
+        </p:spPr>
+      </p:pic>
     </p:spTree>
+    <p:extLst>
+      <p:ext uri="{BB962C8B-B14F-4D97-AF65-F5344CB8AC3E}">
+        <p14:creationId xmlns:p14="http://schemas.microsoft.com/office/powerpoint/2010/main" val="633858586"/>
+      </p:ext>
+    </p:extLst>
   </p:cSld>
   <p:clrMapOvr>
     <a:masterClrMapping/>
   </p:clrMapOvr>
-  <mc:AlternateContent xmlns:mc="http://schemas.openxmlformats.org/markup-compatibility/2006">
-    <mc:Choice xmlns:p14="http://schemas.microsoft.com/office/powerpoint/2010/main" Requires="p14">
-      <p:transition spd="slow" p14:dur="2000" advTm="306"/>
-    </mc:Choice>
-    <mc:Fallback>
-      <p:transition spd="slow" advTm="306"/>
-    </mc:Fallback>
-  </mc:AlternateContent>
+</p:sld>
+</file>
+
+<file path=ppt/slides/slide10.xml><?xml version="1.0" encoding="utf-8"?>
+<p:sld xmlns:a="http://schemas.openxmlformats.org/drawingml/2006/main" xmlns:r="http://schemas.openxmlformats.org/officeDocument/2006/relationships" xmlns:p="http://schemas.openxmlformats.org/presentationml/2006/main">
+  <p:cSld>
+    <p:spTree>
+      <p:nvGrpSpPr>
+        <p:cNvPr id="1" name=""/>
+        <p:cNvGrpSpPr/>
+        <p:nvPr/>
+      </p:nvGrpSpPr>
+      <p:grpSpPr>
+        <a:xfrm>
+          <a:off x="0" y="0"/>
+          <a:ext cx="0" cy="0"/>
+          <a:chOff x="0" y="0"/>
+          <a:chExt cx="0" cy="0"/>
+        </a:xfrm>
+      </p:grpSpPr>
+      <p:pic>
+        <p:nvPicPr>
+          <p:cNvPr id="3" name="Picture 2">
+            <a:extLst>
+              <a:ext uri="{FF2B5EF4-FFF2-40B4-BE49-F238E27FC236}">
+                <a16:creationId xmlns:a16="http://schemas.microsoft.com/office/drawing/2014/main" id="{0EC71FE6-B67B-1DF0-EB13-65B473EE423D}"/>
+              </a:ext>
+            </a:extLst>
+          </p:cNvPr>
+          <p:cNvPicPr>
+            <a:picLocks noChangeAspect="1"/>
+          </p:cNvPicPr>
+          <p:nvPr/>
+        </p:nvPicPr>
+        <p:blipFill>
+          <a:blip r:embed="rId2"/>
+          <a:stretch>
+            <a:fillRect/>
+          </a:stretch>
+        </p:blipFill>
+        <p:spPr>
+          <a:xfrm>
+            <a:off x="0" y="0"/>
+            <a:ext cx="12192000" cy="6858000"/>
+          </a:xfrm>
+          <a:prstGeom prst="rect">
+            <a:avLst/>
+          </a:prstGeom>
+        </p:spPr>
+      </p:pic>
+    </p:spTree>
+    <p:extLst>
+      <p:ext uri="{BB962C8B-B14F-4D97-AF65-F5344CB8AC3E}">
+        <p14:creationId xmlns:p14="http://schemas.microsoft.com/office/powerpoint/2010/main" val="3320512693"/>
+      </p:ext>
+    </p:extLst>
+  </p:cSld>
+  <p:clrMapOvr>
+    <a:masterClrMapping/>
+  </p:clrMapOvr>
 </p:sld>
 </file>
 
@@ -3513,7 +3255,7 @@
                   <a:srgbClr val="E2E8F0"/>
                 </a:solidFill>
               </a:rPr>
-              <a:t>Solution Architecture</a:t>
+              <a:t>Doc-Intelligence-PID</a:t>
             </a:r>
           </a:p>
           <a:p>
@@ -3525,21 +3267,67 @@
               </a:defRPr>
             </a:pPr>
             <a:r>
-              <a:t>Ultra-modern visual layout of the end-to-end system</a:t>
-            </a:r>
-          </a:p>
-        </p:txBody>
-      </p:sp>
-      <p:sp>
-        <p:nvSpPr>
-          <p:cNvPr id="6" name="TextBox 5"/>
+              <a:t>PowerPoint summary of the ultra-modern architecture and processing flow</a:t>
+            </a:r>
+          </a:p>
+        </p:txBody>
+      </p:sp>
+      <p:sp>
+        <p:nvSpPr>
+          <p:cNvPr id="3" name="Rounded Rectangle 2"/>
+          <p:cNvSpPr/>
+          <p:nvPr/>
+        </p:nvSpPr>
+        <p:spPr>
+          <a:xfrm>
+            <a:off x="640080" y="1280160"/>
+            <a:ext cx="10972800" cy="4389120"/>
+          </a:xfrm>
+          <a:prstGeom prst="roundRect">
+            <a:avLst/>
+          </a:prstGeom>
+          <a:solidFill>
+            <a:srgbClr val="1E293B"/>
+          </a:solidFill>
+          <a:ln w="25400">
+            <a:solidFill>
+              <a:srgbClr val="38BDF8"/>
+            </a:solidFill>
+          </a:ln>
+        </p:spPr>
+        <p:style>
+          <a:lnRef idx="1">
+            <a:schemeClr val="accent1"/>
+          </a:lnRef>
+          <a:fillRef idx="3">
+            <a:schemeClr val="accent1"/>
+          </a:fillRef>
+          <a:effectRef idx="2">
+            <a:schemeClr val="accent1"/>
+          </a:effectRef>
+          <a:fontRef idx="minor">
+            <a:schemeClr val="lt1"/>
+          </a:fontRef>
+        </p:style>
+        <p:txBody>
+          <a:bodyPr rtlCol="0" anchor="ctr"/>
+          <a:lstStyle/>
+          <a:p>
+            <a:pPr algn="ctr"/>
+            <a:endParaRPr/>
+          </a:p>
+        </p:txBody>
+      </p:sp>
+      <p:sp>
+        <p:nvSpPr>
+          <p:cNvPr id="4" name="TextBox 3"/>
           <p:cNvSpPr txBox="1"/>
           <p:nvPr/>
         </p:nvSpPr>
         <p:spPr>
           <a:xfrm>
-            <a:off x="548640" y="6400800"/>
-            <a:ext cx="10972800" cy="228600"/>
+            <a:off x="1164777" y="2031321"/>
+            <a:ext cx="9738692" cy="3170099"/>
           </a:xfrm>
           <a:prstGeom prst="rect">
             <a:avLst/>
@@ -3552,6 +3340,219 @@
           </a:bodyPr>
           <a:lstStyle/>
           <a:p>
+            <a:pPr algn="ctr">
+              <a:defRPr sz="3000" b="1">
+                <a:solidFill>
+                  <a:srgbClr val="E2E8F0"/>
+                </a:solidFill>
+              </a:defRPr>
+            </a:pPr>
+            <a:r>
+              <a:rPr dirty="0"/>
+              <a:t>AI Document Intelligence for Personal Insurance Documents</a:t>
+            </a:r>
+          </a:p>
+          <a:p>
+            <a:pPr algn="ctr">
+              <a:defRPr sz="1600">
+                <a:solidFill>
+                  <a:srgbClr val="94A3B8"/>
+                </a:solidFill>
+              </a:defRPr>
+            </a:pPr>
+            <a:r>
+              <a:rPr dirty="0"/>
+              <a:t>Frontend: ReactJS • Backend: </a:t>
+            </a:r>
+            <a:r>
+              <a:rPr dirty="0" err="1"/>
+              <a:t>FastAPI</a:t>
+            </a:r>
+            <a:r>
+              <a:rPr dirty="0"/>
+              <a:t> • Retrieval: </a:t>
+            </a:r>
+            <a:r>
+              <a:rPr lang="en-US" dirty="0"/>
+              <a:t>Agentic AI + </a:t>
+            </a:r>
+            <a:r>
+              <a:rPr dirty="0"/>
+              <a:t>FAISS • </a:t>
+            </a:r>
+            <a:r>
+              <a:rPr dirty="0" err="1"/>
+              <a:t>vLLM</a:t>
+            </a:r>
+            <a:r>
+              <a:rPr lang="en-US" dirty="0"/>
+              <a:t> with Vision (for OCR)</a:t>
+            </a:r>
+            <a:r>
+              <a:rPr dirty="0"/>
+              <a:t>: Qwen2.5</a:t>
+            </a:r>
+          </a:p>
+          <a:p>
+            <a:pPr algn="ctr">
+              <a:defRPr sz="1800">
+                <a:solidFill>
+                  <a:srgbClr val="38BDF8"/>
+                </a:solidFill>
+              </a:defRPr>
+            </a:pPr>
+            <a:r>
+              <a:rPr dirty="0"/>
+              <a:t>Output: Extracted text and </a:t>
+            </a:r>
+            <a:r>
+              <a:rPr lang="en-US" dirty="0"/>
+              <a:t>PID</a:t>
+            </a:r>
+            <a:r>
+              <a:rPr dirty="0"/>
+              <a:t> data </a:t>
+            </a:r>
+            <a:r>
+              <a:rPr lang="en-US" dirty="0"/>
+              <a:t>Served by </a:t>
+            </a:r>
+            <a:r>
+              <a:rPr lang="en-US" dirty="0" err="1"/>
+              <a:t>FastAPI</a:t>
+            </a:r>
+            <a:r>
+              <a:rPr lang="en-US" dirty="0"/>
+              <a:t> and rendered by </a:t>
+            </a:r>
+            <a:r>
+              <a:rPr dirty="0"/>
+              <a:t>React UI</a:t>
+            </a:r>
+            <a:endParaRPr lang="en-US" dirty="0"/>
+          </a:p>
+          <a:p>
+            <a:pPr algn="ctr">
+              <a:defRPr sz="1800">
+                <a:solidFill>
+                  <a:srgbClr val="38BDF8"/>
+                </a:solidFill>
+              </a:defRPr>
+            </a:pPr>
+            <a:r>
+              <a:rPr lang="en-IN" dirty="0"/>
+              <a:t>Customized and Restricted Backend Filters are used as Guard Rail</a:t>
+            </a:r>
+          </a:p>
+          <a:p>
+            <a:pPr algn="ctr">
+              <a:defRPr sz="1800">
+                <a:solidFill>
+                  <a:srgbClr val="38BDF8"/>
+                </a:solidFill>
+              </a:defRPr>
+            </a:pPr>
+            <a:endParaRPr lang="en-IN" dirty="0"/>
+          </a:p>
+          <a:p>
+            <a:pPr algn="ctr">
+              <a:defRPr sz="1800">
+                <a:solidFill>
+                  <a:srgbClr val="38BDF8"/>
+                </a:solidFill>
+              </a:defRPr>
+            </a:pPr>
+            <a:r>
+              <a:rPr lang="en-IN" sz="2800" dirty="0">
+                <a:solidFill>
+                  <a:schemeClr val="bg1"/>
+                </a:solidFill>
+              </a:rPr>
+              <a:t>Target Audience</a:t>
+            </a:r>
+          </a:p>
+          <a:p>
+            <a:pPr algn="ctr">
+              <a:defRPr sz="1800">
+                <a:solidFill>
+                  <a:srgbClr val="38BDF8"/>
+                </a:solidFill>
+              </a:defRPr>
+            </a:pPr>
+            <a:r>
+              <a:rPr lang="en-IN" dirty="0"/>
+              <a:t>Personal Insurance Service Executives</a:t>
+            </a:r>
+          </a:p>
+          <a:p>
+            <a:pPr algn="ctr">
+              <a:defRPr sz="1800">
+                <a:solidFill>
+                  <a:srgbClr val="38BDF8"/>
+                </a:solidFill>
+              </a:defRPr>
+            </a:pPr>
+            <a:r>
+              <a:rPr lang="en-IN" dirty="0"/>
+              <a:t>Personal Insurance </a:t>
+            </a:r>
+            <a:r>
+              <a:rPr lang="en-IN" dirty="0" err="1"/>
+              <a:t>SPoC</a:t>
+            </a:r>
+            <a:endParaRPr lang="en-IN" dirty="0"/>
+          </a:p>
+          <a:p>
+            <a:pPr algn="ctr">
+              <a:defRPr sz="1800">
+                <a:solidFill>
+                  <a:srgbClr val="38BDF8"/>
+                </a:solidFill>
+              </a:defRPr>
+            </a:pPr>
+            <a:r>
+              <a:rPr lang="en-IN" dirty="0"/>
+              <a:t>Serving existing PID data</a:t>
+            </a:r>
+          </a:p>
+          <a:p>
+            <a:pPr algn="ctr">
+              <a:defRPr sz="1800">
+                <a:solidFill>
+                  <a:srgbClr val="38BDF8"/>
+                </a:solidFill>
+              </a:defRPr>
+            </a:pPr>
+            <a:r>
+              <a:rPr lang="en-IN" dirty="0"/>
+              <a:t>(Not PID Sales)</a:t>
+            </a:r>
+            <a:endParaRPr dirty="0"/>
+          </a:p>
+        </p:txBody>
+      </p:sp>
+      <p:sp>
+        <p:nvSpPr>
+          <p:cNvPr id="5" name="TextBox 4"/>
+          <p:cNvSpPr txBox="1"/>
+          <p:nvPr/>
+        </p:nvSpPr>
+        <p:spPr>
+          <a:xfrm>
+            <a:off x="548640" y="6400800"/>
+            <a:ext cx="10972800" cy="228600"/>
+          </a:xfrm>
+          <a:prstGeom prst="rect">
+            <a:avLst/>
+          </a:prstGeom>
+          <a:noFill/>
+        </p:spPr>
+        <p:txBody>
+          <a:bodyPr wrap="none">
+            <a:spAutoFit/>
+          </a:bodyPr>
+          <a:lstStyle/>
+          <a:p>
             <a:pPr algn="r">
               <a:defRPr sz="900">
                 <a:solidFill>
@@ -3565,41 +3566,19 @@
           </a:p>
         </p:txBody>
       </p:sp>
-      <p:pic>
-        <p:nvPicPr>
-          <p:cNvPr id="8" name="Picture 7">
-            <a:extLst>
-              <a:ext uri="{FF2B5EF4-FFF2-40B4-BE49-F238E27FC236}">
-                <a16:creationId xmlns:a16="http://schemas.microsoft.com/office/drawing/2014/main" id="{4AB0A16D-AFBD-2F47-A362-B8F0F44ABE4C}"/>
-              </a:ext>
-            </a:extLst>
-          </p:cNvPr>
-          <p:cNvPicPr>
-            <a:picLocks noChangeAspect="1"/>
-          </p:cNvPicPr>
-          <p:nvPr/>
-        </p:nvPicPr>
-        <p:blipFill>
-          <a:blip r:embed="rId2"/>
-          <a:stretch>
-            <a:fillRect/>
-          </a:stretch>
-        </p:blipFill>
-        <p:spPr>
-          <a:xfrm>
-            <a:off x="0" y="62506"/>
-            <a:ext cx="12192000" cy="6732987"/>
-          </a:xfrm>
-          <a:prstGeom prst="rect">
-            <a:avLst/>
-          </a:prstGeom>
-        </p:spPr>
-      </p:pic>
     </p:spTree>
   </p:cSld>
   <p:clrMapOvr>
     <a:masterClrMapping/>
   </p:clrMapOvr>
+  <mc:AlternateContent xmlns:mc="http://schemas.openxmlformats.org/markup-compatibility/2006" xmlns:p14="http://schemas.microsoft.com/office/powerpoint/2010/main">
+    <mc:Choice Requires="p14">
+      <p:transition spd="slow" p14:dur="2000" advTm="306"/>
+    </mc:Choice>
+    <mc:Fallback xmlns="">
+      <p:transition spd="slow" advTm="306"/>
+    </mc:Fallback>
+  </mc:AlternateContent>
 </p:sld>
 </file>
 
@@ -3656,7 +3635,7 @@
                   <a:srgbClr val="E2E8F0"/>
                 </a:solidFill>
               </a:rPr>
-              <a:t>Core Components</a:t>
+              <a:t>Solution Architecture</a:t>
             </a:r>
           </a:p>
           <a:p>
@@ -3668,67 +3647,21 @@
               </a:defRPr>
             </a:pPr>
             <a:r>
-              <a:t>What each layer is responsible for</a:t>
-            </a:r>
-          </a:p>
-        </p:txBody>
-      </p:sp>
-      <p:sp>
-        <p:nvSpPr>
-          <p:cNvPr id="3" name="Rounded Rectangle 2"/>
-          <p:cNvSpPr/>
-          <p:nvPr/>
-        </p:nvSpPr>
-        <p:spPr>
-          <a:xfrm>
-            <a:off x="640080" y="1188720"/>
-            <a:ext cx="2651760" cy="1920240"/>
-          </a:xfrm>
-          <a:prstGeom prst="roundRect">
-            <a:avLst/>
-          </a:prstGeom>
-          <a:solidFill>
-            <a:srgbClr val="1E293B"/>
-          </a:solidFill>
-          <a:ln w="19050">
-            <a:solidFill>
-              <a:srgbClr val="38BDF8"/>
-            </a:solidFill>
-          </a:ln>
-        </p:spPr>
-        <p:style>
-          <a:lnRef idx="1">
-            <a:schemeClr val="accent1"/>
-          </a:lnRef>
-          <a:fillRef idx="3">
-            <a:schemeClr val="accent1"/>
-          </a:fillRef>
-          <a:effectRef idx="2">
-            <a:schemeClr val="accent1"/>
-          </a:effectRef>
-          <a:fontRef idx="minor">
-            <a:schemeClr val="lt1"/>
-          </a:fontRef>
-        </p:style>
-        <p:txBody>
-          <a:bodyPr rtlCol="0" anchor="ctr"/>
-          <a:lstStyle/>
-          <a:p>
-            <a:pPr algn="ctr"/>
-            <a:endParaRPr/>
-          </a:p>
-        </p:txBody>
-      </p:sp>
-      <p:sp>
-        <p:nvSpPr>
-          <p:cNvPr id="4" name="TextBox 3"/>
+              <a:t>Ultra-modern visual layout of the end-to-end system</a:t>
+            </a:r>
+          </a:p>
+        </p:txBody>
+      </p:sp>
+      <p:sp>
+        <p:nvSpPr>
+          <p:cNvPr id="6" name="TextBox 5"/>
           <p:cNvSpPr txBox="1"/>
           <p:nvPr/>
         </p:nvSpPr>
         <p:spPr>
           <a:xfrm>
-            <a:off x="804672" y="1298448"/>
-            <a:ext cx="2377440" cy="320040"/>
+            <a:off x="548640" y="6400800"/>
+            <a:ext cx="10972800" cy="228600"/>
           </a:xfrm>
           <a:prstGeom prst="rect">
             <a:avLst/>
@@ -3741,796 +3674,6 @@
           </a:bodyPr>
           <a:lstStyle/>
           <a:p>
-            <a:pPr>
-              <a:defRPr sz="1600" b="1">
-                <a:solidFill>
-                  <a:srgbClr val="E2E8F0"/>
-                </a:solidFill>
-              </a:defRPr>
-            </a:pPr>
-            <a:r>
-              <a:t>Frontend</a:t>
-            </a:r>
-          </a:p>
-        </p:txBody>
-      </p:sp>
-      <p:sp>
-        <p:nvSpPr>
-          <p:cNvPr id="5" name="TextBox 4"/>
-          <p:cNvSpPr txBox="1"/>
-          <p:nvPr/>
-        </p:nvSpPr>
-        <p:spPr>
-          <a:xfrm>
-            <a:off x="804672" y="1645920"/>
-            <a:ext cx="2377440" cy="1371600"/>
-          </a:xfrm>
-          <a:prstGeom prst="rect">
-            <a:avLst/>
-          </a:prstGeom>
-          <a:noFill/>
-        </p:spPr>
-        <p:txBody>
-          <a:bodyPr wrap="square">
-            <a:spAutoFit/>
-          </a:bodyPr>
-          <a:lstStyle/>
-          <a:p>
-            <a:pPr>
-              <a:defRPr sz="1200">
-                <a:solidFill>
-                  <a:srgbClr val="E2E8F0"/>
-                </a:solidFill>
-              </a:defRPr>
-            </a:pPr>
-            <a:r>
-              <a:t>ReactJS on Node 18</a:t>
-            </a:r>
-          </a:p>
-          <a:p>
-            <a:pPr>
-              <a:defRPr sz="1200">
-                <a:solidFill>
-                  <a:srgbClr val="E2E8F0"/>
-                </a:solidFill>
-              </a:defRPr>
-            </a:pPr>
-            <a:r>
-              <a:t>Axios for API communication</a:t>
-            </a:r>
-          </a:p>
-          <a:p>
-            <a:pPr>
-              <a:defRPr sz="1200">
-                <a:solidFill>
-                  <a:srgbClr val="E2E8F0"/>
-                </a:solidFill>
-              </a:defRPr>
-            </a:pPr>
-            <a:r>
-              <a:t>UI for search, upload, and result display</a:t>
-            </a:r>
-          </a:p>
-        </p:txBody>
-      </p:sp>
-      <p:sp>
-        <p:nvSpPr>
-          <p:cNvPr id="6" name="Rounded Rectangle 5"/>
-          <p:cNvSpPr/>
-          <p:nvPr/>
-        </p:nvSpPr>
-        <p:spPr>
-          <a:xfrm>
-            <a:off x="3566160" y="1188720"/>
-            <a:ext cx="2651760" cy="1920240"/>
-          </a:xfrm>
-          <a:prstGeom prst="roundRect">
-            <a:avLst/>
-          </a:prstGeom>
-          <a:solidFill>
-            <a:srgbClr val="1E293B"/>
-          </a:solidFill>
-          <a:ln w="19050">
-            <a:solidFill>
-              <a:srgbClr val="22C55E"/>
-            </a:solidFill>
-          </a:ln>
-        </p:spPr>
-        <p:style>
-          <a:lnRef idx="1">
-            <a:schemeClr val="accent1"/>
-          </a:lnRef>
-          <a:fillRef idx="3">
-            <a:schemeClr val="accent1"/>
-          </a:fillRef>
-          <a:effectRef idx="2">
-            <a:schemeClr val="accent1"/>
-          </a:effectRef>
-          <a:fontRef idx="minor">
-            <a:schemeClr val="lt1"/>
-          </a:fontRef>
-        </p:style>
-        <p:txBody>
-          <a:bodyPr rtlCol="0" anchor="ctr"/>
-          <a:lstStyle/>
-          <a:p>
-            <a:pPr algn="ctr"/>
-            <a:endParaRPr/>
-          </a:p>
-        </p:txBody>
-      </p:sp>
-      <p:sp>
-        <p:nvSpPr>
-          <p:cNvPr id="7" name="TextBox 6"/>
-          <p:cNvSpPr txBox="1"/>
-          <p:nvPr/>
-        </p:nvSpPr>
-        <p:spPr>
-          <a:xfrm>
-            <a:off x="3730752" y="1298448"/>
-            <a:ext cx="2377440" cy="320040"/>
-          </a:xfrm>
-          <a:prstGeom prst="rect">
-            <a:avLst/>
-          </a:prstGeom>
-          <a:noFill/>
-        </p:spPr>
-        <p:txBody>
-          <a:bodyPr wrap="none">
-            <a:spAutoFit/>
-          </a:bodyPr>
-          <a:lstStyle/>
-          <a:p>
-            <a:pPr>
-              <a:defRPr sz="1600" b="1">
-                <a:solidFill>
-                  <a:srgbClr val="E2E8F0"/>
-                </a:solidFill>
-              </a:defRPr>
-            </a:pPr>
-            <a:r>
-              <a:t>Backend</a:t>
-            </a:r>
-          </a:p>
-        </p:txBody>
-      </p:sp>
-      <p:sp>
-        <p:nvSpPr>
-          <p:cNvPr id="8" name="TextBox 7"/>
-          <p:cNvSpPr txBox="1"/>
-          <p:nvPr/>
-        </p:nvSpPr>
-        <p:spPr>
-          <a:xfrm>
-            <a:off x="3730752" y="1645920"/>
-            <a:ext cx="2377440" cy="1371600"/>
-          </a:xfrm>
-          <a:prstGeom prst="rect">
-            <a:avLst/>
-          </a:prstGeom>
-          <a:noFill/>
-        </p:spPr>
-        <p:txBody>
-          <a:bodyPr wrap="square">
-            <a:spAutoFit/>
-          </a:bodyPr>
-          <a:lstStyle/>
-          <a:p>
-            <a:pPr>
-              <a:defRPr sz="1200">
-                <a:solidFill>
-                  <a:srgbClr val="E2E8F0"/>
-                </a:solidFill>
-              </a:defRPr>
-            </a:pPr>
-            <a:r>
-              <a:t>FastAPI on Python 3.11</a:t>
-            </a:r>
-          </a:p>
-          <a:p>
-            <a:pPr>
-              <a:defRPr sz="1200">
-                <a:solidFill>
-                  <a:srgbClr val="E2E8F0"/>
-                </a:solidFill>
-              </a:defRPr>
-            </a:pPr>
-            <a:r>
-              <a:t>Conda environment</a:t>
-            </a:r>
-          </a:p>
-          <a:p>
-            <a:pPr>
-              <a:defRPr sz="1200">
-                <a:solidFill>
-                  <a:srgbClr val="E2E8F0"/>
-                </a:solidFill>
-              </a:defRPr>
-            </a:pPr>
-            <a:r>
-              <a:t>Request routing and result serving</a:t>
-            </a:r>
-          </a:p>
-        </p:txBody>
-      </p:sp>
-      <p:sp>
-        <p:nvSpPr>
-          <p:cNvPr id="9" name="Rounded Rectangle 8"/>
-          <p:cNvSpPr/>
-          <p:nvPr/>
-        </p:nvSpPr>
-        <p:spPr>
-          <a:xfrm>
-            <a:off x="6492240" y="1188720"/>
-            <a:ext cx="2651760" cy="1920240"/>
-          </a:xfrm>
-          <a:prstGeom prst="roundRect">
-            <a:avLst/>
-          </a:prstGeom>
-          <a:solidFill>
-            <a:srgbClr val="1E293B"/>
-          </a:solidFill>
-          <a:ln w="19050">
-            <a:solidFill>
-              <a:srgbClr val="FBBF24"/>
-            </a:solidFill>
-          </a:ln>
-        </p:spPr>
-        <p:style>
-          <a:lnRef idx="1">
-            <a:schemeClr val="accent1"/>
-          </a:lnRef>
-          <a:fillRef idx="3">
-            <a:schemeClr val="accent1"/>
-          </a:fillRef>
-          <a:effectRef idx="2">
-            <a:schemeClr val="accent1"/>
-          </a:effectRef>
-          <a:fontRef idx="minor">
-            <a:schemeClr val="lt1"/>
-          </a:fontRef>
-        </p:style>
-        <p:txBody>
-          <a:bodyPr rtlCol="0" anchor="ctr"/>
-          <a:lstStyle/>
-          <a:p>
-            <a:pPr algn="ctr"/>
-            <a:endParaRPr/>
-          </a:p>
-        </p:txBody>
-      </p:sp>
-      <p:sp>
-        <p:nvSpPr>
-          <p:cNvPr id="10" name="TextBox 9"/>
-          <p:cNvSpPr txBox="1"/>
-          <p:nvPr/>
-        </p:nvSpPr>
-        <p:spPr>
-          <a:xfrm>
-            <a:off x="6656832" y="1298448"/>
-            <a:ext cx="2377440" cy="320040"/>
-          </a:xfrm>
-          <a:prstGeom prst="rect">
-            <a:avLst/>
-          </a:prstGeom>
-          <a:noFill/>
-        </p:spPr>
-        <p:txBody>
-          <a:bodyPr wrap="none">
-            <a:spAutoFit/>
-          </a:bodyPr>
-          <a:lstStyle/>
-          <a:p>
-            <a:pPr>
-              <a:defRPr sz="1600" b="1">
-                <a:solidFill>
-                  <a:srgbClr val="E2E8F0"/>
-                </a:solidFill>
-              </a:defRPr>
-            </a:pPr>
-            <a:r>
-              <a:t>Agentic AI</a:t>
-            </a:r>
-          </a:p>
-        </p:txBody>
-      </p:sp>
-      <p:sp>
-        <p:nvSpPr>
-          <p:cNvPr id="11" name="TextBox 10"/>
-          <p:cNvSpPr txBox="1"/>
-          <p:nvPr/>
-        </p:nvSpPr>
-        <p:spPr>
-          <a:xfrm>
-            <a:off x="6656832" y="1645920"/>
-            <a:ext cx="2377440" cy="646331"/>
-          </a:xfrm>
-          <a:prstGeom prst="rect">
-            <a:avLst/>
-          </a:prstGeom>
-          <a:noFill/>
-        </p:spPr>
-        <p:txBody>
-          <a:bodyPr wrap="square">
-            <a:spAutoFit/>
-          </a:bodyPr>
-          <a:lstStyle/>
-          <a:p>
-            <a:pPr>
-              <a:defRPr sz="1200">
-                <a:solidFill>
-                  <a:srgbClr val="E2E8F0"/>
-                </a:solidFill>
-              </a:defRPr>
-            </a:pPr>
-            <a:r>
-              <a:rPr dirty="0"/>
-              <a:t>Sentence Transformers </a:t>
-            </a:r>
-            <a:r>
-              <a:rPr lang="en-US" dirty="0"/>
-              <a:t>mini LLM</a:t>
-            </a:r>
-            <a:endParaRPr dirty="0"/>
-          </a:p>
-          <a:p>
-            <a:pPr>
-              <a:defRPr sz="1200">
-                <a:solidFill>
-                  <a:srgbClr val="E2E8F0"/>
-                </a:solidFill>
-              </a:defRPr>
-            </a:pPr>
-            <a:r>
-              <a:rPr dirty="0"/>
-              <a:t>Request/response orchestration</a:t>
-            </a:r>
-          </a:p>
-          <a:p>
-            <a:pPr>
-              <a:defRPr sz="1200">
-                <a:solidFill>
-                  <a:srgbClr val="E2E8F0"/>
-                </a:solidFill>
-              </a:defRPr>
-            </a:pPr>
-            <a:r>
-              <a:rPr dirty="0"/>
-              <a:t>Context building for retrieval</a:t>
-            </a:r>
-          </a:p>
-        </p:txBody>
-      </p:sp>
-      <p:sp>
-        <p:nvSpPr>
-          <p:cNvPr id="12" name="Rounded Rectangle 11"/>
-          <p:cNvSpPr/>
-          <p:nvPr/>
-        </p:nvSpPr>
-        <p:spPr>
-          <a:xfrm>
-            <a:off x="9418320" y="1188720"/>
-            <a:ext cx="2103120" cy="1920240"/>
-          </a:xfrm>
-          <a:prstGeom prst="roundRect">
-            <a:avLst/>
-          </a:prstGeom>
-          <a:solidFill>
-            <a:srgbClr val="1E293B"/>
-          </a:solidFill>
-          <a:ln w="19050">
-            <a:solidFill>
-              <a:srgbClr val="F87171"/>
-            </a:solidFill>
-          </a:ln>
-        </p:spPr>
-        <p:style>
-          <a:lnRef idx="1">
-            <a:schemeClr val="accent1"/>
-          </a:lnRef>
-          <a:fillRef idx="3">
-            <a:schemeClr val="accent1"/>
-          </a:fillRef>
-          <a:effectRef idx="2">
-            <a:schemeClr val="accent1"/>
-          </a:effectRef>
-          <a:fontRef idx="minor">
-            <a:schemeClr val="lt1"/>
-          </a:fontRef>
-        </p:style>
-        <p:txBody>
-          <a:bodyPr rtlCol="0" anchor="ctr"/>
-          <a:lstStyle/>
-          <a:p>
-            <a:pPr algn="ctr"/>
-            <a:endParaRPr/>
-          </a:p>
-        </p:txBody>
-      </p:sp>
-      <p:sp>
-        <p:nvSpPr>
-          <p:cNvPr id="13" name="TextBox 12"/>
-          <p:cNvSpPr txBox="1"/>
-          <p:nvPr/>
-        </p:nvSpPr>
-        <p:spPr>
-          <a:xfrm>
-            <a:off x="9582912" y="1298448"/>
-            <a:ext cx="1828800" cy="320040"/>
-          </a:xfrm>
-          <a:prstGeom prst="rect">
-            <a:avLst/>
-          </a:prstGeom>
-          <a:noFill/>
-        </p:spPr>
-        <p:txBody>
-          <a:bodyPr wrap="none">
-            <a:spAutoFit/>
-          </a:bodyPr>
-          <a:lstStyle/>
-          <a:p>
-            <a:pPr>
-              <a:defRPr sz="1600" b="1">
-                <a:solidFill>
-                  <a:srgbClr val="E2E8F0"/>
-                </a:solidFill>
-              </a:defRPr>
-            </a:pPr>
-            <a:r>
-              <a:t>FAISS</a:t>
-            </a:r>
-          </a:p>
-        </p:txBody>
-      </p:sp>
-      <p:sp>
-        <p:nvSpPr>
-          <p:cNvPr id="14" name="TextBox 13"/>
-          <p:cNvSpPr txBox="1"/>
-          <p:nvPr/>
-        </p:nvSpPr>
-        <p:spPr>
-          <a:xfrm>
-            <a:off x="9582912" y="1645920"/>
-            <a:ext cx="1828800" cy="1371600"/>
-          </a:xfrm>
-          <a:prstGeom prst="rect">
-            <a:avLst/>
-          </a:prstGeom>
-          <a:noFill/>
-        </p:spPr>
-        <p:txBody>
-          <a:bodyPr wrap="square">
-            <a:spAutoFit/>
-          </a:bodyPr>
-          <a:lstStyle/>
-          <a:p>
-            <a:pPr>
-              <a:defRPr sz="1200">
-                <a:solidFill>
-                  <a:srgbClr val="E2E8F0"/>
-                </a:solidFill>
-              </a:defRPr>
-            </a:pPr>
-            <a:r>
-              <a:t>Vector index</a:t>
-            </a:r>
-          </a:p>
-          <a:p>
-            <a:pPr>
-              <a:defRPr sz="1200">
-                <a:solidFill>
-                  <a:srgbClr val="E2E8F0"/>
-                </a:solidFill>
-              </a:defRPr>
-            </a:pPr>
-            <a:r>
-              <a:t>Top-K semantic retrieval</a:t>
-            </a:r>
-          </a:p>
-        </p:txBody>
-      </p:sp>
-      <p:sp>
-        <p:nvSpPr>
-          <p:cNvPr id="15" name="Rounded Rectangle 14"/>
-          <p:cNvSpPr/>
-          <p:nvPr/>
-        </p:nvSpPr>
-        <p:spPr>
-          <a:xfrm>
-            <a:off x="1920240" y="3657600"/>
-            <a:ext cx="3657600" cy="1828800"/>
-          </a:xfrm>
-          <a:prstGeom prst="roundRect">
-            <a:avLst/>
-          </a:prstGeom>
-          <a:solidFill>
-            <a:srgbClr val="1E293B"/>
-          </a:solidFill>
-          <a:ln w="19050">
-            <a:solidFill>
-              <a:srgbClr val="A78BFA"/>
-            </a:solidFill>
-          </a:ln>
-        </p:spPr>
-        <p:style>
-          <a:lnRef idx="1">
-            <a:schemeClr val="accent1"/>
-          </a:lnRef>
-          <a:fillRef idx="3">
-            <a:schemeClr val="accent1"/>
-          </a:fillRef>
-          <a:effectRef idx="2">
-            <a:schemeClr val="accent1"/>
-          </a:effectRef>
-          <a:fontRef idx="minor">
-            <a:schemeClr val="lt1"/>
-          </a:fontRef>
-        </p:style>
-        <p:txBody>
-          <a:bodyPr rtlCol="0" anchor="ctr"/>
-          <a:lstStyle/>
-          <a:p>
-            <a:pPr algn="ctr"/>
-            <a:endParaRPr/>
-          </a:p>
-        </p:txBody>
-      </p:sp>
-      <p:sp>
-        <p:nvSpPr>
-          <p:cNvPr id="16" name="TextBox 15"/>
-          <p:cNvSpPr txBox="1"/>
-          <p:nvPr/>
-        </p:nvSpPr>
-        <p:spPr>
-          <a:xfrm>
-            <a:off x="2084832" y="3767328"/>
-            <a:ext cx="3383280" cy="320040"/>
-          </a:xfrm>
-          <a:prstGeom prst="rect">
-            <a:avLst/>
-          </a:prstGeom>
-          <a:noFill/>
-        </p:spPr>
-        <p:txBody>
-          <a:bodyPr wrap="none">
-            <a:spAutoFit/>
-          </a:bodyPr>
-          <a:lstStyle/>
-          <a:p>
-            <a:pPr>
-              <a:defRPr sz="1600" b="1">
-                <a:solidFill>
-                  <a:srgbClr val="E2E8F0"/>
-                </a:solidFill>
-              </a:defRPr>
-            </a:pPr>
-            <a:r>
-              <a:t>vLLM / Qwen2.5</a:t>
-            </a:r>
-          </a:p>
-        </p:txBody>
-      </p:sp>
-      <p:sp>
-        <p:nvSpPr>
-          <p:cNvPr id="17" name="TextBox 16"/>
-          <p:cNvSpPr txBox="1"/>
-          <p:nvPr/>
-        </p:nvSpPr>
-        <p:spPr>
-          <a:xfrm>
-            <a:off x="2084832" y="4114800"/>
-            <a:ext cx="3383280" cy="1280160"/>
-          </a:xfrm>
-          <a:prstGeom prst="rect">
-            <a:avLst/>
-          </a:prstGeom>
-          <a:noFill/>
-        </p:spPr>
-        <p:txBody>
-          <a:bodyPr wrap="square">
-            <a:spAutoFit/>
-          </a:bodyPr>
-          <a:lstStyle/>
-          <a:p>
-            <a:pPr>
-              <a:defRPr sz="1200">
-                <a:solidFill>
-                  <a:srgbClr val="E2E8F0"/>
-                </a:solidFill>
-              </a:defRPr>
-            </a:pPr>
-            <a:r>
-              <a:t>Processes retrieved context</a:t>
-            </a:r>
-          </a:p>
-          <a:p>
-            <a:pPr>
-              <a:defRPr sz="1200">
-                <a:solidFill>
-                  <a:srgbClr val="E2E8F0"/>
-                </a:solidFill>
-              </a:defRPr>
-            </a:pPr>
-            <a:r>
-              <a:t>Extracts text and transaction data</a:t>
-            </a:r>
-          </a:p>
-          <a:p>
-            <a:pPr>
-              <a:defRPr sz="1200">
-                <a:solidFill>
-                  <a:srgbClr val="E2E8F0"/>
-                </a:solidFill>
-              </a:defRPr>
-            </a:pPr>
-            <a:r>
-              <a:t>Powers final responses</a:t>
-            </a:r>
-          </a:p>
-        </p:txBody>
-      </p:sp>
-      <p:sp>
-        <p:nvSpPr>
-          <p:cNvPr id="18" name="Rounded Rectangle 17"/>
-          <p:cNvSpPr/>
-          <p:nvPr/>
-        </p:nvSpPr>
-        <p:spPr>
-          <a:xfrm>
-            <a:off x="6035040" y="3657600"/>
-            <a:ext cx="3657600" cy="1828800"/>
-          </a:xfrm>
-          <a:prstGeom prst="roundRect">
-            <a:avLst/>
-          </a:prstGeom>
-          <a:solidFill>
-            <a:srgbClr val="1E293B"/>
-          </a:solidFill>
-          <a:ln w="19050">
-            <a:solidFill>
-              <a:srgbClr val="38BDF8"/>
-            </a:solidFill>
-          </a:ln>
-        </p:spPr>
-        <p:style>
-          <a:lnRef idx="1">
-            <a:schemeClr val="accent1"/>
-          </a:lnRef>
-          <a:fillRef idx="3">
-            <a:schemeClr val="accent1"/>
-          </a:fillRef>
-          <a:effectRef idx="2">
-            <a:schemeClr val="accent1"/>
-          </a:effectRef>
-          <a:fontRef idx="minor">
-            <a:schemeClr val="lt1"/>
-          </a:fontRef>
-        </p:style>
-        <p:txBody>
-          <a:bodyPr rtlCol="0" anchor="ctr"/>
-          <a:lstStyle/>
-          <a:p>
-            <a:pPr algn="ctr"/>
-            <a:endParaRPr/>
-          </a:p>
-        </p:txBody>
-      </p:sp>
-      <p:sp>
-        <p:nvSpPr>
-          <p:cNvPr id="19" name="TextBox 18"/>
-          <p:cNvSpPr txBox="1"/>
-          <p:nvPr/>
-        </p:nvSpPr>
-        <p:spPr>
-          <a:xfrm>
-            <a:off x="6199632" y="3767328"/>
-            <a:ext cx="3383280" cy="320040"/>
-          </a:xfrm>
-          <a:prstGeom prst="rect">
-            <a:avLst/>
-          </a:prstGeom>
-          <a:noFill/>
-        </p:spPr>
-        <p:txBody>
-          <a:bodyPr wrap="none">
-            <a:spAutoFit/>
-          </a:bodyPr>
-          <a:lstStyle/>
-          <a:p>
-            <a:pPr>
-              <a:defRPr sz="1600" b="1">
-                <a:solidFill>
-                  <a:srgbClr val="E2E8F0"/>
-                </a:solidFill>
-              </a:defRPr>
-            </a:pPr>
-            <a:r>
-              <a:t>Document Pipeline</a:t>
-            </a:r>
-          </a:p>
-        </p:txBody>
-      </p:sp>
-      <p:sp>
-        <p:nvSpPr>
-          <p:cNvPr id="20" name="TextBox 19"/>
-          <p:cNvSpPr txBox="1"/>
-          <p:nvPr/>
-        </p:nvSpPr>
-        <p:spPr>
-          <a:xfrm>
-            <a:off x="6199632" y="4114800"/>
-            <a:ext cx="3383280" cy="1280160"/>
-          </a:xfrm>
-          <a:prstGeom prst="rect">
-            <a:avLst/>
-          </a:prstGeom>
-          <a:noFill/>
-        </p:spPr>
-        <p:txBody>
-          <a:bodyPr wrap="square">
-            <a:spAutoFit/>
-          </a:bodyPr>
-          <a:lstStyle/>
-          <a:p>
-            <a:pPr>
-              <a:defRPr sz="1200">
-                <a:solidFill>
-                  <a:srgbClr val="E2E8F0"/>
-                </a:solidFill>
-              </a:defRPr>
-            </a:pPr>
-            <a:r>
-              <a:t>PDF ingestion</a:t>
-            </a:r>
-          </a:p>
-          <a:p>
-            <a:pPr>
-              <a:defRPr sz="1200">
-                <a:solidFill>
-                  <a:srgbClr val="E2E8F0"/>
-                </a:solidFill>
-              </a:defRPr>
-            </a:pPr>
-            <a:r>
-              <a:t>Extraction, chunking, embeddings, indexing</a:t>
-            </a:r>
-          </a:p>
-          <a:p>
-            <a:pPr>
-              <a:defRPr sz="1200">
-                <a:solidFill>
-                  <a:srgbClr val="E2E8F0"/>
-                </a:solidFill>
-              </a:defRPr>
-            </a:pPr>
-            <a:r>
-              <a:t>Feeds searchable content into FAISS</a:t>
-            </a:r>
-          </a:p>
-        </p:txBody>
-      </p:sp>
-      <p:sp>
-        <p:nvSpPr>
-          <p:cNvPr id="21" name="TextBox 20"/>
-          <p:cNvSpPr txBox="1"/>
-          <p:nvPr/>
-        </p:nvSpPr>
-        <p:spPr>
-          <a:xfrm>
-            <a:off x="548640" y="6400800"/>
-            <a:ext cx="10972800" cy="228600"/>
-          </a:xfrm>
-          <a:prstGeom prst="rect">
-            <a:avLst/>
-          </a:prstGeom>
-          <a:noFill/>
-        </p:spPr>
-        <p:txBody>
-          <a:bodyPr wrap="none">
-            <a:spAutoFit/>
-          </a:bodyPr>
-          <a:lstStyle/>
-          <a:p>
             <a:pPr algn="r">
               <a:defRPr sz="900">
                 <a:solidFill>
@@ -4544,6 +3687,36 @@
           </a:p>
         </p:txBody>
       </p:sp>
+      <p:pic>
+        <p:nvPicPr>
+          <p:cNvPr id="8" name="Picture 7">
+            <a:extLst>
+              <a:ext uri="{FF2B5EF4-FFF2-40B4-BE49-F238E27FC236}">
+                <a16:creationId xmlns:a16="http://schemas.microsoft.com/office/drawing/2014/main" id="{4AB0A16D-AFBD-2F47-A362-B8F0F44ABE4C}"/>
+              </a:ext>
+            </a:extLst>
+          </p:cNvPr>
+          <p:cNvPicPr>
+            <a:picLocks noChangeAspect="1"/>
+          </p:cNvPicPr>
+          <p:nvPr/>
+        </p:nvPicPr>
+        <p:blipFill>
+          <a:blip r:embed="rId2"/>
+          <a:stretch>
+            <a:fillRect/>
+          </a:stretch>
+        </p:blipFill>
+        <p:spPr>
+          <a:xfrm>
+            <a:off x="0" y="62506"/>
+            <a:ext cx="12192000" cy="6732987"/>
+          </a:xfrm>
+          <a:prstGeom prst="rect">
+            <a:avLst/>
+          </a:prstGeom>
+        </p:spPr>
+      </p:pic>
     </p:spTree>
   </p:cSld>
   <p:clrMapOvr>
@@ -4605,7 +3778,7 @@
                   <a:srgbClr val="E2E8F0"/>
                 </a:solidFill>
               </a:rPr>
-              <a:t>Ingestion Pipeline</a:t>
+              <a:t>Core Components</a:t>
             </a:r>
           </a:p>
           <a:p>
@@ -4617,7 +3790,7 @@
               </a:defRPr>
             </a:pPr>
             <a:r>
-              <a:t>How PDF documents become searchable assets</a:t>
+              <a:t>What each layer is responsible for</a:t>
             </a:r>
           </a:p>
         </p:txBody>
@@ -4630,8 +3803,288 @@
         </p:nvSpPr>
         <p:spPr>
           <a:xfrm>
-            <a:off x="594360" y="2011680"/>
-            <a:ext cx="1920240" cy="2011680"/>
+            <a:off x="640080" y="1188720"/>
+            <a:ext cx="2651760" cy="1920240"/>
+          </a:xfrm>
+          <a:prstGeom prst="roundRect">
+            <a:avLst/>
+          </a:prstGeom>
+          <a:solidFill>
+            <a:srgbClr val="1E293B"/>
+          </a:solidFill>
+          <a:ln w="19050">
+            <a:solidFill>
+              <a:srgbClr val="38BDF8"/>
+            </a:solidFill>
+          </a:ln>
+        </p:spPr>
+        <p:style>
+          <a:lnRef idx="1">
+            <a:schemeClr val="accent1"/>
+          </a:lnRef>
+          <a:fillRef idx="3">
+            <a:schemeClr val="accent1"/>
+          </a:fillRef>
+          <a:effectRef idx="2">
+            <a:schemeClr val="accent1"/>
+          </a:effectRef>
+          <a:fontRef idx="minor">
+            <a:schemeClr val="lt1"/>
+          </a:fontRef>
+        </p:style>
+        <p:txBody>
+          <a:bodyPr rtlCol="0" anchor="ctr"/>
+          <a:lstStyle/>
+          <a:p>
+            <a:pPr algn="ctr"/>
+            <a:endParaRPr/>
+          </a:p>
+        </p:txBody>
+      </p:sp>
+      <p:sp>
+        <p:nvSpPr>
+          <p:cNvPr id="4" name="TextBox 3"/>
+          <p:cNvSpPr txBox="1"/>
+          <p:nvPr/>
+        </p:nvSpPr>
+        <p:spPr>
+          <a:xfrm>
+            <a:off x="804672" y="1298448"/>
+            <a:ext cx="2377440" cy="320040"/>
+          </a:xfrm>
+          <a:prstGeom prst="rect">
+            <a:avLst/>
+          </a:prstGeom>
+          <a:noFill/>
+        </p:spPr>
+        <p:txBody>
+          <a:bodyPr wrap="none">
+            <a:spAutoFit/>
+          </a:bodyPr>
+          <a:lstStyle/>
+          <a:p>
+            <a:pPr>
+              <a:defRPr sz="1600" b="1">
+                <a:solidFill>
+                  <a:srgbClr val="E2E8F0"/>
+                </a:solidFill>
+              </a:defRPr>
+            </a:pPr>
+            <a:r>
+              <a:t>Frontend</a:t>
+            </a:r>
+          </a:p>
+        </p:txBody>
+      </p:sp>
+      <p:sp>
+        <p:nvSpPr>
+          <p:cNvPr id="5" name="TextBox 4"/>
+          <p:cNvSpPr txBox="1"/>
+          <p:nvPr/>
+        </p:nvSpPr>
+        <p:spPr>
+          <a:xfrm>
+            <a:off x="804672" y="1645920"/>
+            <a:ext cx="2377440" cy="1371600"/>
+          </a:xfrm>
+          <a:prstGeom prst="rect">
+            <a:avLst/>
+          </a:prstGeom>
+          <a:noFill/>
+        </p:spPr>
+        <p:txBody>
+          <a:bodyPr wrap="square">
+            <a:spAutoFit/>
+          </a:bodyPr>
+          <a:lstStyle/>
+          <a:p>
+            <a:pPr>
+              <a:defRPr sz="1200">
+                <a:solidFill>
+                  <a:srgbClr val="E2E8F0"/>
+                </a:solidFill>
+              </a:defRPr>
+            </a:pPr>
+            <a:r>
+              <a:t>ReactJS on Node 18</a:t>
+            </a:r>
+          </a:p>
+          <a:p>
+            <a:pPr>
+              <a:defRPr sz="1200">
+                <a:solidFill>
+                  <a:srgbClr val="E2E8F0"/>
+                </a:solidFill>
+              </a:defRPr>
+            </a:pPr>
+            <a:r>
+              <a:t>Axios for API communication</a:t>
+            </a:r>
+          </a:p>
+          <a:p>
+            <a:pPr>
+              <a:defRPr sz="1200">
+                <a:solidFill>
+                  <a:srgbClr val="E2E8F0"/>
+                </a:solidFill>
+              </a:defRPr>
+            </a:pPr>
+            <a:r>
+              <a:t>UI for search, upload, and result display</a:t>
+            </a:r>
+          </a:p>
+        </p:txBody>
+      </p:sp>
+      <p:sp>
+        <p:nvSpPr>
+          <p:cNvPr id="6" name="Rounded Rectangle 5"/>
+          <p:cNvSpPr/>
+          <p:nvPr/>
+        </p:nvSpPr>
+        <p:spPr>
+          <a:xfrm>
+            <a:off x="3566160" y="1188720"/>
+            <a:ext cx="2651760" cy="1920240"/>
+          </a:xfrm>
+          <a:prstGeom prst="roundRect">
+            <a:avLst/>
+          </a:prstGeom>
+          <a:solidFill>
+            <a:srgbClr val="1E293B"/>
+          </a:solidFill>
+          <a:ln w="19050">
+            <a:solidFill>
+              <a:srgbClr val="22C55E"/>
+            </a:solidFill>
+          </a:ln>
+        </p:spPr>
+        <p:style>
+          <a:lnRef idx="1">
+            <a:schemeClr val="accent1"/>
+          </a:lnRef>
+          <a:fillRef idx="3">
+            <a:schemeClr val="accent1"/>
+          </a:fillRef>
+          <a:effectRef idx="2">
+            <a:schemeClr val="accent1"/>
+          </a:effectRef>
+          <a:fontRef idx="minor">
+            <a:schemeClr val="lt1"/>
+          </a:fontRef>
+        </p:style>
+        <p:txBody>
+          <a:bodyPr rtlCol="0" anchor="ctr"/>
+          <a:lstStyle/>
+          <a:p>
+            <a:pPr algn="ctr"/>
+            <a:endParaRPr/>
+          </a:p>
+        </p:txBody>
+      </p:sp>
+      <p:sp>
+        <p:nvSpPr>
+          <p:cNvPr id="7" name="TextBox 6"/>
+          <p:cNvSpPr txBox="1"/>
+          <p:nvPr/>
+        </p:nvSpPr>
+        <p:spPr>
+          <a:xfrm>
+            <a:off x="3730752" y="1298448"/>
+            <a:ext cx="2377440" cy="320040"/>
+          </a:xfrm>
+          <a:prstGeom prst="rect">
+            <a:avLst/>
+          </a:prstGeom>
+          <a:noFill/>
+        </p:spPr>
+        <p:txBody>
+          <a:bodyPr wrap="none">
+            <a:spAutoFit/>
+          </a:bodyPr>
+          <a:lstStyle/>
+          <a:p>
+            <a:pPr>
+              <a:defRPr sz="1600" b="1">
+                <a:solidFill>
+                  <a:srgbClr val="E2E8F0"/>
+                </a:solidFill>
+              </a:defRPr>
+            </a:pPr>
+            <a:r>
+              <a:t>Backend</a:t>
+            </a:r>
+          </a:p>
+        </p:txBody>
+      </p:sp>
+      <p:sp>
+        <p:nvSpPr>
+          <p:cNvPr id="8" name="TextBox 7"/>
+          <p:cNvSpPr txBox="1"/>
+          <p:nvPr/>
+        </p:nvSpPr>
+        <p:spPr>
+          <a:xfrm>
+            <a:off x="3730752" y="1645920"/>
+            <a:ext cx="2377440" cy="1371600"/>
+          </a:xfrm>
+          <a:prstGeom prst="rect">
+            <a:avLst/>
+          </a:prstGeom>
+          <a:noFill/>
+        </p:spPr>
+        <p:txBody>
+          <a:bodyPr wrap="square">
+            <a:spAutoFit/>
+          </a:bodyPr>
+          <a:lstStyle/>
+          <a:p>
+            <a:pPr>
+              <a:defRPr sz="1200">
+                <a:solidFill>
+                  <a:srgbClr val="E2E8F0"/>
+                </a:solidFill>
+              </a:defRPr>
+            </a:pPr>
+            <a:r>
+              <a:t>FastAPI on Python 3.11</a:t>
+            </a:r>
+          </a:p>
+          <a:p>
+            <a:pPr>
+              <a:defRPr sz="1200">
+                <a:solidFill>
+                  <a:srgbClr val="E2E8F0"/>
+                </a:solidFill>
+              </a:defRPr>
+            </a:pPr>
+            <a:r>
+              <a:t>Conda environment</a:t>
+            </a:r>
+          </a:p>
+          <a:p>
+            <a:pPr>
+              <a:defRPr sz="1200">
+                <a:solidFill>
+                  <a:srgbClr val="E2E8F0"/>
+                </a:solidFill>
+              </a:defRPr>
+            </a:pPr>
+            <a:r>
+              <a:t>Request routing and result serving</a:t>
+            </a:r>
+          </a:p>
+        </p:txBody>
+      </p:sp>
+      <p:sp>
+        <p:nvSpPr>
+          <p:cNvPr id="9" name="Rounded Rectangle 8"/>
+          <p:cNvSpPr/>
+          <p:nvPr/>
+        </p:nvSpPr>
+        <p:spPr>
+          <a:xfrm>
+            <a:off x="6492240" y="1188720"/>
+            <a:ext cx="2651760" cy="1920240"/>
           </a:xfrm>
           <a:prstGeom prst="roundRect">
             <a:avLst/>
@@ -4670,14 +4123,14 @@
       </p:sp>
       <p:sp>
         <p:nvSpPr>
-          <p:cNvPr id="4" name="TextBox 3"/>
+          <p:cNvPr id="10" name="TextBox 9"/>
           <p:cNvSpPr txBox="1"/>
           <p:nvPr/>
         </p:nvSpPr>
         <p:spPr>
           <a:xfrm>
-            <a:off x="758952" y="2121408"/>
-            <a:ext cx="1645920" cy="320040"/>
+            <a:off x="6656832" y="1298448"/>
+            <a:ext cx="2377440" cy="320040"/>
           </a:xfrm>
           <a:prstGeom prst="rect">
             <a:avLst/>
@@ -4698,21 +4151,21 @@
               </a:defRPr>
             </a:pPr>
             <a:r>
-              <a:t>1. Input PDFs</a:t>
-            </a:r>
-          </a:p>
-        </p:txBody>
-      </p:sp>
-      <p:sp>
-        <p:nvSpPr>
-          <p:cNvPr id="5" name="TextBox 4"/>
+              <a:t>Agentic AI</a:t>
+            </a:r>
+          </a:p>
+        </p:txBody>
+      </p:sp>
+      <p:sp>
+        <p:nvSpPr>
+          <p:cNvPr id="11" name="TextBox 10"/>
           <p:cNvSpPr txBox="1"/>
           <p:nvPr/>
         </p:nvSpPr>
         <p:spPr>
           <a:xfrm>
-            <a:off x="758952" y="2468880"/>
-            <a:ext cx="1645920" cy="646331"/>
+            <a:off x="6656832" y="1645920"/>
+            <a:ext cx="2377440" cy="646331"/>
           </a:xfrm>
           <a:prstGeom prst="rect">
             <a:avLst/>
@@ -4734,72 +4187,52 @@
             </a:pPr>
             <a:r>
               <a:rPr dirty="0"/>
-              <a:t>Insurance policies, </a:t>
+              <a:t>Sentence Transformers </a:t>
             </a:r>
             <a:r>
               <a:rPr lang="en-US" dirty="0"/>
-              <a:t>or </a:t>
-            </a:r>
+              <a:t>mini LLM</a:t>
+            </a:r>
+            <a:endParaRPr dirty="0"/>
+          </a:p>
+          <a:p>
+            <a:pPr>
+              <a:defRPr sz="1200">
+                <a:solidFill>
+                  <a:srgbClr val="E2E8F0"/>
+                </a:solidFill>
+              </a:defRPr>
+            </a:pPr>
             <a:r>
               <a:rPr dirty="0"/>
-              <a:t>claims, </a:t>
-            </a:r>
-            <a:r>
-              <a:rPr lang="en-US" dirty="0"/>
-              <a:t>or any data </a:t>
-            </a:r>
+              <a:t>Request/response orchestration</a:t>
+            </a:r>
+          </a:p>
+          <a:p>
+            <a:pPr>
+              <a:defRPr sz="1200">
+                <a:solidFill>
+                  <a:srgbClr val="E2E8F0"/>
+                </a:solidFill>
+              </a:defRPr>
+            </a:pPr>
             <a:r>
               <a:rPr dirty="0"/>
-              <a:t>heavy documents</a:t>
-            </a:r>
-          </a:p>
-        </p:txBody>
-      </p:sp>
-      <p:cxnSp>
-        <p:nvCxnSpPr>
-          <p:cNvPr id="6" name="Connector 5"/>
-          <p:cNvCxnSpPr/>
-          <p:nvPr/>
-        </p:nvCxnSpPr>
-        <p:spPr>
-          <a:xfrm>
-            <a:off x="2514600" y="3017520"/>
-            <a:ext cx="320040" cy="0"/>
-          </a:xfrm>
-          <a:prstGeom prst="line">
-            <a:avLst/>
-          </a:prstGeom>
-          <a:ln w="31750">
-            <a:solidFill>
-              <a:srgbClr val="38BDF8"/>
-            </a:solidFill>
-          </a:ln>
-        </p:spPr>
-        <p:style>
-          <a:lnRef idx="2">
-            <a:schemeClr val="accent1"/>
-          </a:lnRef>
-          <a:fillRef idx="0">
-            <a:schemeClr val="accent1"/>
-          </a:fillRef>
-          <a:effectRef idx="1">
-            <a:schemeClr val="accent1"/>
-          </a:effectRef>
-          <a:fontRef idx="minor">
-            <a:schemeClr val="tx1"/>
-          </a:fontRef>
-        </p:style>
-      </p:cxnSp>
-      <p:sp>
-        <p:nvSpPr>
-          <p:cNvPr id="7" name="Rounded Rectangle 6"/>
+              <a:t>Context building for retrieval</a:t>
+            </a:r>
+          </a:p>
+        </p:txBody>
+      </p:sp>
+      <p:sp>
+        <p:nvSpPr>
+          <p:cNvPr id="12" name="Rounded Rectangle 11"/>
           <p:cNvSpPr/>
           <p:nvPr/>
         </p:nvSpPr>
         <p:spPr>
           <a:xfrm>
-            <a:off x="2834640" y="2011680"/>
-            <a:ext cx="1920240" cy="2011680"/>
+            <a:off x="9418320" y="1188720"/>
+            <a:ext cx="2103120" cy="1920240"/>
           </a:xfrm>
           <a:prstGeom prst="roundRect">
             <a:avLst/>
@@ -4809,7 +4242,7 @@
           </a:solidFill>
           <a:ln w="19050">
             <a:solidFill>
-              <a:srgbClr val="22C55E"/>
+              <a:srgbClr val="F87171"/>
             </a:solidFill>
           </a:ln>
         </p:spPr>
@@ -4838,14 +4271,14 @@
       </p:sp>
       <p:sp>
         <p:nvSpPr>
-          <p:cNvPr id="8" name="TextBox 7"/>
+          <p:cNvPr id="13" name="TextBox 12"/>
           <p:cNvSpPr txBox="1"/>
           <p:nvPr/>
         </p:nvSpPr>
         <p:spPr>
           <a:xfrm>
-            <a:off x="2999232" y="2121408"/>
-            <a:ext cx="1645920" cy="320040"/>
+            <a:off x="9582912" y="1298448"/>
+            <a:ext cx="1828800" cy="320040"/>
           </a:xfrm>
           <a:prstGeom prst="rect">
             <a:avLst/>
@@ -4866,21 +4299,21 @@
               </a:defRPr>
             </a:pPr>
             <a:r>
-              <a:t>2. Extraction</a:t>
-            </a:r>
-          </a:p>
-        </p:txBody>
-      </p:sp>
-      <p:sp>
-        <p:nvSpPr>
-          <p:cNvPr id="9" name="TextBox 8"/>
+              <a:t>FAISS</a:t>
+            </a:r>
+          </a:p>
+        </p:txBody>
+      </p:sp>
+      <p:sp>
+        <p:nvSpPr>
+          <p:cNvPr id="14" name="TextBox 13"/>
           <p:cNvSpPr txBox="1"/>
           <p:nvPr/>
         </p:nvSpPr>
         <p:spPr>
           <a:xfrm>
-            <a:off x="2999232" y="2468880"/>
-            <a:ext cx="1645920" cy="1463040"/>
+            <a:off x="9582912" y="1645920"/>
+            <a:ext cx="1828800" cy="1371600"/>
           </a:xfrm>
           <a:prstGeom prst="rect">
             <a:avLst/>
@@ -4901,56 +4334,173 @@
               </a:defRPr>
             </a:pPr>
             <a:r>
-              <a:t>Text/OCR extraction from source PDFs</a:t>
-            </a:r>
-          </a:p>
-        </p:txBody>
-      </p:sp>
-      <p:cxnSp>
-        <p:nvCxnSpPr>
-          <p:cNvPr id="10" name="Connector 9"/>
-          <p:cNvCxnSpPr/>
-          <p:nvPr/>
-        </p:nvCxnSpPr>
-        <p:spPr>
-          <a:xfrm>
-            <a:off x="4754880" y="3017520"/>
-            <a:ext cx="320040" cy="0"/>
-          </a:xfrm>
-          <a:prstGeom prst="line">
-            <a:avLst/>
-          </a:prstGeom>
-          <a:ln w="31750">
+              <a:t>Vector index</a:t>
+            </a:r>
+          </a:p>
+          <a:p>
+            <a:pPr>
+              <a:defRPr sz="1200">
+                <a:solidFill>
+                  <a:srgbClr val="E2E8F0"/>
+                </a:solidFill>
+              </a:defRPr>
+            </a:pPr>
+            <a:r>
+              <a:t>Top-K semantic retrieval</a:t>
+            </a:r>
+          </a:p>
+        </p:txBody>
+      </p:sp>
+      <p:sp>
+        <p:nvSpPr>
+          <p:cNvPr id="15" name="Rounded Rectangle 14"/>
+          <p:cNvSpPr/>
+          <p:nvPr/>
+        </p:nvSpPr>
+        <p:spPr>
+          <a:xfrm>
+            <a:off x="1920240" y="3657600"/>
+            <a:ext cx="3657600" cy="1828800"/>
+          </a:xfrm>
+          <a:prstGeom prst="roundRect">
+            <a:avLst/>
+          </a:prstGeom>
+          <a:solidFill>
+            <a:srgbClr val="1E293B"/>
+          </a:solidFill>
+          <a:ln w="19050">
             <a:solidFill>
-              <a:srgbClr val="38BDF8"/>
+              <a:srgbClr val="A78BFA"/>
             </a:solidFill>
           </a:ln>
         </p:spPr>
         <p:style>
-          <a:lnRef idx="2">
+          <a:lnRef idx="1">
             <a:schemeClr val="accent1"/>
           </a:lnRef>
-          <a:fillRef idx="0">
+          <a:fillRef idx="3">
             <a:schemeClr val="accent1"/>
           </a:fillRef>
-          <a:effectRef idx="1">
+          <a:effectRef idx="2">
             <a:schemeClr val="accent1"/>
           </a:effectRef>
           <a:fontRef idx="minor">
-            <a:schemeClr val="tx1"/>
+            <a:schemeClr val="lt1"/>
           </a:fontRef>
         </p:style>
-      </p:cxnSp>
-      <p:sp>
-        <p:nvSpPr>
-          <p:cNvPr id="11" name="Rounded Rectangle 10"/>
+        <p:txBody>
+          <a:bodyPr rtlCol="0" anchor="ctr"/>
+          <a:lstStyle/>
+          <a:p>
+            <a:pPr algn="ctr"/>
+            <a:endParaRPr/>
+          </a:p>
+        </p:txBody>
+      </p:sp>
+      <p:sp>
+        <p:nvSpPr>
+          <p:cNvPr id="16" name="TextBox 15"/>
+          <p:cNvSpPr txBox="1"/>
+          <p:nvPr/>
+        </p:nvSpPr>
+        <p:spPr>
+          <a:xfrm>
+            <a:off x="2084832" y="3767328"/>
+            <a:ext cx="3383280" cy="320040"/>
+          </a:xfrm>
+          <a:prstGeom prst="rect">
+            <a:avLst/>
+          </a:prstGeom>
+          <a:noFill/>
+        </p:spPr>
+        <p:txBody>
+          <a:bodyPr wrap="none">
+            <a:spAutoFit/>
+          </a:bodyPr>
+          <a:lstStyle/>
+          <a:p>
+            <a:pPr>
+              <a:defRPr sz="1600" b="1">
+                <a:solidFill>
+                  <a:srgbClr val="E2E8F0"/>
+                </a:solidFill>
+              </a:defRPr>
+            </a:pPr>
+            <a:r>
+              <a:t>vLLM / Qwen2.5</a:t>
+            </a:r>
+          </a:p>
+        </p:txBody>
+      </p:sp>
+      <p:sp>
+        <p:nvSpPr>
+          <p:cNvPr id="17" name="TextBox 16"/>
+          <p:cNvSpPr txBox="1"/>
+          <p:nvPr/>
+        </p:nvSpPr>
+        <p:spPr>
+          <a:xfrm>
+            <a:off x="2084832" y="4114800"/>
+            <a:ext cx="3383280" cy="1280160"/>
+          </a:xfrm>
+          <a:prstGeom prst="rect">
+            <a:avLst/>
+          </a:prstGeom>
+          <a:noFill/>
+        </p:spPr>
+        <p:txBody>
+          <a:bodyPr wrap="square">
+            <a:spAutoFit/>
+          </a:bodyPr>
+          <a:lstStyle/>
+          <a:p>
+            <a:pPr>
+              <a:defRPr sz="1200">
+                <a:solidFill>
+                  <a:srgbClr val="E2E8F0"/>
+                </a:solidFill>
+              </a:defRPr>
+            </a:pPr>
+            <a:r>
+              <a:t>Processes retrieved context</a:t>
+            </a:r>
+          </a:p>
+          <a:p>
+            <a:pPr>
+              <a:defRPr sz="1200">
+                <a:solidFill>
+                  <a:srgbClr val="E2E8F0"/>
+                </a:solidFill>
+              </a:defRPr>
+            </a:pPr>
+            <a:r>
+              <a:t>Extracts text and transaction data</a:t>
+            </a:r>
+          </a:p>
+          <a:p>
+            <a:pPr>
+              <a:defRPr sz="1200">
+                <a:solidFill>
+                  <a:srgbClr val="E2E8F0"/>
+                </a:solidFill>
+              </a:defRPr>
+            </a:pPr>
+            <a:r>
+              <a:t>Powers final responses</a:t>
+            </a:r>
+          </a:p>
+        </p:txBody>
+      </p:sp>
+      <p:sp>
+        <p:nvSpPr>
+          <p:cNvPr id="18" name="Rounded Rectangle 17"/>
           <p:cNvSpPr/>
           <p:nvPr/>
         </p:nvSpPr>
         <p:spPr>
           <a:xfrm>
-            <a:off x="5074920" y="2011680"/>
-            <a:ext cx="1920240" cy="2011680"/>
+            <a:off x="6035040" y="3657600"/>
+            <a:ext cx="3657600" cy="1828800"/>
           </a:xfrm>
           <a:prstGeom prst="roundRect">
             <a:avLst/>
@@ -4989,14 +4539,14 @@
       </p:sp>
       <p:sp>
         <p:nvSpPr>
-          <p:cNvPr id="12" name="TextBox 11"/>
+          <p:cNvPr id="19" name="TextBox 18"/>
           <p:cNvSpPr txBox="1"/>
           <p:nvPr/>
         </p:nvSpPr>
         <p:spPr>
           <a:xfrm>
-            <a:off x="5239512" y="2121408"/>
-            <a:ext cx="1645920" cy="320040"/>
+            <a:off x="6199632" y="3767328"/>
+            <a:ext cx="3383280" cy="320040"/>
           </a:xfrm>
           <a:prstGeom prst="rect">
             <a:avLst/>
@@ -5017,21 +4567,21 @@
               </a:defRPr>
             </a:pPr>
             <a:r>
-              <a:t>3. Chunking</a:t>
-            </a:r>
-          </a:p>
-        </p:txBody>
-      </p:sp>
-      <p:sp>
-        <p:nvSpPr>
-          <p:cNvPr id="13" name="TextBox 12"/>
+              <a:t>Document Pipeline</a:t>
+            </a:r>
+          </a:p>
+        </p:txBody>
+      </p:sp>
+      <p:sp>
+        <p:nvSpPr>
+          <p:cNvPr id="20" name="TextBox 19"/>
           <p:cNvSpPr txBox="1"/>
           <p:nvPr/>
         </p:nvSpPr>
         <p:spPr>
           <a:xfrm>
-            <a:off x="5239512" y="2468880"/>
-            <a:ext cx="1645920" cy="1463040"/>
+            <a:off x="6199632" y="4114800"/>
+            <a:ext cx="3383280" cy="1280160"/>
           </a:xfrm>
           <a:prstGeom prst="rect">
             <a:avLst/>
@@ -5052,148 +4602,9 @@
               </a:defRPr>
             </a:pPr>
             <a:r>
-              <a:t>Document content split into manageable units</a:t>
-            </a:r>
-          </a:p>
-        </p:txBody>
-      </p:sp>
-      <p:cxnSp>
-        <p:nvCxnSpPr>
-          <p:cNvPr id="14" name="Connector 13"/>
-          <p:cNvCxnSpPr/>
-          <p:nvPr/>
-        </p:nvCxnSpPr>
-        <p:spPr>
-          <a:xfrm>
-            <a:off x="6995160" y="3017520"/>
-            <a:ext cx="320040" cy="0"/>
-          </a:xfrm>
-          <a:prstGeom prst="line">
-            <a:avLst/>
-          </a:prstGeom>
-          <a:ln w="31750">
-            <a:solidFill>
-              <a:srgbClr val="38BDF8"/>
-            </a:solidFill>
-          </a:ln>
-        </p:spPr>
-        <p:style>
-          <a:lnRef idx="2">
-            <a:schemeClr val="accent1"/>
-          </a:lnRef>
-          <a:fillRef idx="0">
-            <a:schemeClr val="accent1"/>
-          </a:fillRef>
-          <a:effectRef idx="1">
-            <a:schemeClr val="accent1"/>
-          </a:effectRef>
-          <a:fontRef idx="minor">
-            <a:schemeClr val="tx1"/>
-          </a:fontRef>
-        </p:style>
-      </p:cxnSp>
-      <p:sp>
-        <p:nvSpPr>
-          <p:cNvPr id="15" name="Rounded Rectangle 14"/>
-          <p:cNvSpPr/>
-          <p:nvPr/>
-        </p:nvSpPr>
-        <p:spPr>
-          <a:xfrm>
-            <a:off x="7315200" y="2011680"/>
-            <a:ext cx="1920240" cy="2011680"/>
-          </a:xfrm>
-          <a:prstGeom prst="roundRect">
-            <a:avLst/>
-          </a:prstGeom>
-          <a:solidFill>
-            <a:srgbClr val="1E293B"/>
-          </a:solidFill>
-          <a:ln w="19050">
-            <a:solidFill>
-              <a:srgbClr val="A78BFA"/>
-            </a:solidFill>
-          </a:ln>
-        </p:spPr>
-        <p:style>
-          <a:lnRef idx="1">
-            <a:schemeClr val="accent1"/>
-          </a:lnRef>
-          <a:fillRef idx="3">
-            <a:schemeClr val="accent1"/>
-          </a:fillRef>
-          <a:effectRef idx="2">
-            <a:schemeClr val="accent1"/>
-          </a:effectRef>
-          <a:fontRef idx="minor">
-            <a:schemeClr val="lt1"/>
-          </a:fontRef>
-        </p:style>
-        <p:txBody>
-          <a:bodyPr rtlCol="0" anchor="ctr"/>
-          <a:lstStyle/>
-          <a:p>
-            <a:pPr algn="ctr"/>
-            <a:endParaRPr/>
-          </a:p>
-        </p:txBody>
-      </p:sp>
-      <p:sp>
-        <p:nvSpPr>
-          <p:cNvPr id="16" name="TextBox 15"/>
-          <p:cNvSpPr txBox="1"/>
-          <p:nvPr/>
-        </p:nvSpPr>
-        <p:spPr>
-          <a:xfrm>
-            <a:off x="7479792" y="2121408"/>
-            <a:ext cx="1645920" cy="320040"/>
-          </a:xfrm>
-          <a:prstGeom prst="rect">
-            <a:avLst/>
-          </a:prstGeom>
-          <a:noFill/>
-        </p:spPr>
-        <p:txBody>
-          <a:bodyPr wrap="none">
-            <a:spAutoFit/>
-          </a:bodyPr>
-          <a:lstStyle/>
-          <a:p>
-            <a:pPr>
-              <a:defRPr sz="1600" b="1">
-                <a:solidFill>
-                  <a:srgbClr val="E2E8F0"/>
-                </a:solidFill>
-              </a:defRPr>
-            </a:pPr>
-            <a:r>
-              <a:t>4. Embeddings</a:t>
-            </a:r>
-          </a:p>
-        </p:txBody>
-      </p:sp>
-      <p:sp>
-        <p:nvSpPr>
-          <p:cNvPr id="17" name="TextBox 16"/>
-          <p:cNvSpPr txBox="1"/>
-          <p:nvPr/>
-        </p:nvSpPr>
-        <p:spPr>
-          <a:xfrm>
-            <a:off x="7479792" y="2468880"/>
-            <a:ext cx="1645920" cy="1463040"/>
-          </a:xfrm>
-          <a:prstGeom prst="rect">
-            <a:avLst/>
-          </a:prstGeom>
-          <a:noFill/>
-        </p:spPr>
-        <p:txBody>
-          <a:bodyPr wrap="square">
-            <a:spAutoFit/>
-          </a:bodyPr>
-          <a:lstStyle/>
+              <a:t>PDF ingestion</a:t>
+            </a:r>
+          </a:p>
           <a:p>
             <a:pPr>
               <a:defRPr sz="1200">
@@ -5203,123 +4614,19 @@
               </a:defRPr>
             </a:pPr>
             <a:r>
-              <a:t>Sentence Transformer vectors created</a:t>
-            </a:r>
-          </a:p>
-        </p:txBody>
-      </p:sp>
-      <p:cxnSp>
-        <p:nvCxnSpPr>
-          <p:cNvPr id="18" name="Connector 17"/>
-          <p:cNvCxnSpPr/>
-          <p:nvPr/>
-        </p:nvCxnSpPr>
-        <p:spPr>
-          <a:xfrm>
-            <a:off x="9235440" y="3017520"/>
-            <a:ext cx="320040" cy="0"/>
-          </a:xfrm>
-          <a:prstGeom prst="line">
-            <a:avLst/>
-          </a:prstGeom>
-          <a:ln w="31750">
-            <a:solidFill>
-              <a:srgbClr val="38BDF8"/>
-            </a:solidFill>
-          </a:ln>
-        </p:spPr>
-        <p:style>
-          <a:lnRef idx="2">
-            <a:schemeClr val="accent1"/>
-          </a:lnRef>
-          <a:fillRef idx="0">
-            <a:schemeClr val="accent1"/>
-          </a:fillRef>
-          <a:effectRef idx="1">
-            <a:schemeClr val="accent1"/>
-          </a:effectRef>
-          <a:fontRef idx="minor">
-            <a:schemeClr val="tx1"/>
-          </a:fontRef>
-        </p:style>
-      </p:cxnSp>
-      <p:sp>
-        <p:nvSpPr>
-          <p:cNvPr id="19" name="Rounded Rectangle 18"/>
-          <p:cNvSpPr/>
-          <p:nvPr/>
-        </p:nvSpPr>
-        <p:spPr>
-          <a:xfrm>
-            <a:off x="9555480" y="2011680"/>
-            <a:ext cx="1920240" cy="2011680"/>
-          </a:xfrm>
-          <a:prstGeom prst="roundRect">
-            <a:avLst/>
-          </a:prstGeom>
-          <a:solidFill>
-            <a:srgbClr val="1E293B"/>
-          </a:solidFill>
-          <a:ln w="19050">
-            <a:solidFill>
-              <a:srgbClr val="F87171"/>
-            </a:solidFill>
-          </a:ln>
-        </p:spPr>
-        <p:style>
-          <a:lnRef idx="1">
-            <a:schemeClr val="accent1"/>
-          </a:lnRef>
-          <a:fillRef idx="3">
-            <a:schemeClr val="accent1"/>
-          </a:fillRef>
-          <a:effectRef idx="2">
-            <a:schemeClr val="accent1"/>
-          </a:effectRef>
-          <a:fontRef idx="minor">
-            <a:schemeClr val="lt1"/>
-          </a:fontRef>
-        </p:style>
-        <p:txBody>
-          <a:bodyPr rtlCol="0" anchor="ctr"/>
-          <a:lstStyle/>
-          <a:p>
-            <a:pPr algn="ctr"/>
-            <a:endParaRPr/>
-          </a:p>
-        </p:txBody>
-      </p:sp>
-      <p:sp>
-        <p:nvSpPr>
-          <p:cNvPr id="20" name="TextBox 19"/>
-          <p:cNvSpPr txBox="1"/>
-          <p:nvPr/>
-        </p:nvSpPr>
-        <p:spPr>
-          <a:xfrm>
-            <a:off x="9720072" y="2121408"/>
-            <a:ext cx="1645920" cy="320040"/>
-          </a:xfrm>
-          <a:prstGeom prst="rect">
-            <a:avLst/>
-          </a:prstGeom>
-          <a:noFill/>
-        </p:spPr>
-        <p:txBody>
-          <a:bodyPr wrap="none">
-            <a:spAutoFit/>
-          </a:bodyPr>
-          <a:lstStyle/>
-          <a:p>
-            <a:pPr>
-              <a:defRPr sz="1600" b="1">
-                <a:solidFill>
-                  <a:srgbClr val="E2E8F0"/>
-                </a:solidFill>
-              </a:defRPr>
-            </a:pPr>
-            <a:r>
-              <a:t>5. Indexing</a:t>
+              <a:t>Extraction, chunking, embeddings, indexing</a:t>
+            </a:r>
+          </a:p>
+          <a:p>
+            <a:pPr>
+              <a:defRPr sz="1200">
+                <a:solidFill>
+                  <a:srgbClr val="E2E8F0"/>
+                </a:solidFill>
+              </a:defRPr>
+            </a:pPr>
+            <a:r>
+              <a:t>Feeds searchable content into FAISS</a:t>
             </a:r>
           </a:p>
         </p:txBody>
@@ -5327,88 +4634,6 @@
       <p:sp>
         <p:nvSpPr>
           <p:cNvPr id="21" name="TextBox 20"/>
-          <p:cNvSpPr txBox="1"/>
-          <p:nvPr/>
-        </p:nvSpPr>
-        <p:spPr>
-          <a:xfrm>
-            <a:off x="9720072" y="2468880"/>
-            <a:ext cx="1645920" cy="1463040"/>
-          </a:xfrm>
-          <a:prstGeom prst="rect">
-            <a:avLst/>
-          </a:prstGeom>
-          <a:noFill/>
-        </p:spPr>
-        <p:txBody>
-          <a:bodyPr wrap="square">
-            <a:spAutoFit/>
-          </a:bodyPr>
-          <a:lstStyle/>
-          <a:p>
-            <a:pPr>
-              <a:defRPr sz="1200">
-                <a:solidFill>
-                  <a:srgbClr val="E2E8F0"/>
-                </a:solidFill>
-              </a:defRPr>
-            </a:pPr>
-            <a:r>
-              <a:t>Vectors stored in FAISS for retrieval</a:t>
-            </a:r>
-          </a:p>
-        </p:txBody>
-      </p:sp>
-      <p:sp>
-        <p:nvSpPr>
-          <p:cNvPr id="22" name="TextBox 21"/>
-          <p:cNvSpPr txBox="1"/>
-          <p:nvPr/>
-        </p:nvSpPr>
-        <p:spPr>
-          <a:xfrm>
-            <a:off x="868680" y="4846320"/>
-            <a:ext cx="10332720" cy="914400"/>
-          </a:xfrm>
-          <a:prstGeom prst="rect">
-            <a:avLst/>
-          </a:prstGeom>
-          <a:noFill/>
-        </p:spPr>
-        <p:txBody>
-          <a:bodyPr wrap="square">
-            <a:spAutoFit/>
-          </a:bodyPr>
-          <a:lstStyle/>
-          <a:p>
-            <a:pPr>
-              <a:defRPr sz="1600">
-                <a:solidFill>
-                  <a:srgbClr val="E2E8F0"/>
-                </a:solidFill>
-              </a:defRPr>
-            </a:pPr>
-            <a:r>
-              <a:t>This pipeline prepares the local knowledge base for semantic search.</a:t>
-            </a:r>
-          </a:p>
-          <a:p>
-            <a:pPr>
-              <a:defRPr sz="1600">
-                <a:solidFill>
-                  <a:srgbClr val="E2E8F0"/>
-                </a:solidFill>
-              </a:defRPr>
-            </a:pPr>
-            <a:r>
-              <a:t>The output of this stage is a searchable FAISS index used at query time.</a:t>
-            </a:r>
-          </a:p>
-        </p:txBody>
-      </p:sp>
-      <p:sp>
-        <p:nvSpPr>
-          <p:cNvPr id="23" name="TextBox 22"/>
           <p:cNvSpPr txBox="1"/>
           <p:nvPr/>
         </p:nvSpPr>
@@ -5502,7 +4727,7 @@
                   <a:srgbClr val="E2E8F0"/>
                 </a:solidFill>
               </a:rPr>
-              <a:t>Runtime Query Flow</a:t>
+              <a:t>Ingestion Pipeline</a:t>
             </a:r>
           </a:p>
           <a:p>
@@ -5514,7 +4739,7 @@
               </a:defRPr>
             </a:pPr>
             <a:r>
-              <a:t>What happens when a user asks a question</a:t>
+              <a:t>How PDF documents become searchable assets</a:t>
             </a:r>
           </a:p>
         </p:txBody>
@@ -5527,8 +4752,327 @@
         </p:nvSpPr>
         <p:spPr>
           <a:xfrm>
-            <a:off x="594360" y="1645920"/>
-            <a:ext cx="3108960" cy="1371600"/>
+            <a:off x="594360" y="2011680"/>
+            <a:ext cx="1920240" cy="2011680"/>
+          </a:xfrm>
+          <a:prstGeom prst="roundRect">
+            <a:avLst/>
+          </a:prstGeom>
+          <a:solidFill>
+            <a:srgbClr val="1E293B"/>
+          </a:solidFill>
+          <a:ln w="19050">
+            <a:solidFill>
+              <a:srgbClr val="FBBF24"/>
+            </a:solidFill>
+          </a:ln>
+        </p:spPr>
+        <p:style>
+          <a:lnRef idx="1">
+            <a:schemeClr val="accent1"/>
+          </a:lnRef>
+          <a:fillRef idx="3">
+            <a:schemeClr val="accent1"/>
+          </a:fillRef>
+          <a:effectRef idx="2">
+            <a:schemeClr val="accent1"/>
+          </a:effectRef>
+          <a:fontRef idx="minor">
+            <a:schemeClr val="lt1"/>
+          </a:fontRef>
+        </p:style>
+        <p:txBody>
+          <a:bodyPr rtlCol="0" anchor="ctr"/>
+          <a:lstStyle/>
+          <a:p>
+            <a:pPr algn="ctr"/>
+            <a:endParaRPr/>
+          </a:p>
+        </p:txBody>
+      </p:sp>
+      <p:sp>
+        <p:nvSpPr>
+          <p:cNvPr id="4" name="TextBox 3"/>
+          <p:cNvSpPr txBox="1"/>
+          <p:nvPr/>
+        </p:nvSpPr>
+        <p:spPr>
+          <a:xfrm>
+            <a:off x="758952" y="2121408"/>
+            <a:ext cx="1645920" cy="320040"/>
+          </a:xfrm>
+          <a:prstGeom prst="rect">
+            <a:avLst/>
+          </a:prstGeom>
+          <a:noFill/>
+        </p:spPr>
+        <p:txBody>
+          <a:bodyPr wrap="none">
+            <a:spAutoFit/>
+          </a:bodyPr>
+          <a:lstStyle/>
+          <a:p>
+            <a:pPr>
+              <a:defRPr sz="1600" b="1">
+                <a:solidFill>
+                  <a:srgbClr val="E2E8F0"/>
+                </a:solidFill>
+              </a:defRPr>
+            </a:pPr>
+            <a:r>
+              <a:t>1. Input PDFs</a:t>
+            </a:r>
+          </a:p>
+        </p:txBody>
+      </p:sp>
+      <p:sp>
+        <p:nvSpPr>
+          <p:cNvPr id="5" name="TextBox 4"/>
+          <p:cNvSpPr txBox="1"/>
+          <p:nvPr/>
+        </p:nvSpPr>
+        <p:spPr>
+          <a:xfrm>
+            <a:off x="758952" y="2468880"/>
+            <a:ext cx="1645920" cy="646331"/>
+          </a:xfrm>
+          <a:prstGeom prst="rect">
+            <a:avLst/>
+          </a:prstGeom>
+          <a:noFill/>
+        </p:spPr>
+        <p:txBody>
+          <a:bodyPr wrap="square">
+            <a:spAutoFit/>
+          </a:bodyPr>
+          <a:lstStyle/>
+          <a:p>
+            <a:pPr>
+              <a:defRPr sz="1200">
+                <a:solidFill>
+                  <a:srgbClr val="E2E8F0"/>
+                </a:solidFill>
+              </a:defRPr>
+            </a:pPr>
+            <a:r>
+              <a:rPr dirty="0"/>
+              <a:t>Insurance policies, </a:t>
+            </a:r>
+            <a:r>
+              <a:rPr lang="en-US" dirty="0"/>
+              <a:t>or </a:t>
+            </a:r>
+            <a:r>
+              <a:rPr dirty="0"/>
+              <a:t>claims, </a:t>
+            </a:r>
+            <a:r>
+              <a:rPr lang="en-US" dirty="0"/>
+              <a:t>or any data </a:t>
+            </a:r>
+            <a:r>
+              <a:rPr dirty="0"/>
+              <a:t>heavy documents</a:t>
+            </a:r>
+          </a:p>
+        </p:txBody>
+      </p:sp>
+      <p:cxnSp>
+        <p:nvCxnSpPr>
+          <p:cNvPr id="6" name="Connector 5"/>
+          <p:cNvCxnSpPr/>
+          <p:nvPr/>
+        </p:nvCxnSpPr>
+        <p:spPr>
+          <a:xfrm>
+            <a:off x="2514600" y="3017520"/>
+            <a:ext cx="320040" cy="0"/>
+          </a:xfrm>
+          <a:prstGeom prst="line">
+            <a:avLst/>
+          </a:prstGeom>
+          <a:ln w="31750">
+            <a:solidFill>
+              <a:srgbClr val="38BDF8"/>
+            </a:solidFill>
+          </a:ln>
+        </p:spPr>
+        <p:style>
+          <a:lnRef idx="2">
+            <a:schemeClr val="accent1"/>
+          </a:lnRef>
+          <a:fillRef idx="0">
+            <a:schemeClr val="accent1"/>
+          </a:fillRef>
+          <a:effectRef idx="1">
+            <a:schemeClr val="accent1"/>
+          </a:effectRef>
+          <a:fontRef idx="minor">
+            <a:schemeClr val="tx1"/>
+          </a:fontRef>
+        </p:style>
+      </p:cxnSp>
+      <p:sp>
+        <p:nvSpPr>
+          <p:cNvPr id="7" name="Rounded Rectangle 6"/>
+          <p:cNvSpPr/>
+          <p:nvPr/>
+        </p:nvSpPr>
+        <p:spPr>
+          <a:xfrm>
+            <a:off x="2834640" y="2011680"/>
+            <a:ext cx="1920240" cy="2011680"/>
+          </a:xfrm>
+          <a:prstGeom prst="roundRect">
+            <a:avLst/>
+          </a:prstGeom>
+          <a:solidFill>
+            <a:srgbClr val="1E293B"/>
+          </a:solidFill>
+          <a:ln w="19050">
+            <a:solidFill>
+              <a:srgbClr val="22C55E"/>
+            </a:solidFill>
+          </a:ln>
+        </p:spPr>
+        <p:style>
+          <a:lnRef idx="1">
+            <a:schemeClr val="accent1"/>
+          </a:lnRef>
+          <a:fillRef idx="3">
+            <a:schemeClr val="accent1"/>
+          </a:fillRef>
+          <a:effectRef idx="2">
+            <a:schemeClr val="accent1"/>
+          </a:effectRef>
+          <a:fontRef idx="minor">
+            <a:schemeClr val="lt1"/>
+          </a:fontRef>
+        </p:style>
+        <p:txBody>
+          <a:bodyPr rtlCol="0" anchor="ctr"/>
+          <a:lstStyle/>
+          <a:p>
+            <a:pPr algn="ctr"/>
+            <a:endParaRPr/>
+          </a:p>
+        </p:txBody>
+      </p:sp>
+      <p:sp>
+        <p:nvSpPr>
+          <p:cNvPr id="8" name="TextBox 7"/>
+          <p:cNvSpPr txBox="1"/>
+          <p:nvPr/>
+        </p:nvSpPr>
+        <p:spPr>
+          <a:xfrm>
+            <a:off x="2999232" y="2121408"/>
+            <a:ext cx="1645920" cy="320040"/>
+          </a:xfrm>
+          <a:prstGeom prst="rect">
+            <a:avLst/>
+          </a:prstGeom>
+          <a:noFill/>
+        </p:spPr>
+        <p:txBody>
+          <a:bodyPr wrap="none">
+            <a:spAutoFit/>
+          </a:bodyPr>
+          <a:lstStyle/>
+          <a:p>
+            <a:pPr>
+              <a:defRPr sz="1600" b="1">
+                <a:solidFill>
+                  <a:srgbClr val="E2E8F0"/>
+                </a:solidFill>
+              </a:defRPr>
+            </a:pPr>
+            <a:r>
+              <a:t>2. Extraction</a:t>
+            </a:r>
+          </a:p>
+        </p:txBody>
+      </p:sp>
+      <p:sp>
+        <p:nvSpPr>
+          <p:cNvPr id="9" name="TextBox 8"/>
+          <p:cNvSpPr txBox="1"/>
+          <p:nvPr/>
+        </p:nvSpPr>
+        <p:spPr>
+          <a:xfrm>
+            <a:off x="2999232" y="2468880"/>
+            <a:ext cx="1645920" cy="1463040"/>
+          </a:xfrm>
+          <a:prstGeom prst="rect">
+            <a:avLst/>
+          </a:prstGeom>
+          <a:noFill/>
+        </p:spPr>
+        <p:txBody>
+          <a:bodyPr wrap="square">
+            <a:spAutoFit/>
+          </a:bodyPr>
+          <a:lstStyle/>
+          <a:p>
+            <a:pPr>
+              <a:defRPr sz="1200">
+                <a:solidFill>
+                  <a:srgbClr val="E2E8F0"/>
+                </a:solidFill>
+              </a:defRPr>
+            </a:pPr>
+            <a:r>
+              <a:t>Text/OCR extraction from source PDFs</a:t>
+            </a:r>
+          </a:p>
+        </p:txBody>
+      </p:sp>
+      <p:cxnSp>
+        <p:nvCxnSpPr>
+          <p:cNvPr id="10" name="Connector 9"/>
+          <p:cNvCxnSpPr/>
+          <p:nvPr/>
+        </p:nvCxnSpPr>
+        <p:spPr>
+          <a:xfrm>
+            <a:off x="4754880" y="3017520"/>
+            <a:ext cx="320040" cy="0"/>
+          </a:xfrm>
+          <a:prstGeom prst="line">
+            <a:avLst/>
+          </a:prstGeom>
+          <a:ln w="31750">
+            <a:solidFill>
+              <a:srgbClr val="38BDF8"/>
+            </a:solidFill>
+          </a:ln>
+        </p:spPr>
+        <p:style>
+          <a:lnRef idx="2">
+            <a:schemeClr val="accent1"/>
+          </a:lnRef>
+          <a:fillRef idx="0">
+            <a:schemeClr val="accent1"/>
+          </a:fillRef>
+          <a:effectRef idx="1">
+            <a:schemeClr val="accent1"/>
+          </a:effectRef>
+          <a:fontRef idx="minor">
+            <a:schemeClr val="tx1"/>
+          </a:fontRef>
+        </p:style>
+      </p:cxnSp>
+      <p:sp>
+        <p:nvSpPr>
+          <p:cNvPr id="11" name="Rounded Rectangle 10"/>
+          <p:cNvSpPr/>
+          <p:nvPr/>
+        </p:nvSpPr>
+        <p:spPr>
+          <a:xfrm>
+            <a:off x="5074920" y="2011680"/>
+            <a:ext cx="1920240" cy="2011680"/>
           </a:xfrm>
           <a:prstGeom prst="roundRect">
             <a:avLst/>
@@ -5567,14 +5111,14 @@
       </p:sp>
       <p:sp>
         <p:nvSpPr>
-          <p:cNvPr id="4" name="TextBox 3"/>
+          <p:cNvPr id="12" name="TextBox 11"/>
           <p:cNvSpPr txBox="1"/>
           <p:nvPr/>
         </p:nvSpPr>
         <p:spPr>
           <a:xfrm>
-            <a:off x="758952" y="1755648"/>
-            <a:ext cx="2834640" cy="320040"/>
+            <a:off x="5239512" y="2121408"/>
+            <a:ext cx="1645920" cy="320040"/>
           </a:xfrm>
           <a:prstGeom prst="rect">
             <a:avLst/>
@@ -5595,21 +5139,21 @@
               </a:defRPr>
             </a:pPr>
             <a:r>
-              <a:t>User Query</a:t>
-            </a:r>
-          </a:p>
-        </p:txBody>
-      </p:sp>
-      <p:sp>
-        <p:nvSpPr>
-          <p:cNvPr id="5" name="TextBox 4"/>
+              <a:t>3. Chunking</a:t>
+            </a:r>
+          </a:p>
+        </p:txBody>
+      </p:sp>
+      <p:sp>
+        <p:nvSpPr>
+          <p:cNvPr id="13" name="TextBox 12"/>
           <p:cNvSpPr txBox="1"/>
           <p:nvPr/>
         </p:nvSpPr>
         <p:spPr>
           <a:xfrm>
-            <a:off x="758952" y="2103120"/>
-            <a:ext cx="2834640" cy="822960"/>
+            <a:off x="5239512" y="2468880"/>
+            <a:ext cx="1645920" cy="1463040"/>
           </a:xfrm>
           <a:prstGeom prst="rect">
             <a:avLst/>
@@ -5630,21 +5174,56 @@
               </a:defRPr>
             </a:pPr>
             <a:r>
-              <a:t>Question entered in React UI</a:t>
-            </a:r>
-          </a:p>
-        </p:txBody>
-      </p:sp>
-      <p:sp>
-        <p:nvSpPr>
-          <p:cNvPr id="6" name="Rounded Rectangle 5"/>
+              <a:t>Document content split into manageable units</a:t>
+            </a:r>
+          </a:p>
+        </p:txBody>
+      </p:sp>
+      <p:cxnSp>
+        <p:nvCxnSpPr>
+          <p:cNvPr id="14" name="Connector 13"/>
+          <p:cNvCxnSpPr/>
+          <p:nvPr/>
+        </p:nvCxnSpPr>
+        <p:spPr>
+          <a:xfrm>
+            <a:off x="6995160" y="3017520"/>
+            <a:ext cx="320040" cy="0"/>
+          </a:xfrm>
+          <a:prstGeom prst="line">
+            <a:avLst/>
+          </a:prstGeom>
+          <a:ln w="31750">
+            <a:solidFill>
+              <a:srgbClr val="38BDF8"/>
+            </a:solidFill>
+          </a:ln>
+        </p:spPr>
+        <p:style>
+          <a:lnRef idx="2">
+            <a:schemeClr val="accent1"/>
+          </a:lnRef>
+          <a:fillRef idx="0">
+            <a:schemeClr val="accent1"/>
+          </a:fillRef>
+          <a:effectRef idx="1">
+            <a:schemeClr val="accent1"/>
+          </a:effectRef>
+          <a:fontRef idx="minor">
+            <a:schemeClr val="tx1"/>
+          </a:fontRef>
+        </p:style>
+      </p:cxnSp>
+      <p:sp>
+        <p:nvSpPr>
+          <p:cNvPr id="15" name="Rounded Rectangle 14"/>
           <p:cNvSpPr/>
           <p:nvPr/>
         </p:nvSpPr>
         <p:spPr>
           <a:xfrm>
-            <a:off x="4389120" y="1645920"/>
-            <a:ext cx="3108960" cy="1371600"/>
+            <a:off x="7315200" y="2011680"/>
+            <a:ext cx="1920240" cy="2011680"/>
           </a:xfrm>
           <a:prstGeom prst="roundRect">
             <a:avLst/>
@@ -5654,7 +5233,7 @@
           </a:solidFill>
           <a:ln w="19050">
             <a:solidFill>
-              <a:srgbClr val="22C55E"/>
+              <a:srgbClr val="A78BFA"/>
             </a:solidFill>
           </a:ln>
         </p:spPr>
@@ -5683,14 +5262,14 @@
       </p:sp>
       <p:sp>
         <p:nvSpPr>
-          <p:cNvPr id="7" name="TextBox 6"/>
+          <p:cNvPr id="16" name="TextBox 15"/>
           <p:cNvSpPr txBox="1"/>
           <p:nvPr/>
         </p:nvSpPr>
         <p:spPr>
           <a:xfrm>
-            <a:off x="4553712" y="1755648"/>
-            <a:ext cx="2834640" cy="320040"/>
+            <a:off x="7479792" y="2121408"/>
+            <a:ext cx="1645920" cy="320040"/>
           </a:xfrm>
           <a:prstGeom prst="rect">
             <a:avLst/>
@@ -5711,21 +5290,21 @@
               </a:defRPr>
             </a:pPr>
             <a:r>
-              <a:t>Backend API</a:t>
-            </a:r>
-          </a:p>
-        </p:txBody>
-      </p:sp>
-      <p:sp>
-        <p:nvSpPr>
-          <p:cNvPr id="8" name="TextBox 7"/>
+              <a:t>4. Embeddings</a:t>
+            </a:r>
+          </a:p>
+        </p:txBody>
+      </p:sp>
+      <p:sp>
+        <p:nvSpPr>
+          <p:cNvPr id="17" name="TextBox 16"/>
           <p:cNvSpPr txBox="1"/>
           <p:nvPr/>
         </p:nvSpPr>
         <p:spPr>
           <a:xfrm>
-            <a:off x="4553712" y="2103120"/>
-            <a:ext cx="2834640" cy="822960"/>
+            <a:off x="7479792" y="2468880"/>
+            <a:ext cx="1645920" cy="1463040"/>
           </a:xfrm>
           <a:prstGeom prst="rect">
             <a:avLst/>
@@ -5746,137 +5325,56 @@
               </a:defRPr>
             </a:pPr>
             <a:r>
-              <a:t>FastAPI receives and validates request</a:t>
-            </a:r>
-          </a:p>
-        </p:txBody>
-      </p:sp>
-      <p:sp>
-        <p:nvSpPr>
-          <p:cNvPr id="9" name="Rounded Rectangle 8"/>
-          <p:cNvSpPr/>
-          <p:nvPr/>
-        </p:nvSpPr>
-        <p:spPr>
-          <a:xfrm>
-            <a:off x="8183880" y="1645920"/>
-            <a:ext cx="3108960" cy="1371600"/>
-          </a:xfrm>
-          <a:prstGeom prst="roundRect">
-            <a:avLst/>
-          </a:prstGeom>
-          <a:solidFill>
-            <a:srgbClr val="1E293B"/>
-          </a:solidFill>
-          <a:ln w="19050">
+              <a:t>Sentence Transformer vectors created</a:t>
+            </a:r>
+          </a:p>
+        </p:txBody>
+      </p:sp>
+      <p:cxnSp>
+        <p:nvCxnSpPr>
+          <p:cNvPr id="18" name="Connector 17"/>
+          <p:cNvCxnSpPr/>
+          <p:nvPr/>
+        </p:nvCxnSpPr>
+        <p:spPr>
+          <a:xfrm>
+            <a:off x="9235440" y="3017520"/>
+            <a:ext cx="320040" cy="0"/>
+          </a:xfrm>
+          <a:prstGeom prst="line">
+            <a:avLst/>
+          </a:prstGeom>
+          <a:ln w="31750">
             <a:solidFill>
-              <a:srgbClr val="FBBF24"/>
+              <a:srgbClr val="38BDF8"/>
             </a:solidFill>
           </a:ln>
         </p:spPr>
         <p:style>
-          <a:lnRef idx="1">
+          <a:lnRef idx="2">
             <a:schemeClr val="accent1"/>
           </a:lnRef>
-          <a:fillRef idx="3">
+          <a:fillRef idx="0">
             <a:schemeClr val="accent1"/>
           </a:fillRef>
-          <a:effectRef idx="2">
+          <a:effectRef idx="1">
             <a:schemeClr val="accent1"/>
           </a:effectRef>
           <a:fontRef idx="minor">
-            <a:schemeClr val="lt1"/>
+            <a:schemeClr val="tx1"/>
           </a:fontRef>
         </p:style>
-        <p:txBody>
-          <a:bodyPr rtlCol="0" anchor="ctr"/>
-          <a:lstStyle/>
-          <a:p>
-            <a:pPr algn="ctr"/>
-            <a:endParaRPr/>
-          </a:p>
-        </p:txBody>
-      </p:sp>
-      <p:sp>
-        <p:nvSpPr>
-          <p:cNvPr id="10" name="TextBox 9"/>
-          <p:cNvSpPr txBox="1"/>
-          <p:nvPr/>
-        </p:nvSpPr>
-        <p:spPr>
-          <a:xfrm>
-            <a:off x="8348472" y="1755648"/>
-            <a:ext cx="2834640" cy="320040"/>
-          </a:xfrm>
-          <a:prstGeom prst="rect">
-            <a:avLst/>
-          </a:prstGeom>
-          <a:noFill/>
-        </p:spPr>
-        <p:txBody>
-          <a:bodyPr wrap="none">
-            <a:spAutoFit/>
-          </a:bodyPr>
-          <a:lstStyle/>
-          <a:p>
-            <a:pPr>
-              <a:defRPr sz="1600" b="1">
-                <a:solidFill>
-                  <a:srgbClr val="E2E8F0"/>
-                </a:solidFill>
-              </a:defRPr>
-            </a:pPr>
-            <a:r>
-              <a:t>Agentic AI</a:t>
-            </a:r>
-          </a:p>
-        </p:txBody>
-      </p:sp>
-      <p:sp>
-        <p:nvSpPr>
-          <p:cNvPr id="11" name="TextBox 10"/>
-          <p:cNvSpPr txBox="1"/>
-          <p:nvPr/>
-        </p:nvSpPr>
-        <p:spPr>
-          <a:xfrm>
-            <a:off x="8348472" y="2103120"/>
-            <a:ext cx="2834640" cy="822960"/>
-          </a:xfrm>
-          <a:prstGeom prst="rect">
-            <a:avLst/>
-          </a:prstGeom>
-          <a:noFill/>
-        </p:spPr>
-        <p:txBody>
-          <a:bodyPr wrap="square">
-            <a:spAutoFit/>
-          </a:bodyPr>
-          <a:lstStyle/>
-          <a:p>
-            <a:pPr>
-              <a:defRPr sz="1200">
-                <a:solidFill>
-                  <a:srgbClr val="E2E8F0"/>
-                </a:solidFill>
-              </a:defRPr>
-            </a:pPr>
-            <a:r>
-              <a:t>Builds context and retrieval strategy</a:t>
-            </a:r>
-          </a:p>
-        </p:txBody>
-      </p:sp>
-      <p:sp>
-        <p:nvSpPr>
-          <p:cNvPr id="12" name="Rounded Rectangle 11"/>
+      </p:cxnSp>
+      <p:sp>
+        <p:nvSpPr>
+          <p:cNvPr id="19" name="Rounded Rectangle 18"/>
           <p:cNvSpPr/>
           <p:nvPr/>
         </p:nvSpPr>
         <p:spPr>
           <a:xfrm>
-            <a:off x="594360" y="3840480"/>
-            <a:ext cx="3108960" cy="1371600"/>
+            <a:off x="9555480" y="2011680"/>
+            <a:ext cx="1920240" cy="2011680"/>
           </a:xfrm>
           <a:prstGeom prst="roundRect">
             <a:avLst/>
@@ -5915,14 +5413,14 @@
       </p:sp>
       <p:sp>
         <p:nvSpPr>
-          <p:cNvPr id="13" name="TextBox 12"/>
+          <p:cNvPr id="20" name="TextBox 19"/>
           <p:cNvSpPr txBox="1"/>
           <p:nvPr/>
         </p:nvSpPr>
         <p:spPr>
           <a:xfrm>
-            <a:off x="758952" y="3950208"/>
-            <a:ext cx="2834640" cy="320040"/>
+            <a:off x="9720072" y="2121408"/>
+            <a:ext cx="1645920" cy="320040"/>
           </a:xfrm>
           <a:prstGeom prst="rect">
             <a:avLst/>
@@ -5943,21 +5441,21 @@
               </a:defRPr>
             </a:pPr>
             <a:r>
-              <a:t>FAISS Search</a:t>
-            </a:r>
-          </a:p>
-        </p:txBody>
-      </p:sp>
-      <p:sp>
-        <p:nvSpPr>
-          <p:cNvPr id="14" name="TextBox 13"/>
+              <a:t>5. Indexing</a:t>
+            </a:r>
+          </a:p>
+        </p:txBody>
+      </p:sp>
+      <p:sp>
+        <p:nvSpPr>
+          <p:cNvPr id="21" name="TextBox 20"/>
           <p:cNvSpPr txBox="1"/>
           <p:nvPr/>
         </p:nvSpPr>
         <p:spPr>
           <a:xfrm>
-            <a:off x="758952" y="4297680"/>
-            <a:ext cx="2834640" cy="822960"/>
+            <a:off x="9720072" y="2468880"/>
+            <a:ext cx="1645920" cy="1463040"/>
           </a:xfrm>
           <a:prstGeom prst="rect">
             <a:avLst/>
@@ -5978,104 +5476,21 @@
               </a:defRPr>
             </a:pPr>
             <a:r>
-              <a:t>Finds the most relevant document chunks</a:t>
-            </a:r>
-          </a:p>
-        </p:txBody>
-      </p:sp>
-      <p:sp>
-        <p:nvSpPr>
-          <p:cNvPr id="15" name="Rounded Rectangle 14"/>
-          <p:cNvSpPr/>
-          <p:nvPr/>
-        </p:nvSpPr>
-        <p:spPr>
-          <a:xfrm>
-            <a:off x="4389120" y="3840480"/>
-            <a:ext cx="3108960" cy="1371600"/>
-          </a:xfrm>
-          <a:prstGeom prst="roundRect">
-            <a:avLst/>
-          </a:prstGeom>
-          <a:solidFill>
-            <a:srgbClr val="1E293B"/>
-          </a:solidFill>
-          <a:ln w="19050">
-            <a:solidFill>
-              <a:srgbClr val="A78BFA"/>
-            </a:solidFill>
-          </a:ln>
-        </p:spPr>
-        <p:style>
-          <a:lnRef idx="1">
-            <a:schemeClr val="accent1"/>
-          </a:lnRef>
-          <a:fillRef idx="3">
-            <a:schemeClr val="accent1"/>
-          </a:fillRef>
-          <a:effectRef idx="2">
-            <a:schemeClr val="accent1"/>
-          </a:effectRef>
-          <a:fontRef idx="minor">
-            <a:schemeClr val="lt1"/>
-          </a:fontRef>
-        </p:style>
-        <p:txBody>
-          <a:bodyPr rtlCol="0" anchor="ctr"/>
-          <a:lstStyle/>
-          <a:p>
-            <a:pPr algn="ctr"/>
-            <a:endParaRPr/>
-          </a:p>
-        </p:txBody>
-      </p:sp>
-      <p:sp>
-        <p:nvSpPr>
-          <p:cNvPr id="16" name="TextBox 15"/>
+              <a:t>Vectors stored in FAISS for retrieval</a:t>
+            </a:r>
+          </a:p>
+        </p:txBody>
+      </p:sp>
+      <p:sp>
+        <p:nvSpPr>
+          <p:cNvPr id="22" name="TextBox 21"/>
           <p:cNvSpPr txBox="1"/>
           <p:nvPr/>
         </p:nvSpPr>
         <p:spPr>
           <a:xfrm>
-            <a:off x="4553712" y="3950208"/>
-            <a:ext cx="1049390" cy="338554"/>
-          </a:xfrm>
-          <a:prstGeom prst="rect">
-            <a:avLst/>
-          </a:prstGeom>
-          <a:noFill/>
-        </p:spPr>
-        <p:txBody>
-          <a:bodyPr wrap="none">
-            <a:spAutoFit/>
-          </a:bodyPr>
-          <a:lstStyle/>
-          <a:p>
-            <a:pPr>
-              <a:defRPr sz="1600" b="1">
-                <a:solidFill>
-                  <a:srgbClr val="E2E8F0"/>
-                </a:solidFill>
-              </a:defRPr>
-            </a:pPr>
-            <a:r>
-              <a:rPr lang="en-US" dirty="0"/>
-              <a:t>Agentic AI</a:t>
-            </a:r>
-            <a:endParaRPr dirty="0"/>
-          </a:p>
-        </p:txBody>
-      </p:sp>
-      <p:sp>
-        <p:nvSpPr>
-          <p:cNvPr id="17" name="TextBox 16"/>
-          <p:cNvSpPr txBox="1"/>
-          <p:nvPr/>
-        </p:nvSpPr>
-        <p:spPr>
-          <a:xfrm>
-            <a:off x="4553712" y="4297680"/>
-            <a:ext cx="2834640" cy="276999"/>
+            <a:off x="868680" y="4846320"/>
+            <a:ext cx="10332720" cy="914400"/>
           </a:xfrm>
           <a:prstGeom prst="rect">
             <a:avLst/>
@@ -6089,321 +5504,33 @@
           <a:lstStyle/>
           <a:p>
             <a:pPr>
-              <a:defRPr sz="1200">
-                <a:solidFill>
-                  <a:srgbClr val="E2E8F0"/>
-                </a:solidFill>
-              </a:defRPr>
-            </a:pPr>
-            <a:r>
-              <a:rPr dirty="0"/>
-              <a:t>Returns extracted text and </a:t>
-            </a:r>
-            <a:r>
-              <a:rPr lang="en-US" dirty="0"/>
-              <a:t>PID</a:t>
-            </a:r>
-            <a:r>
-              <a:rPr dirty="0"/>
-              <a:t> data</a:t>
-            </a:r>
-          </a:p>
-        </p:txBody>
-      </p:sp>
-      <p:sp>
-        <p:nvSpPr>
-          <p:cNvPr id="18" name="Rounded Rectangle 17"/>
-          <p:cNvSpPr/>
-          <p:nvPr/>
-        </p:nvSpPr>
-        <p:spPr>
-          <a:xfrm>
-            <a:off x="8183880" y="3840480"/>
-            <a:ext cx="3108960" cy="1371600"/>
-          </a:xfrm>
-          <a:prstGeom prst="roundRect">
-            <a:avLst/>
-          </a:prstGeom>
-          <a:solidFill>
-            <a:srgbClr val="1E293B"/>
-          </a:solidFill>
-          <a:ln w="19050">
-            <a:solidFill>
-              <a:srgbClr val="22C55E"/>
-            </a:solidFill>
-          </a:ln>
-        </p:spPr>
-        <p:style>
-          <a:lnRef idx="1">
-            <a:schemeClr val="accent1"/>
-          </a:lnRef>
-          <a:fillRef idx="3">
-            <a:schemeClr val="accent1"/>
-          </a:fillRef>
-          <a:effectRef idx="2">
-            <a:schemeClr val="accent1"/>
-          </a:effectRef>
-          <a:fontRef idx="minor">
-            <a:schemeClr val="lt1"/>
-          </a:fontRef>
-        </p:style>
-        <p:txBody>
-          <a:bodyPr rtlCol="0" anchor="ctr"/>
-          <a:lstStyle/>
-          <a:p>
-            <a:pPr algn="ctr"/>
-            <a:endParaRPr/>
-          </a:p>
-        </p:txBody>
-      </p:sp>
-      <p:sp>
-        <p:nvSpPr>
-          <p:cNvPr id="19" name="TextBox 18"/>
-          <p:cNvSpPr txBox="1"/>
-          <p:nvPr/>
-        </p:nvSpPr>
-        <p:spPr>
-          <a:xfrm>
-            <a:off x="8348472" y="3950208"/>
-            <a:ext cx="2834640" cy="320040"/>
-          </a:xfrm>
-          <a:prstGeom prst="rect">
-            <a:avLst/>
-          </a:prstGeom>
-          <a:noFill/>
-        </p:spPr>
-        <p:txBody>
-          <a:bodyPr wrap="none">
-            <a:spAutoFit/>
-          </a:bodyPr>
-          <a:lstStyle/>
-          <a:p>
-            <a:pPr>
-              <a:defRPr sz="1600" b="1">
-                <a:solidFill>
-                  <a:srgbClr val="E2E8F0"/>
-                </a:solidFill>
-              </a:defRPr>
-            </a:pPr>
-            <a:r>
-              <a:t>UI Display</a:t>
-            </a:r>
-          </a:p>
-        </p:txBody>
-      </p:sp>
-      <p:sp>
-        <p:nvSpPr>
-          <p:cNvPr id="20" name="TextBox 19"/>
-          <p:cNvSpPr txBox="1"/>
-          <p:nvPr/>
-        </p:nvSpPr>
-        <p:spPr>
-          <a:xfrm>
-            <a:off x="8348472" y="4297680"/>
-            <a:ext cx="2834640" cy="822960"/>
-          </a:xfrm>
-          <a:prstGeom prst="rect">
-            <a:avLst/>
-          </a:prstGeom>
-          <a:noFill/>
-        </p:spPr>
-        <p:txBody>
-          <a:bodyPr wrap="square">
-            <a:spAutoFit/>
-          </a:bodyPr>
-          <a:lstStyle/>
-          <a:p>
-            <a:pPr>
-              <a:defRPr sz="1200">
-                <a:solidFill>
-                  <a:srgbClr val="E2E8F0"/>
-                </a:solidFill>
-              </a:defRPr>
-            </a:pPr>
-            <a:r>
-              <a:t>Results shown in React UI and FastAPI</a:t>
-            </a:r>
-          </a:p>
-        </p:txBody>
-      </p:sp>
-      <p:cxnSp>
-        <p:nvCxnSpPr>
-          <p:cNvPr id="21" name="Connector 20"/>
-          <p:cNvCxnSpPr/>
-          <p:nvPr/>
-        </p:nvCxnSpPr>
-        <p:spPr>
-          <a:xfrm>
-            <a:off x="3703320" y="2331720"/>
-            <a:ext cx="685800" cy="0"/>
-          </a:xfrm>
-          <a:prstGeom prst="line">
-            <a:avLst/>
-          </a:prstGeom>
-          <a:ln w="31750">
-            <a:solidFill>
-              <a:srgbClr val="38BDF8"/>
-            </a:solidFill>
-          </a:ln>
-        </p:spPr>
-        <p:style>
-          <a:lnRef idx="2">
-            <a:schemeClr val="accent1"/>
-          </a:lnRef>
-          <a:fillRef idx="0">
-            <a:schemeClr val="accent1"/>
-          </a:fillRef>
-          <a:effectRef idx="1">
-            <a:schemeClr val="accent1"/>
-          </a:effectRef>
-          <a:fontRef idx="minor">
-            <a:schemeClr val="tx1"/>
-          </a:fontRef>
-        </p:style>
-      </p:cxnSp>
-      <p:cxnSp>
-        <p:nvCxnSpPr>
-          <p:cNvPr id="22" name="Connector 21"/>
-          <p:cNvCxnSpPr/>
-          <p:nvPr/>
-        </p:nvCxnSpPr>
-        <p:spPr>
-          <a:xfrm>
-            <a:off x="7498079" y="2331720"/>
-            <a:ext cx="685800" cy="0"/>
-          </a:xfrm>
-          <a:prstGeom prst="line">
-            <a:avLst/>
-          </a:prstGeom>
-          <a:ln w="31750">
-            <a:solidFill>
-              <a:srgbClr val="38BDF8"/>
-            </a:solidFill>
-          </a:ln>
-        </p:spPr>
-        <p:style>
-          <a:lnRef idx="2">
-            <a:schemeClr val="accent1"/>
-          </a:lnRef>
-          <a:fillRef idx="0">
-            <a:schemeClr val="accent1"/>
-          </a:fillRef>
-          <a:effectRef idx="1">
-            <a:schemeClr val="accent1"/>
-          </a:effectRef>
-          <a:fontRef idx="minor">
-            <a:schemeClr val="tx1"/>
-          </a:fontRef>
-        </p:style>
-      </p:cxnSp>
-      <p:cxnSp>
-        <p:nvCxnSpPr>
-          <p:cNvPr id="23" name="Connector 22"/>
-          <p:cNvCxnSpPr/>
-          <p:nvPr/>
-        </p:nvCxnSpPr>
-        <p:spPr>
-          <a:xfrm>
-            <a:off x="9738360" y="3017520"/>
-            <a:ext cx="0" cy="822960"/>
-          </a:xfrm>
-          <a:prstGeom prst="line">
-            <a:avLst/>
-          </a:prstGeom>
-          <a:ln w="31750">
-            <a:solidFill>
-              <a:srgbClr val="38BDF8"/>
-            </a:solidFill>
-          </a:ln>
-        </p:spPr>
-        <p:style>
-          <a:lnRef idx="2">
-            <a:schemeClr val="accent1"/>
-          </a:lnRef>
-          <a:fillRef idx="0">
-            <a:schemeClr val="accent1"/>
-          </a:fillRef>
-          <a:effectRef idx="1">
-            <a:schemeClr val="accent1"/>
-          </a:effectRef>
-          <a:fontRef idx="minor">
-            <a:schemeClr val="tx1"/>
-          </a:fontRef>
-        </p:style>
-      </p:cxnSp>
-      <p:cxnSp>
-        <p:nvCxnSpPr>
-          <p:cNvPr id="24" name="Connector 23"/>
-          <p:cNvCxnSpPr/>
-          <p:nvPr/>
-        </p:nvCxnSpPr>
-        <p:spPr>
-          <a:xfrm>
-            <a:off x="3703320" y="4526280"/>
-            <a:ext cx="685800" cy="0"/>
-          </a:xfrm>
-          <a:prstGeom prst="line">
-            <a:avLst/>
-          </a:prstGeom>
-          <a:ln w="31750">
-            <a:solidFill>
-              <a:srgbClr val="38BDF8"/>
-            </a:solidFill>
-          </a:ln>
-        </p:spPr>
-        <p:style>
-          <a:lnRef idx="2">
-            <a:schemeClr val="accent1"/>
-          </a:lnRef>
-          <a:fillRef idx="0">
-            <a:schemeClr val="accent1"/>
-          </a:fillRef>
-          <a:effectRef idx="1">
-            <a:schemeClr val="accent1"/>
-          </a:effectRef>
-          <a:fontRef idx="minor">
-            <a:schemeClr val="tx1"/>
-          </a:fontRef>
-        </p:style>
-      </p:cxnSp>
-      <p:cxnSp>
-        <p:nvCxnSpPr>
-          <p:cNvPr id="25" name="Connector 24"/>
-          <p:cNvCxnSpPr/>
-          <p:nvPr/>
-        </p:nvCxnSpPr>
-        <p:spPr>
-          <a:xfrm>
-            <a:off x="7498079" y="4526280"/>
-            <a:ext cx="685800" cy="0"/>
-          </a:xfrm>
-          <a:prstGeom prst="line">
-            <a:avLst/>
-          </a:prstGeom>
-          <a:ln w="31750">
-            <a:solidFill>
-              <a:srgbClr val="38BDF8"/>
-            </a:solidFill>
-          </a:ln>
-        </p:spPr>
-        <p:style>
-          <a:lnRef idx="2">
-            <a:schemeClr val="accent1"/>
-          </a:lnRef>
-          <a:fillRef idx="0">
-            <a:schemeClr val="accent1"/>
-          </a:fillRef>
-          <a:effectRef idx="1">
-            <a:schemeClr val="accent1"/>
-          </a:effectRef>
-          <a:fontRef idx="minor">
-            <a:schemeClr val="tx1"/>
-          </a:fontRef>
-        </p:style>
-      </p:cxnSp>
-      <p:sp>
-        <p:nvSpPr>
-          <p:cNvPr id="26" name="TextBox 25"/>
+              <a:defRPr sz="1600">
+                <a:solidFill>
+                  <a:srgbClr val="E2E8F0"/>
+                </a:solidFill>
+              </a:defRPr>
+            </a:pPr>
+            <a:r>
+              <a:t>This pipeline prepares the local knowledge base for semantic search.</a:t>
+            </a:r>
+          </a:p>
+          <a:p>
+            <a:pPr>
+              <a:defRPr sz="1600">
+                <a:solidFill>
+                  <a:srgbClr val="E2E8F0"/>
+                </a:solidFill>
+              </a:defRPr>
+            </a:pPr>
+            <a:r>
+              <a:t>The output of this stage is a searchable FAISS index used at query time.</a:t>
+            </a:r>
+          </a:p>
+        </p:txBody>
+      </p:sp>
+      <p:sp>
+        <p:nvSpPr>
+          <p:cNvPr id="23" name="TextBox 22"/>
           <p:cNvSpPr txBox="1"/>
           <p:nvPr/>
         </p:nvSpPr>
@@ -6497,7 +5624,7 @@
                   <a:srgbClr val="E2E8F0"/>
                 </a:solidFill>
               </a:rPr>
-              <a:t>Output Experience</a:t>
+              <a:t>Runtime Query Flow</a:t>
             </a:r>
           </a:p>
           <a:p>
@@ -6509,7 +5636,7 @@
               </a:defRPr>
             </a:pPr>
             <a:r>
-              <a:t>What the user sees and what the system returns</a:t>
+              <a:t>What happens when a user asks a question</a:t>
             </a:r>
           </a:p>
         </p:txBody>
@@ -6522,8 +5649,472 @@
         </p:nvSpPr>
         <p:spPr>
           <a:xfrm>
-            <a:off x="822960" y="1554480"/>
-            <a:ext cx="4937760" cy="3474720"/>
+            <a:off x="594360" y="1645920"/>
+            <a:ext cx="3108960" cy="1371600"/>
+          </a:xfrm>
+          <a:prstGeom prst="roundRect">
+            <a:avLst/>
+          </a:prstGeom>
+          <a:solidFill>
+            <a:srgbClr val="1E293B"/>
+          </a:solidFill>
+          <a:ln w="19050">
+            <a:solidFill>
+              <a:srgbClr val="38BDF8"/>
+            </a:solidFill>
+          </a:ln>
+        </p:spPr>
+        <p:style>
+          <a:lnRef idx="1">
+            <a:schemeClr val="accent1"/>
+          </a:lnRef>
+          <a:fillRef idx="3">
+            <a:schemeClr val="accent1"/>
+          </a:fillRef>
+          <a:effectRef idx="2">
+            <a:schemeClr val="accent1"/>
+          </a:effectRef>
+          <a:fontRef idx="minor">
+            <a:schemeClr val="lt1"/>
+          </a:fontRef>
+        </p:style>
+        <p:txBody>
+          <a:bodyPr rtlCol="0" anchor="ctr"/>
+          <a:lstStyle/>
+          <a:p>
+            <a:pPr algn="ctr"/>
+            <a:endParaRPr/>
+          </a:p>
+        </p:txBody>
+      </p:sp>
+      <p:sp>
+        <p:nvSpPr>
+          <p:cNvPr id="4" name="TextBox 3"/>
+          <p:cNvSpPr txBox="1"/>
+          <p:nvPr/>
+        </p:nvSpPr>
+        <p:spPr>
+          <a:xfrm>
+            <a:off x="758952" y="1755648"/>
+            <a:ext cx="2834640" cy="320040"/>
+          </a:xfrm>
+          <a:prstGeom prst="rect">
+            <a:avLst/>
+          </a:prstGeom>
+          <a:noFill/>
+        </p:spPr>
+        <p:txBody>
+          <a:bodyPr wrap="none">
+            <a:spAutoFit/>
+          </a:bodyPr>
+          <a:lstStyle/>
+          <a:p>
+            <a:pPr>
+              <a:defRPr sz="1600" b="1">
+                <a:solidFill>
+                  <a:srgbClr val="E2E8F0"/>
+                </a:solidFill>
+              </a:defRPr>
+            </a:pPr>
+            <a:r>
+              <a:t>User Query</a:t>
+            </a:r>
+          </a:p>
+        </p:txBody>
+      </p:sp>
+      <p:sp>
+        <p:nvSpPr>
+          <p:cNvPr id="5" name="TextBox 4"/>
+          <p:cNvSpPr txBox="1"/>
+          <p:nvPr/>
+        </p:nvSpPr>
+        <p:spPr>
+          <a:xfrm>
+            <a:off x="758952" y="2103120"/>
+            <a:ext cx="2834640" cy="822960"/>
+          </a:xfrm>
+          <a:prstGeom prst="rect">
+            <a:avLst/>
+          </a:prstGeom>
+          <a:noFill/>
+        </p:spPr>
+        <p:txBody>
+          <a:bodyPr wrap="square">
+            <a:spAutoFit/>
+          </a:bodyPr>
+          <a:lstStyle/>
+          <a:p>
+            <a:pPr>
+              <a:defRPr sz="1200">
+                <a:solidFill>
+                  <a:srgbClr val="E2E8F0"/>
+                </a:solidFill>
+              </a:defRPr>
+            </a:pPr>
+            <a:r>
+              <a:t>Question entered in React UI</a:t>
+            </a:r>
+          </a:p>
+        </p:txBody>
+      </p:sp>
+      <p:sp>
+        <p:nvSpPr>
+          <p:cNvPr id="6" name="Rounded Rectangle 5"/>
+          <p:cNvSpPr/>
+          <p:nvPr/>
+        </p:nvSpPr>
+        <p:spPr>
+          <a:xfrm>
+            <a:off x="4389120" y="1645920"/>
+            <a:ext cx="3108960" cy="1371600"/>
+          </a:xfrm>
+          <a:prstGeom prst="roundRect">
+            <a:avLst/>
+          </a:prstGeom>
+          <a:solidFill>
+            <a:srgbClr val="1E293B"/>
+          </a:solidFill>
+          <a:ln w="19050">
+            <a:solidFill>
+              <a:srgbClr val="22C55E"/>
+            </a:solidFill>
+          </a:ln>
+        </p:spPr>
+        <p:style>
+          <a:lnRef idx="1">
+            <a:schemeClr val="accent1"/>
+          </a:lnRef>
+          <a:fillRef idx="3">
+            <a:schemeClr val="accent1"/>
+          </a:fillRef>
+          <a:effectRef idx="2">
+            <a:schemeClr val="accent1"/>
+          </a:effectRef>
+          <a:fontRef idx="minor">
+            <a:schemeClr val="lt1"/>
+          </a:fontRef>
+        </p:style>
+        <p:txBody>
+          <a:bodyPr rtlCol="0" anchor="ctr"/>
+          <a:lstStyle/>
+          <a:p>
+            <a:pPr algn="ctr"/>
+            <a:endParaRPr/>
+          </a:p>
+        </p:txBody>
+      </p:sp>
+      <p:sp>
+        <p:nvSpPr>
+          <p:cNvPr id="7" name="TextBox 6"/>
+          <p:cNvSpPr txBox="1"/>
+          <p:nvPr/>
+        </p:nvSpPr>
+        <p:spPr>
+          <a:xfrm>
+            <a:off x="4553712" y="1755648"/>
+            <a:ext cx="2834640" cy="320040"/>
+          </a:xfrm>
+          <a:prstGeom prst="rect">
+            <a:avLst/>
+          </a:prstGeom>
+          <a:noFill/>
+        </p:spPr>
+        <p:txBody>
+          <a:bodyPr wrap="none">
+            <a:spAutoFit/>
+          </a:bodyPr>
+          <a:lstStyle/>
+          <a:p>
+            <a:pPr>
+              <a:defRPr sz="1600" b="1">
+                <a:solidFill>
+                  <a:srgbClr val="E2E8F0"/>
+                </a:solidFill>
+              </a:defRPr>
+            </a:pPr>
+            <a:r>
+              <a:t>Backend API</a:t>
+            </a:r>
+          </a:p>
+        </p:txBody>
+      </p:sp>
+      <p:sp>
+        <p:nvSpPr>
+          <p:cNvPr id="8" name="TextBox 7"/>
+          <p:cNvSpPr txBox="1"/>
+          <p:nvPr/>
+        </p:nvSpPr>
+        <p:spPr>
+          <a:xfrm>
+            <a:off x="4553712" y="2103120"/>
+            <a:ext cx="2834640" cy="822960"/>
+          </a:xfrm>
+          <a:prstGeom prst="rect">
+            <a:avLst/>
+          </a:prstGeom>
+          <a:noFill/>
+        </p:spPr>
+        <p:txBody>
+          <a:bodyPr wrap="square">
+            <a:spAutoFit/>
+          </a:bodyPr>
+          <a:lstStyle/>
+          <a:p>
+            <a:pPr>
+              <a:defRPr sz="1200">
+                <a:solidFill>
+                  <a:srgbClr val="E2E8F0"/>
+                </a:solidFill>
+              </a:defRPr>
+            </a:pPr>
+            <a:r>
+              <a:t>FastAPI receives and validates request</a:t>
+            </a:r>
+          </a:p>
+        </p:txBody>
+      </p:sp>
+      <p:sp>
+        <p:nvSpPr>
+          <p:cNvPr id="9" name="Rounded Rectangle 8"/>
+          <p:cNvSpPr/>
+          <p:nvPr/>
+        </p:nvSpPr>
+        <p:spPr>
+          <a:xfrm>
+            <a:off x="8183880" y="1645920"/>
+            <a:ext cx="3108960" cy="1371600"/>
+          </a:xfrm>
+          <a:prstGeom prst="roundRect">
+            <a:avLst/>
+          </a:prstGeom>
+          <a:solidFill>
+            <a:srgbClr val="1E293B"/>
+          </a:solidFill>
+          <a:ln w="19050">
+            <a:solidFill>
+              <a:srgbClr val="FBBF24"/>
+            </a:solidFill>
+          </a:ln>
+        </p:spPr>
+        <p:style>
+          <a:lnRef idx="1">
+            <a:schemeClr val="accent1"/>
+          </a:lnRef>
+          <a:fillRef idx="3">
+            <a:schemeClr val="accent1"/>
+          </a:fillRef>
+          <a:effectRef idx="2">
+            <a:schemeClr val="accent1"/>
+          </a:effectRef>
+          <a:fontRef idx="minor">
+            <a:schemeClr val="lt1"/>
+          </a:fontRef>
+        </p:style>
+        <p:txBody>
+          <a:bodyPr rtlCol="0" anchor="ctr"/>
+          <a:lstStyle/>
+          <a:p>
+            <a:pPr algn="ctr"/>
+            <a:endParaRPr/>
+          </a:p>
+        </p:txBody>
+      </p:sp>
+      <p:sp>
+        <p:nvSpPr>
+          <p:cNvPr id="10" name="TextBox 9"/>
+          <p:cNvSpPr txBox="1"/>
+          <p:nvPr/>
+        </p:nvSpPr>
+        <p:spPr>
+          <a:xfrm>
+            <a:off x="8348472" y="1755648"/>
+            <a:ext cx="2834640" cy="320040"/>
+          </a:xfrm>
+          <a:prstGeom prst="rect">
+            <a:avLst/>
+          </a:prstGeom>
+          <a:noFill/>
+        </p:spPr>
+        <p:txBody>
+          <a:bodyPr wrap="none">
+            <a:spAutoFit/>
+          </a:bodyPr>
+          <a:lstStyle/>
+          <a:p>
+            <a:pPr>
+              <a:defRPr sz="1600" b="1">
+                <a:solidFill>
+                  <a:srgbClr val="E2E8F0"/>
+                </a:solidFill>
+              </a:defRPr>
+            </a:pPr>
+            <a:r>
+              <a:t>Agentic AI</a:t>
+            </a:r>
+          </a:p>
+        </p:txBody>
+      </p:sp>
+      <p:sp>
+        <p:nvSpPr>
+          <p:cNvPr id="11" name="TextBox 10"/>
+          <p:cNvSpPr txBox="1"/>
+          <p:nvPr/>
+        </p:nvSpPr>
+        <p:spPr>
+          <a:xfrm>
+            <a:off x="8348472" y="2103120"/>
+            <a:ext cx="2834640" cy="822960"/>
+          </a:xfrm>
+          <a:prstGeom prst="rect">
+            <a:avLst/>
+          </a:prstGeom>
+          <a:noFill/>
+        </p:spPr>
+        <p:txBody>
+          <a:bodyPr wrap="square">
+            <a:spAutoFit/>
+          </a:bodyPr>
+          <a:lstStyle/>
+          <a:p>
+            <a:pPr>
+              <a:defRPr sz="1200">
+                <a:solidFill>
+                  <a:srgbClr val="E2E8F0"/>
+                </a:solidFill>
+              </a:defRPr>
+            </a:pPr>
+            <a:r>
+              <a:t>Builds context and retrieval strategy</a:t>
+            </a:r>
+          </a:p>
+        </p:txBody>
+      </p:sp>
+      <p:sp>
+        <p:nvSpPr>
+          <p:cNvPr id="12" name="Rounded Rectangle 11"/>
+          <p:cNvSpPr/>
+          <p:nvPr/>
+        </p:nvSpPr>
+        <p:spPr>
+          <a:xfrm>
+            <a:off x="594360" y="3840480"/>
+            <a:ext cx="3108960" cy="1371600"/>
+          </a:xfrm>
+          <a:prstGeom prst="roundRect">
+            <a:avLst/>
+          </a:prstGeom>
+          <a:solidFill>
+            <a:srgbClr val="1E293B"/>
+          </a:solidFill>
+          <a:ln w="19050">
+            <a:solidFill>
+              <a:srgbClr val="F87171"/>
+            </a:solidFill>
+          </a:ln>
+        </p:spPr>
+        <p:style>
+          <a:lnRef idx="1">
+            <a:schemeClr val="accent1"/>
+          </a:lnRef>
+          <a:fillRef idx="3">
+            <a:schemeClr val="accent1"/>
+          </a:fillRef>
+          <a:effectRef idx="2">
+            <a:schemeClr val="accent1"/>
+          </a:effectRef>
+          <a:fontRef idx="minor">
+            <a:schemeClr val="lt1"/>
+          </a:fontRef>
+        </p:style>
+        <p:txBody>
+          <a:bodyPr rtlCol="0" anchor="ctr"/>
+          <a:lstStyle/>
+          <a:p>
+            <a:pPr algn="ctr"/>
+            <a:endParaRPr/>
+          </a:p>
+        </p:txBody>
+      </p:sp>
+      <p:sp>
+        <p:nvSpPr>
+          <p:cNvPr id="13" name="TextBox 12"/>
+          <p:cNvSpPr txBox="1"/>
+          <p:nvPr/>
+        </p:nvSpPr>
+        <p:spPr>
+          <a:xfrm>
+            <a:off x="758952" y="3950208"/>
+            <a:ext cx="2834640" cy="320040"/>
+          </a:xfrm>
+          <a:prstGeom prst="rect">
+            <a:avLst/>
+          </a:prstGeom>
+          <a:noFill/>
+        </p:spPr>
+        <p:txBody>
+          <a:bodyPr wrap="none">
+            <a:spAutoFit/>
+          </a:bodyPr>
+          <a:lstStyle/>
+          <a:p>
+            <a:pPr>
+              <a:defRPr sz="1600" b="1">
+                <a:solidFill>
+                  <a:srgbClr val="E2E8F0"/>
+                </a:solidFill>
+              </a:defRPr>
+            </a:pPr>
+            <a:r>
+              <a:t>FAISS Search</a:t>
+            </a:r>
+          </a:p>
+        </p:txBody>
+      </p:sp>
+      <p:sp>
+        <p:nvSpPr>
+          <p:cNvPr id="14" name="TextBox 13"/>
+          <p:cNvSpPr txBox="1"/>
+          <p:nvPr/>
+        </p:nvSpPr>
+        <p:spPr>
+          <a:xfrm>
+            <a:off x="758952" y="4297680"/>
+            <a:ext cx="2834640" cy="822960"/>
+          </a:xfrm>
+          <a:prstGeom prst="rect">
+            <a:avLst/>
+          </a:prstGeom>
+          <a:noFill/>
+        </p:spPr>
+        <p:txBody>
+          <a:bodyPr wrap="square">
+            <a:spAutoFit/>
+          </a:bodyPr>
+          <a:lstStyle/>
+          <a:p>
+            <a:pPr>
+              <a:defRPr sz="1200">
+                <a:solidFill>
+                  <a:srgbClr val="E2E8F0"/>
+                </a:solidFill>
+              </a:defRPr>
+            </a:pPr>
+            <a:r>
+              <a:t>Finds the most relevant document chunks</a:t>
+            </a:r>
+          </a:p>
+        </p:txBody>
+      </p:sp>
+      <p:sp>
+        <p:nvSpPr>
+          <p:cNvPr id="15" name="Rounded Rectangle 14"/>
+          <p:cNvSpPr/>
+          <p:nvPr/>
+        </p:nvSpPr>
+        <p:spPr>
+          <a:xfrm>
+            <a:off x="4389120" y="3840480"/>
+            <a:ext cx="3108960" cy="1371600"/>
           </a:xfrm>
           <a:prstGeom prst="roundRect">
             <a:avLst/>
@@ -6562,14 +6153,14 @@
       </p:sp>
       <p:sp>
         <p:nvSpPr>
-          <p:cNvPr id="4" name="TextBox 3"/>
+          <p:cNvPr id="16" name="TextBox 15"/>
           <p:cNvSpPr txBox="1"/>
           <p:nvPr/>
         </p:nvSpPr>
         <p:spPr>
           <a:xfrm>
-            <a:off x="987552" y="1664208"/>
-            <a:ext cx="1214563" cy="338554"/>
+            <a:off x="4553712" y="3950208"/>
+            <a:ext cx="1049390" cy="338554"/>
           </a:xfrm>
           <a:prstGeom prst="rect">
             <a:avLst/>
@@ -6591,25 +6182,22 @@
             </a:pPr>
             <a:r>
               <a:rPr lang="en-US" dirty="0"/>
-              <a:t>Served</a:t>
-            </a:r>
-            <a:r>
-              <a:rPr dirty="0"/>
-              <a:t> Data</a:t>
-            </a:r>
-          </a:p>
-        </p:txBody>
-      </p:sp>
-      <p:sp>
-        <p:nvSpPr>
-          <p:cNvPr id="5" name="TextBox 4"/>
+              <a:t>Agentic AI</a:t>
+            </a:r>
+            <a:endParaRPr dirty="0"/>
+          </a:p>
+        </p:txBody>
+      </p:sp>
+      <p:sp>
+        <p:nvSpPr>
+          <p:cNvPr id="17" name="TextBox 16"/>
           <p:cNvSpPr txBox="1"/>
           <p:nvPr/>
         </p:nvSpPr>
         <p:spPr>
           <a:xfrm>
-            <a:off x="987552" y="2011680"/>
-            <a:ext cx="4663440" cy="646331"/>
+            <a:off x="4553712" y="4297680"/>
+            <a:ext cx="2834640" cy="276999"/>
           </a:xfrm>
           <a:prstGeom prst="rect">
             <a:avLst/>
@@ -6631,51 +6219,29 @@
             </a:pPr>
             <a:r>
               <a:rPr dirty="0"/>
-              <a:t>Extracted text from PDF content</a:t>
-            </a:r>
-          </a:p>
-          <a:p>
-            <a:pPr>
-              <a:defRPr sz="1200">
-                <a:solidFill>
-                  <a:srgbClr val="E2E8F0"/>
-                </a:solidFill>
-              </a:defRPr>
-            </a:pPr>
+              <a:t>Returns extracted text and </a:t>
+            </a:r>
             <a:r>
               <a:rPr lang="en-US" dirty="0"/>
               <a:t>PID</a:t>
             </a:r>
             <a:r>
               <a:rPr dirty="0"/>
-              <a:t> data identified by the model</a:t>
-            </a:r>
-          </a:p>
-          <a:p>
-            <a:pPr>
-              <a:defRPr sz="1200">
-                <a:solidFill>
-                  <a:srgbClr val="E2E8F0"/>
-                </a:solidFill>
-              </a:defRPr>
-            </a:pPr>
-            <a:r>
-              <a:rPr dirty="0"/>
-              <a:t>Results are tailored for local document intelligence workflows</a:t>
-            </a:r>
-          </a:p>
-        </p:txBody>
-      </p:sp>
-      <p:sp>
-        <p:nvSpPr>
-          <p:cNvPr id="6" name="Rounded Rectangle 5"/>
+              <a:t> data</a:t>
+            </a:r>
+          </a:p>
+        </p:txBody>
+      </p:sp>
+      <p:sp>
+        <p:nvSpPr>
+          <p:cNvPr id="18" name="Rounded Rectangle 17"/>
           <p:cNvSpPr/>
           <p:nvPr/>
         </p:nvSpPr>
         <p:spPr>
           <a:xfrm>
-            <a:off x="6309360" y="1554480"/>
-            <a:ext cx="4937760" cy="3474720"/>
+            <a:off x="8183880" y="3840480"/>
+            <a:ext cx="3108960" cy="1371600"/>
           </a:xfrm>
           <a:prstGeom prst="roundRect">
             <a:avLst/>
@@ -6714,14 +6280,14 @@
       </p:sp>
       <p:sp>
         <p:nvSpPr>
-          <p:cNvPr id="7" name="TextBox 6"/>
+          <p:cNvPr id="19" name="TextBox 18"/>
           <p:cNvSpPr txBox="1"/>
           <p:nvPr/>
         </p:nvSpPr>
         <p:spPr>
           <a:xfrm>
-            <a:off x="6473952" y="1664208"/>
-            <a:ext cx="2443041" cy="338554"/>
+            <a:off x="8348472" y="3950208"/>
+            <a:ext cx="2834640" cy="320040"/>
           </a:xfrm>
           <a:prstGeom prst="rect">
             <a:avLst/>
@@ -6742,31 +6308,21 @@
               </a:defRPr>
             </a:pPr>
             <a:r>
-              <a:rPr lang="en-US" dirty="0"/>
-              <a:t>Rendering </a:t>
-            </a:r>
-            <a:r>
-              <a:rPr dirty="0"/>
-              <a:t>Display </a:t>
-            </a:r>
-            <a:r>
-              <a:rPr lang="en-US" dirty="0"/>
-              <a:t>Content</a:t>
-            </a:r>
-            <a:endParaRPr dirty="0"/>
-          </a:p>
-        </p:txBody>
-      </p:sp>
-      <p:sp>
-        <p:nvSpPr>
-          <p:cNvPr id="8" name="TextBox 7"/>
+              <a:t>UI Display</a:t>
+            </a:r>
+          </a:p>
+        </p:txBody>
+      </p:sp>
+      <p:sp>
+        <p:nvSpPr>
+          <p:cNvPr id="20" name="TextBox 19"/>
           <p:cNvSpPr txBox="1"/>
           <p:nvPr/>
         </p:nvSpPr>
         <p:spPr>
           <a:xfrm>
-            <a:off x="6473952" y="2011680"/>
-            <a:ext cx="4663440" cy="2926080"/>
+            <a:off x="8348472" y="4297680"/>
+            <a:ext cx="2834640" cy="822960"/>
           </a:xfrm>
           <a:prstGeom prst="rect">
             <a:avLst/>
@@ -6787,73 +6343,189 @@
               </a:defRPr>
             </a:pPr>
             <a:r>
-              <a:t>ReactJS frontend for end-user interaction</a:t>
-            </a:r>
-          </a:p>
-          <a:p>
-            <a:pPr>
-              <a:defRPr sz="1200">
-                <a:solidFill>
-                  <a:srgbClr val="E2E8F0"/>
-                </a:solidFill>
-              </a:defRPr>
-            </a:pPr>
-            <a:r>
-              <a:t>FastAPI-backed service layer for delivery and API integration</a:t>
-            </a:r>
-          </a:p>
-          <a:p>
-            <a:pPr>
-              <a:defRPr sz="1200">
-                <a:solidFill>
-                  <a:srgbClr val="E2E8F0"/>
-                </a:solidFill>
-              </a:defRPr>
-            </a:pPr>
-            <a:r>
-              <a:t>Consistent result presentation across the application flow</a:t>
-            </a:r>
-          </a:p>
-        </p:txBody>
-      </p:sp>
-      <p:sp>
-        <p:nvSpPr>
-          <p:cNvPr id="9" name="TextBox 8"/>
-          <p:cNvSpPr txBox="1"/>
-          <p:nvPr/>
-        </p:nvSpPr>
-        <p:spPr>
-          <a:xfrm>
-            <a:off x="914400" y="5394960"/>
-            <a:ext cx="10424160" cy="548640"/>
-          </a:xfrm>
-          <a:prstGeom prst="rect">
-            <a:avLst/>
-          </a:prstGeom>
-          <a:noFill/>
-        </p:spPr>
-        <p:txBody>
-          <a:bodyPr wrap="square">
-            <a:spAutoFit/>
-          </a:bodyPr>
-          <a:lstStyle/>
-          <a:p>
-            <a:pPr>
-              <a:defRPr sz="1600">
-                <a:solidFill>
-                  <a:srgbClr val="E2E8F0"/>
-                </a:solidFill>
-              </a:defRPr>
-            </a:pPr>
-            <a:r>
-              <a:t>This design keeps the interaction simple: query in, extracted text and transaction-focused results out.</a:t>
-            </a:r>
-          </a:p>
-        </p:txBody>
-      </p:sp>
-      <p:sp>
-        <p:nvSpPr>
-          <p:cNvPr id="10" name="TextBox 9"/>
+              <a:t>Results shown in React UI and FastAPI</a:t>
+            </a:r>
+          </a:p>
+        </p:txBody>
+      </p:sp>
+      <p:cxnSp>
+        <p:nvCxnSpPr>
+          <p:cNvPr id="21" name="Connector 20"/>
+          <p:cNvCxnSpPr/>
+          <p:nvPr/>
+        </p:nvCxnSpPr>
+        <p:spPr>
+          <a:xfrm>
+            <a:off x="3703320" y="2331720"/>
+            <a:ext cx="685800" cy="0"/>
+          </a:xfrm>
+          <a:prstGeom prst="line">
+            <a:avLst/>
+          </a:prstGeom>
+          <a:ln w="31750">
+            <a:solidFill>
+              <a:srgbClr val="38BDF8"/>
+            </a:solidFill>
+          </a:ln>
+        </p:spPr>
+        <p:style>
+          <a:lnRef idx="2">
+            <a:schemeClr val="accent1"/>
+          </a:lnRef>
+          <a:fillRef idx="0">
+            <a:schemeClr val="accent1"/>
+          </a:fillRef>
+          <a:effectRef idx="1">
+            <a:schemeClr val="accent1"/>
+          </a:effectRef>
+          <a:fontRef idx="minor">
+            <a:schemeClr val="tx1"/>
+          </a:fontRef>
+        </p:style>
+      </p:cxnSp>
+      <p:cxnSp>
+        <p:nvCxnSpPr>
+          <p:cNvPr id="22" name="Connector 21"/>
+          <p:cNvCxnSpPr/>
+          <p:nvPr/>
+        </p:nvCxnSpPr>
+        <p:spPr>
+          <a:xfrm>
+            <a:off x="7498079" y="2331720"/>
+            <a:ext cx="685800" cy="0"/>
+          </a:xfrm>
+          <a:prstGeom prst="line">
+            <a:avLst/>
+          </a:prstGeom>
+          <a:ln w="31750">
+            <a:solidFill>
+              <a:srgbClr val="38BDF8"/>
+            </a:solidFill>
+          </a:ln>
+        </p:spPr>
+        <p:style>
+          <a:lnRef idx="2">
+            <a:schemeClr val="accent1"/>
+          </a:lnRef>
+          <a:fillRef idx="0">
+            <a:schemeClr val="accent1"/>
+          </a:fillRef>
+          <a:effectRef idx="1">
+            <a:schemeClr val="accent1"/>
+          </a:effectRef>
+          <a:fontRef idx="minor">
+            <a:schemeClr val="tx1"/>
+          </a:fontRef>
+        </p:style>
+      </p:cxnSp>
+      <p:cxnSp>
+        <p:nvCxnSpPr>
+          <p:cNvPr id="23" name="Connector 22"/>
+          <p:cNvCxnSpPr/>
+          <p:nvPr/>
+        </p:nvCxnSpPr>
+        <p:spPr>
+          <a:xfrm>
+            <a:off x="9738360" y="3017520"/>
+            <a:ext cx="0" cy="822960"/>
+          </a:xfrm>
+          <a:prstGeom prst="line">
+            <a:avLst/>
+          </a:prstGeom>
+          <a:ln w="31750">
+            <a:solidFill>
+              <a:srgbClr val="38BDF8"/>
+            </a:solidFill>
+          </a:ln>
+        </p:spPr>
+        <p:style>
+          <a:lnRef idx="2">
+            <a:schemeClr val="accent1"/>
+          </a:lnRef>
+          <a:fillRef idx="0">
+            <a:schemeClr val="accent1"/>
+          </a:fillRef>
+          <a:effectRef idx="1">
+            <a:schemeClr val="accent1"/>
+          </a:effectRef>
+          <a:fontRef idx="minor">
+            <a:schemeClr val="tx1"/>
+          </a:fontRef>
+        </p:style>
+      </p:cxnSp>
+      <p:cxnSp>
+        <p:nvCxnSpPr>
+          <p:cNvPr id="24" name="Connector 23"/>
+          <p:cNvCxnSpPr/>
+          <p:nvPr/>
+        </p:nvCxnSpPr>
+        <p:spPr>
+          <a:xfrm>
+            <a:off x="3703320" y="4526280"/>
+            <a:ext cx="685800" cy="0"/>
+          </a:xfrm>
+          <a:prstGeom prst="line">
+            <a:avLst/>
+          </a:prstGeom>
+          <a:ln w="31750">
+            <a:solidFill>
+              <a:srgbClr val="38BDF8"/>
+            </a:solidFill>
+          </a:ln>
+        </p:spPr>
+        <p:style>
+          <a:lnRef idx="2">
+            <a:schemeClr val="accent1"/>
+          </a:lnRef>
+          <a:fillRef idx="0">
+            <a:schemeClr val="accent1"/>
+          </a:fillRef>
+          <a:effectRef idx="1">
+            <a:schemeClr val="accent1"/>
+          </a:effectRef>
+          <a:fontRef idx="minor">
+            <a:schemeClr val="tx1"/>
+          </a:fontRef>
+        </p:style>
+      </p:cxnSp>
+      <p:cxnSp>
+        <p:nvCxnSpPr>
+          <p:cNvPr id="25" name="Connector 24"/>
+          <p:cNvCxnSpPr/>
+          <p:nvPr/>
+        </p:nvCxnSpPr>
+        <p:spPr>
+          <a:xfrm>
+            <a:off x="7498079" y="4526280"/>
+            <a:ext cx="685800" cy="0"/>
+          </a:xfrm>
+          <a:prstGeom prst="line">
+            <a:avLst/>
+          </a:prstGeom>
+          <a:ln w="31750">
+            <a:solidFill>
+              <a:srgbClr val="38BDF8"/>
+            </a:solidFill>
+          </a:ln>
+        </p:spPr>
+        <p:style>
+          <a:lnRef idx="2">
+            <a:schemeClr val="accent1"/>
+          </a:lnRef>
+          <a:fillRef idx="0">
+            <a:schemeClr val="accent1"/>
+          </a:fillRef>
+          <a:effectRef idx="1">
+            <a:schemeClr val="accent1"/>
+          </a:effectRef>
+          <a:fontRef idx="minor">
+            <a:schemeClr val="tx1"/>
+          </a:fontRef>
+        </p:style>
+      </p:cxnSp>
+      <p:sp>
+        <p:nvSpPr>
+          <p:cNvPr id="26" name="TextBox 25"/>
           <p:cNvSpPr txBox="1"/>
           <p:nvPr/>
         </p:nvSpPr>
@@ -6928,7 +6600,7 @@
         <p:spPr>
           <a:xfrm>
             <a:off x="548640" y="320040"/>
-            <a:ext cx="3235886" cy="707886"/>
+            <a:ext cx="11064240" cy="822960"/>
           </a:xfrm>
           <a:prstGeom prst="rect">
             <a:avLst/>
@@ -6942,12 +6614,12 @@
           <a:lstStyle/>
           <a:p>
             <a:r>
-              <a:rPr sz="2800" b="1" dirty="0">
+              <a:rPr sz="2800" b="1">
                 <a:solidFill>
                   <a:srgbClr val="E2E8F0"/>
                 </a:solidFill>
               </a:rPr>
-              <a:t>Tech Stack Summary</a:t>
+              <a:t>Output Experience</a:t>
             </a:r>
           </a:p>
           <a:p>
@@ -6959,14 +6631,8 @@
               </a:defRPr>
             </a:pPr>
             <a:r>
-              <a:rPr dirty="0"/>
-              <a:t>project stack organized by layer</a:t>
-            </a:r>
-            <a:r>
-              <a:rPr lang="en-US" dirty="0"/>
-              <a:t>s</a:t>
-            </a:r>
-            <a:endParaRPr dirty="0"/>
+              <a:t>What the user sees and what the system returns</a:t>
+            </a:r>
           </a:p>
         </p:txBody>
       </p:sp>
@@ -6978,8 +6644,8 @@
         </p:nvSpPr>
         <p:spPr>
           <a:xfrm>
-            <a:off x="731520" y="1371600"/>
-            <a:ext cx="2377440" cy="3474720"/>
+            <a:off x="822960" y="1554480"/>
+            <a:ext cx="4937760" cy="3474720"/>
           </a:xfrm>
           <a:prstGeom prst="roundRect">
             <a:avLst/>
@@ -6989,7 +6655,7 @@
           </a:solidFill>
           <a:ln w="19050">
             <a:solidFill>
-              <a:srgbClr val="38BDF8"/>
+              <a:srgbClr val="A78BFA"/>
             </a:solidFill>
           </a:ln>
         </p:spPr>
@@ -7024,8 +6690,8 @@
         </p:nvSpPr>
         <p:spPr>
           <a:xfrm>
-            <a:off x="896112" y="1481328"/>
-            <a:ext cx="2103120" cy="320040"/>
+            <a:off x="987552" y="1664208"/>
+            <a:ext cx="1214563" cy="338554"/>
           </a:xfrm>
           <a:prstGeom prst="rect">
             <a:avLst/>
@@ -7046,7 +6712,12 @@
               </a:defRPr>
             </a:pPr>
             <a:r>
-              <a:t>Environment</a:t>
+              <a:rPr lang="en-US" dirty="0"/>
+              <a:t>Served</a:t>
+            </a:r>
+            <a:r>
+              <a:rPr dirty="0"/>
+              <a:t> Data</a:t>
             </a:r>
           </a:p>
         </p:txBody>
@@ -7059,8 +6730,8 @@
         </p:nvSpPr>
         <p:spPr>
           <a:xfrm>
-            <a:off x="896112" y="1828800"/>
-            <a:ext cx="2103120" cy="2926080"/>
+            <a:off x="987552" y="2011680"/>
+            <a:ext cx="4663440" cy="646331"/>
           </a:xfrm>
           <a:prstGeom prst="rect">
             <a:avLst/>
@@ -7081,7 +6752,8 @@
               </a:defRPr>
             </a:pPr>
             <a:r>
-              <a:t>Ubuntu / Windows</a:t>
+              <a:rPr dirty="0"/>
+              <a:t>Extracted text from PDF content</a:t>
             </a:r>
           </a:p>
           <a:p>
@@ -7093,7 +6765,12 @@
               </a:defRPr>
             </a:pPr>
             <a:r>
-              <a:t>Conda environment</a:t>
+              <a:rPr lang="en-US" dirty="0"/>
+              <a:t>PID</a:t>
+            </a:r>
+            <a:r>
+              <a:rPr dirty="0"/>
+              <a:t> data identified by the model</a:t>
             </a:r>
           </a:p>
           <a:p>
@@ -7105,7 +6782,8 @@
               </a:defRPr>
             </a:pPr>
             <a:r>
-              <a:t>Localhost deployment</a:t>
+              <a:rPr dirty="0"/>
+              <a:t>Results are tailored for local document intelligence workflows</a:t>
             </a:r>
           </a:p>
         </p:txBody>
@@ -7118,8 +6796,8 @@
         </p:nvSpPr>
         <p:spPr>
           <a:xfrm>
-            <a:off x="3291840" y="1371600"/>
-            <a:ext cx="2377440" cy="3474720"/>
+            <a:off x="6309360" y="1554480"/>
+            <a:ext cx="4937760" cy="3474720"/>
           </a:xfrm>
           <a:prstGeom prst="roundRect">
             <a:avLst/>
@@ -7164,8 +6842,8 @@
         </p:nvSpPr>
         <p:spPr>
           <a:xfrm>
-            <a:off x="3456432" y="1481328"/>
-            <a:ext cx="2103120" cy="320040"/>
+            <a:off x="6473952" y="1664208"/>
+            <a:ext cx="2443041" cy="338554"/>
           </a:xfrm>
           <a:prstGeom prst="rect">
             <a:avLst/>
@@ -7186,8 +6864,18 @@
               </a:defRPr>
             </a:pPr>
             <a:r>
-              <a:t>Frontend</a:t>
-            </a:r>
+              <a:rPr lang="en-US" dirty="0"/>
+              <a:t>Rendering </a:t>
+            </a:r>
+            <a:r>
+              <a:rPr dirty="0"/>
+              <a:t>Display </a:t>
+            </a:r>
+            <a:r>
+              <a:rPr lang="en-US" dirty="0"/>
+              <a:t>Content</a:t>
+            </a:r>
+            <a:endParaRPr dirty="0"/>
           </a:p>
         </p:txBody>
       </p:sp>
@@ -7199,8 +6887,8 @@
         </p:nvSpPr>
         <p:spPr>
           <a:xfrm>
-            <a:off x="3456432" y="1828800"/>
-            <a:ext cx="2103120" cy="1569660"/>
+            <a:off x="6473952" y="2011680"/>
+            <a:ext cx="4663440" cy="2926080"/>
           </a:xfrm>
           <a:prstGeom prst="rect">
             <a:avLst/>
@@ -7221,8 +6909,7 @@
               </a:defRPr>
             </a:pPr>
             <a:r>
-              <a:rPr dirty="0"/>
-              <a:t>NodeJS 18</a:t>
+              <a:t>ReactJS frontend for end-user interaction</a:t>
             </a:r>
           </a:p>
           <a:p>
@@ -7234,8 +6921,7 @@
               </a:defRPr>
             </a:pPr>
             <a:r>
-              <a:rPr dirty="0"/>
-              <a:t>ReactJS</a:t>
+              <a:t>FastAPI-backed service layer for delivery and API integration</a:t>
             </a:r>
           </a:p>
           <a:p>
@@ -7247,140 +6933,21 @@
               </a:defRPr>
             </a:pPr>
             <a:r>
-              <a:rPr dirty="0"/>
-              <a:t>Axios</a:t>
-            </a:r>
-          </a:p>
-          <a:p>
-            <a:pPr>
-              <a:defRPr sz="1200">
-                <a:solidFill>
-                  <a:srgbClr val="E2E8F0"/>
-                </a:solidFill>
-              </a:defRPr>
-            </a:pPr>
-            <a:r>
-              <a:rPr dirty="0"/>
-              <a:t>Browser support: Chrome, Firefox, Edge</a:t>
-            </a:r>
-            <a:endParaRPr lang="en-US" dirty="0"/>
-          </a:p>
-          <a:p>
-            <a:pPr>
-              <a:defRPr sz="1200">
-                <a:solidFill>
-                  <a:srgbClr val="E2E8F0"/>
-                </a:solidFill>
-              </a:defRPr>
-            </a:pPr>
-            <a:r>
-              <a:rPr lang="en-IN" dirty="0"/>
-              <a:t>React rendered at localhost:3000</a:t>
-            </a:r>
-          </a:p>
-          <a:p>
-            <a:pPr>
-              <a:defRPr sz="1200">
-                <a:solidFill>
-                  <a:srgbClr val="E2E8F0"/>
-                </a:solidFill>
-              </a:defRPr>
-            </a:pPr>
-            <a:endParaRPr dirty="0"/>
-          </a:p>
-        </p:txBody>
-      </p:sp>
-      <p:sp>
-        <p:nvSpPr>
-          <p:cNvPr id="9" name="Rounded Rectangle 8"/>
-          <p:cNvSpPr/>
-          <p:nvPr/>
-        </p:nvSpPr>
-        <p:spPr>
-          <a:xfrm>
-            <a:off x="5852160" y="1371600"/>
-            <a:ext cx="2377440" cy="3474720"/>
-          </a:xfrm>
-          <a:prstGeom prst="roundRect">
-            <a:avLst/>
-          </a:prstGeom>
-          <a:solidFill>
-            <a:srgbClr val="1E293B"/>
-          </a:solidFill>
-          <a:ln w="19050">
-            <a:solidFill>
-              <a:srgbClr val="FBBF24"/>
-            </a:solidFill>
-          </a:ln>
-        </p:spPr>
-        <p:style>
-          <a:lnRef idx="1">
-            <a:schemeClr val="accent1"/>
-          </a:lnRef>
-          <a:fillRef idx="3">
-            <a:schemeClr val="accent1"/>
-          </a:fillRef>
-          <a:effectRef idx="2">
-            <a:schemeClr val="accent1"/>
-          </a:effectRef>
-          <a:fontRef idx="minor">
-            <a:schemeClr val="lt1"/>
-          </a:fontRef>
-        </p:style>
-        <p:txBody>
-          <a:bodyPr rtlCol="0" anchor="ctr"/>
-          <a:lstStyle/>
-          <a:p>
-            <a:pPr algn="ctr"/>
-            <a:endParaRPr/>
-          </a:p>
-        </p:txBody>
-      </p:sp>
-      <p:sp>
-        <p:nvSpPr>
-          <p:cNvPr id="10" name="TextBox 9"/>
+              <a:t>Consistent result presentation across the application flow</a:t>
+            </a:r>
+          </a:p>
+        </p:txBody>
+      </p:sp>
+      <p:sp>
+        <p:nvSpPr>
+          <p:cNvPr id="9" name="TextBox 8"/>
           <p:cNvSpPr txBox="1"/>
           <p:nvPr/>
         </p:nvSpPr>
         <p:spPr>
           <a:xfrm>
-            <a:off x="6016752" y="1481328"/>
-            <a:ext cx="2103120" cy="320040"/>
-          </a:xfrm>
-          <a:prstGeom prst="rect">
-            <a:avLst/>
-          </a:prstGeom>
-          <a:noFill/>
-        </p:spPr>
-        <p:txBody>
-          <a:bodyPr wrap="none">
-            <a:spAutoFit/>
-          </a:bodyPr>
-          <a:lstStyle/>
-          <a:p>
-            <a:pPr>
-              <a:defRPr sz="1600" b="1">
-                <a:solidFill>
-                  <a:srgbClr val="E2E8F0"/>
-                </a:solidFill>
-              </a:defRPr>
-            </a:pPr>
-            <a:r>
-              <a:t>Backend</a:t>
-            </a:r>
-          </a:p>
-        </p:txBody>
-      </p:sp>
-      <p:sp>
-        <p:nvSpPr>
-          <p:cNvPr id="11" name="TextBox 10"/>
-          <p:cNvSpPr txBox="1"/>
-          <p:nvPr/>
-        </p:nvSpPr>
-        <p:spPr>
-          <a:xfrm>
-            <a:off x="6016752" y="1828800"/>
-            <a:ext cx="2103120" cy="2926080"/>
+            <a:off x="914400" y="5394960"/>
+            <a:ext cx="10424160" cy="548640"/>
           </a:xfrm>
           <a:prstGeom prst="rect">
             <a:avLst/>
@@ -7394,224 +6961,21 @@
           <a:lstStyle/>
           <a:p>
             <a:pPr>
-              <a:defRPr sz="1200">
-                <a:solidFill>
-                  <a:srgbClr val="E2E8F0"/>
-                </a:solidFill>
-              </a:defRPr>
-            </a:pPr>
-            <a:r>
-              <a:t>Python 3.11</a:t>
-            </a:r>
-          </a:p>
-          <a:p>
-            <a:pPr>
-              <a:defRPr sz="1200">
-                <a:solidFill>
-                  <a:srgbClr val="E2E8F0"/>
-                </a:solidFill>
-              </a:defRPr>
-            </a:pPr>
-            <a:r>
-              <a:t>FastAPI</a:t>
-            </a:r>
-          </a:p>
-          <a:p>
-            <a:pPr>
-              <a:defRPr sz="1200">
-                <a:solidFill>
-                  <a:srgbClr val="E2E8F0"/>
-                </a:solidFill>
-              </a:defRPr>
-            </a:pPr>
-            <a:r>
-              <a:t>Served at localhost:8000</a:t>
-            </a:r>
-          </a:p>
-        </p:txBody>
-      </p:sp>
-      <p:sp>
-        <p:nvSpPr>
-          <p:cNvPr id="12" name="Rounded Rectangle 11"/>
-          <p:cNvSpPr/>
-          <p:nvPr/>
-        </p:nvSpPr>
-        <p:spPr>
-          <a:xfrm>
-            <a:off x="8412480" y="1371600"/>
-            <a:ext cx="2743200" cy="3474720"/>
-          </a:xfrm>
-          <a:prstGeom prst="roundRect">
-            <a:avLst/>
-          </a:prstGeom>
-          <a:solidFill>
-            <a:srgbClr val="1E293B"/>
-          </a:solidFill>
-          <a:ln w="19050">
-            <a:solidFill>
-              <a:srgbClr val="A78BFA"/>
-            </a:solidFill>
-          </a:ln>
-        </p:spPr>
-        <p:style>
-          <a:lnRef idx="1">
-            <a:schemeClr val="accent1"/>
-          </a:lnRef>
-          <a:fillRef idx="3">
-            <a:schemeClr val="accent1"/>
-          </a:fillRef>
-          <a:effectRef idx="2">
-            <a:schemeClr val="accent1"/>
-          </a:effectRef>
-          <a:fontRef idx="minor">
-            <a:schemeClr val="lt1"/>
-          </a:fontRef>
-        </p:style>
-        <p:txBody>
-          <a:bodyPr rtlCol="0" anchor="ctr"/>
-          <a:lstStyle/>
-          <a:p>
-            <a:pPr algn="ctr"/>
-            <a:endParaRPr/>
-          </a:p>
-        </p:txBody>
-      </p:sp>
-      <p:sp>
-        <p:nvSpPr>
-          <p:cNvPr id="13" name="TextBox 12"/>
-          <p:cNvSpPr txBox="1"/>
-          <p:nvPr/>
-        </p:nvSpPr>
-        <p:spPr>
-          <a:xfrm>
-            <a:off x="8577072" y="1481328"/>
-            <a:ext cx="2468880" cy="320040"/>
-          </a:xfrm>
-          <a:prstGeom prst="rect">
-            <a:avLst/>
-          </a:prstGeom>
-          <a:noFill/>
-        </p:spPr>
-        <p:txBody>
-          <a:bodyPr wrap="none">
-            <a:spAutoFit/>
-          </a:bodyPr>
-          <a:lstStyle/>
-          <a:p>
-            <a:pPr>
-              <a:defRPr sz="1600" b="1">
-                <a:solidFill>
-                  <a:srgbClr val="E2E8F0"/>
-                </a:solidFill>
-              </a:defRPr>
-            </a:pPr>
-            <a:r>
-              <a:t>AI / Search</a:t>
-            </a:r>
-          </a:p>
-        </p:txBody>
-      </p:sp>
-      <p:sp>
-        <p:nvSpPr>
-          <p:cNvPr id="14" name="TextBox 13"/>
-          <p:cNvSpPr txBox="1"/>
-          <p:nvPr/>
-        </p:nvSpPr>
-        <p:spPr>
-          <a:xfrm>
-            <a:off x="8577072" y="1828800"/>
-            <a:ext cx="2468880" cy="830997"/>
-          </a:xfrm>
-          <a:prstGeom prst="rect">
-            <a:avLst/>
-          </a:prstGeom>
-          <a:noFill/>
-        </p:spPr>
-        <p:txBody>
-          <a:bodyPr wrap="square">
-            <a:spAutoFit/>
-          </a:bodyPr>
-          <a:lstStyle/>
-          <a:p>
-            <a:pPr>
-              <a:defRPr sz="1200">
-                <a:solidFill>
-                  <a:srgbClr val="E2E8F0"/>
-                </a:solidFill>
-              </a:defRPr>
-            </a:pPr>
-            <a:r>
-              <a:rPr dirty="0"/>
-              <a:t>Sentence Transformers</a:t>
-            </a:r>
-            <a:r>
-              <a:rPr lang="en-US" dirty="0"/>
-              <a:t> for </a:t>
-            </a:r>
-            <a:r>
-              <a:rPr lang="en-US" dirty="0" err="1"/>
-              <a:t>AgenticAI</a:t>
-            </a:r>
-            <a:endParaRPr lang="en-US" dirty="0"/>
-          </a:p>
-          <a:p>
-            <a:pPr>
-              <a:defRPr sz="1200">
-                <a:solidFill>
-                  <a:srgbClr val="E2E8F0"/>
-                </a:solidFill>
-              </a:defRPr>
-            </a:pPr>
-            <a:r>
-              <a:rPr lang="en-US" dirty="0"/>
-              <a:t>(</a:t>
-            </a:r>
-            <a:r>
-              <a:rPr dirty="0"/>
-              <a:t>Mini LM L5 v2</a:t>
-            </a:r>
-            <a:r>
-              <a:rPr lang="en-US" dirty="0"/>
-              <a:t>)</a:t>
-            </a:r>
-            <a:endParaRPr dirty="0"/>
-          </a:p>
-          <a:p>
-            <a:pPr>
-              <a:defRPr sz="1200">
-                <a:solidFill>
-                  <a:srgbClr val="E2E8F0"/>
-                </a:solidFill>
-              </a:defRPr>
-            </a:pPr>
-            <a:r>
-              <a:rPr dirty="0"/>
-              <a:t>FAISS-DB</a:t>
-            </a:r>
-          </a:p>
-          <a:p>
-            <a:pPr>
-              <a:defRPr sz="1200">
-                <a:solidFill>
-                  <a:srgbClr val="E2E8F0"/>
-                </a:solidFill>
-              </a:defRPr>
-            </a:pPr>
-            <a:r>
-              <a:rPr dirty="0"/>
-              <a:t>Qwen2.5 via </a:t>
-            </a:r>
-            <a:r>
-              <a:rPr dirty="0" err="1"/>
-              <a:t>vLLM</a:t>
-            </a:r>
-            <a:endParaRPr dirty="0"/>
-          </a:p>
-        </p:txBody>
-      </p:sp>
-      <p:sp>
-        <p:nvSpPr>
-          <p:cNvPr id="15" name="TextBox 14"/>
+              <a:defRPr sz="1600">
+                <a:solidFill>
+                  <a:srgbClr val="E2E8F0"/>
+                </a:solidFill>
+              </a:defRPr>
+            </a:pPr>
+            <a:r>
+              <a:t>This design keeps the interaction simple: query in, extracted text and transaction-focused results out.</a:t>
+            </a:r>
+          </a:p>
+        </p:txBody>
+      </p:sp>
+      <p:sp>
+        <p:nvSpPr>
+          <p:cNvPr id="10" name="TextBox 9"/>
           <p:cNvSpPr txBox="1"/>
           <p:nvPr/>
         </p:nvSpPr>
@@ -7653,6 +7017,764 @@
 </file>
 
 <file path=ppt/slides/slide8.xml><?xml version="1.0" encoding="utf-8"?>
+<p:sld xmlns:a="http://schemas.openxmlformats.org/drawingml/2006/main" xmlns:r="http://schemas.openxmlformats.org/officeDocument/2006/relationships" xmlns:p="http://schemas.openxmlformats.org/presentationml/2006/main">
+  <p:cSld>
+    <p:bg>
+      <p:bgPr>
+        <a:solidFill>
+          <a:srgbClr val="0F172A"/>
+        </a:solidFill>
+        <a:effectLst/>
+      </p:bgPr>
+    </p:bg>
+    <p:spTree>
+      <p:nvGrpSpPr>
+        <p:cNvPr id="1" name=""/>
+        <p:cNvGrpSpPr/>
+        <p:nvPr/>
+      </p:nvGrpSpPr>
+      <p:grpSpPr>
+        <a:xfrm>
+          <a:off x="0" y="0"/>
+          <a:ext cx="0" cy="0"/>
+          <a:chOff x="0" y="0"/>
+          <a:chExt cx="0" cy="0"/>
+        </a:xfrm>
+      </p:grpSpPr>
+      <p:sp>
+        <p:nvSpPr>
+          <p:cNvPr id="2" name="TextBox 1"/>
+          <p:cNvSpPr txBox="1"/>
+          <p:nvPr/>
+        </p:nvSpPr>
+        <p:spPr>
+          <a:xfrm>
+            <a:off x="548640" y="320040"/>
+            <a:ext cx="3235886" cy="707886"/>
+          </a:xfrm>
+          <a:prstGeom prst="rect">
+            <a:avLst/>
+          </a:prstGeom>
+          <a:noFill/>
+        </p:spPr>
+        <p:txBody>
+          <a:bodyPr wrap="none">
+            <a:spAutoFit/>
+          </a:bodyPr>
+          <a:lstStyle/>
+          <a:p>
+            <a:r>
+              <a:rPr sz="2800" b="1" dirty="0">
+                <a:solidFill>
+                  <a:srgbClr val="E2E8F0"/>
+                </a:solidFill>
+              </a:rPr>
+              <a:t>Tech Stack Summary</a:t>
+            </a:r>
+          </a:p>
+          <a:p>
+            <a:pPr>
+              <a:defRPr sz="1200">
+                <a:solidFill>
+                  <a:srgbClr val="94A3B8"/>
+                </a:solidFill>
+              </a:defRPr>
+            </a:pPr>
+            <a:r>
+              <a:rPr dirty="0"/>
+              <a:t>project stack organized by layer</a:t>
+            </a:r>
+            <a:r>
+              <a:rPr lang="en-US" dirty="0"/>
+              <a:t>s</a:t>
+            </a:r>
+            <a:endParaRPr dirty="0"/>
+          </a:p>
+        </p:txBody>
+      </p:sp>
+      <p:sp>
+        <p:nvSpPr>
+          <p:cNvPr id="3" name="Rounded Rectangle 2"/>
+          <p:cNvSpPr/>
+          <p:nvPr/>
+        </p:nvSpPr>
+        <p:spPr>
+          <a:xfrm>
+            <a:off x="731520" y="1371600"/>
+            <a:ext cx="2377440" cy="3474720"/>
+          </a:xfrm>
+          <a:prstGeom prst="roundRect">
+            <a:avLst/>
+          </a:prstGeom>
+          <a:solidFill>
+            <a:srgbClr val="1E293B"/>
+          </a:solidFill>
+          <a:ln w="19050">
+            <a:solidFill>
+              <a:srgbClr val="38BDF8"/>
+            </a:solidFill>
+          </a:ln>
+        </p:spPr>
+        <p:style>
+          <a:lnRef idx="1">
+            <a:schemeClr val="accent1"/>
+          </a:lnRef>
+          <a:fillRef idx="3">
+            <a:schemeClr val="accent1"/>
+          </a:fillRef>
+          <a:effectRef idx="2">
+            <a:schemeClr val="accent1"/>
+          </a:effectRef>
+          <a:fontRef idx="minor">
+            <a:schemeClr val="lt1"/>
+          </a:fontRef>
+        </p:style>
+        <p:txBody>
+          <a:bodyPr rtlCol="0" anchor="ctr"/>
+          <a:lstStyle/>
+          <a:p>
+            <a:pPr algn="ctr"/>
+            <a:endParaRPr/>
+          </a:p>
+        </p:txBody>
+      </p:sp>
+      <p:sp>
+        <p:nvSpPr>
+          <p:cNvPr id="4" name="TextBox 3"/>
+          <p:cNvSpPr txBox="1"/>
+          <p:nvPr/>
+        </p:nvSpPr>
+        <p:spPr>
+          <a:xfrm>
+            <a:off x="896112" y="1481328"/>
+            <a:ext cx="2103120" cy="320040"/>
+          </a:xfrm>
+          <a:prstGeom prst="rect">
+            <a:avLst/>
+          </a:prstGeom>
+          <a:noFill/>
+        </p:spPr>
+        <p:txBody>
+          <a:bodyPr wrap="none">
+            <a:spAutoFit/>
+          </a:bodyPr>
+          <a:lstStyle/>
+          <a:p>
+            <a:pPr>
+              <a:defRPr sz="1600" b="1">
+                <a:solidFill>
+                  <a:srgbClr val="E2E8F0"/>
+                </a:solidFill>
+              </a:defRPr>
+            </a:pPr>
+            <a:r>
+              <a:t>Environment</a:t>
+            </a:r>
+          </a:p>
+        </p:txBody>
+      </p:sp>
+      <p:sp>
+        <p:nvSpPr>
+          <p:cNvPr id="5" name="TextBox 4"/>
+          <p:cNvSpPr txBox="1"/>
+          <p:nvPr/>
+        </p:nvSpPr>
+        <p:spPr>
+          <a:xfrm>
+            <a:off x="896112" y="1828800"/>
+            <a:ext cx="2103120" cy="2926080"/>
+          </a:xfrm>
+          <a:prstGeom prst="rect">
+            <a:avLst/>
+          </a:prstGeom>
+          <a:noFill/>
+        </p:spPr>
+        <p:txBody>
+          <a:bodyPr wrap="square">
+            <a:spAutoFit/>
+          </a:bodyPr>
+          <a:lstStyle/>
+          <a:p>
+            <a:pPr>
+              <a:defRPr sz="1200">
+                <a:solidFill>
+                  <a:srgbClr val="E2E8F0"/>
+                </a:solidFill>
+              </a:defRPr>
+            </a:pPr>
+            <a:r>
+              <a:t>Ubuntu / Windows</a:t>
+            </a:r>
+          </a:p>
+          <a:p>
+            <a:pPr>
+              <a:defRPr sz="1200">
+                <a:solidFill>
+                  <a:srgbClr val="E2E8F0"/>
+                </a:solidFill>
+              </a:defRPr>
+            </a:pPr>
+            <a:r>
+              <a:t>Conda environment</a:t>
+            </a:r>
+          </a:p>
+          <a:p>
+            <a:pPr>
+              <a:defRPr sz="1200">
+                <a:solidFill>
+                  <a:srgbClr val="E2E8F0"/>
+                </a:solidFill>
+              </a:defRPr>
+            </a:pPr>
+            <a:r>
+              <a:t>Localhost deployment</a:t>
+            </a:r>
+          </a:p>
+        </p:txBody>
+      </p:sp>
+      <p:sp>
+        <p:nvSpPr>
+          <p:cNvPr id="6" name="Rounded Rectangle 5"/>
+          <p:cNvSpPr/>
+          <p:nvPr/>
+        </p:nvSpPr>
+        <p:spPr>
+          <a:xfrm>
+            <a:off x="3291840" y="1371600"/>
+            <a:ext cx="2377440" cy="3474720"/>
+          </a:xfrm>
+          <a:prstGeom prst="roundRect">
+            <a:avLst/>
+          </a:prstGeom>
+          <a:solidFill>
+            <a:srgbClr val="1E293B"/>
+          </a:solidFill>
+          <a:ln w="19050">
+            <a:solidFill>
+              <a:srgbClr val="22C55E"/>
+            </a:solidFill>
+          </a:ln>
+        </p:spPr>
+        <p:style>
+          <a:lnRef idx="1">
+            <a:schemeClr val="accent1"/>
+          </a:lnRef>
+          <a:fillRef idx="3">
+            <a:schemeClr val="accent1"/>
+          </a:fillRef>
+          <a:effectRef idx="2">
+            <a:schemeClr val="accent1"/>
+          </a:effectRef>
+          <a:fontRef idx="minor">
+            <a:schemeClr val="lt1"/>
+          </a:fontRef>
+        </p:style>
+        <p:txBody>
+          <a:bodyPr rtlCol="0" anchor="ctr"/>
+          <a:lstStyle/>
+          <a:p>
+            <a:pPr algn="ctr"/>
+            <a:endParaRPr/>
+          </a:p>
+        </p:txBody>
+      </p:sp>
+      <p:sp>
+        <p:nvSpPr>
+          <p:cNvPr id="7" name="TextBox 6"/>
+          <p:cNvSpPr txBox="1"/>
+          <p:nvPr/>
+        </p:nvSpPr>
+        <p:spPr>
+          <a:xfrm>
+            <a:off x="3456432" y="1481328"/>
+            <a:ext cx="2103120" cy="320040"/>
+          </a:xfrm>
+          <a:prstGeom prst="rect">
+            <a:avLst/>
+          </a:prstGeom>
+          <a:noFill/>
+        </p:spPr>
+        <p:txBody>
+          <a:bodyPr wrap="none">
+            <a:spAutoFit/>
+          </a:bodyPr>
+          <a:lstStyle/>
+          <a:p>
+            <a:pPr>
+              <a:defRPr sz="1600" b="1">
+                <a:solidFill>
+                  <a:srgbClr val="E2E8F0"/>
+                </a:solidFill>
+              </a:defRPr>
+            </a:pPr>
+            <a:r>
+              <a:t>Frontend</a:t>
+            </a:r>
+          </a:p>
+        </p:txBody>
+      </p:sp>
+      <p:sp>
+        <p:nvSpPr>
+          <p:cNvPr id="8" name="TextBox 7"/>
+          <p:cNvSpPr txBox="1"/>
+          <p:nvPr/>
+        </p:nvSpPr>
+        <p:spPr>
+          <a:xfrm>
+            <a:off x="3456432" y="1828800"/>
+            <a:ext cx="2103120" cy="1569660"/>
+          </a:xfrm>
+          <a:prstGeom prst="rect">
+            <a:avLst/>
+          </a:prstGeom>
+          <a:noFill/>
+        </p:spPr>
+        <p:txBody>
+          <a:bodyPr wrap="square">
+            <a:spAutoFit/>
+          </a:bodyPr>
+          <a:lstStyle/>
+          <a:p>
+            <a:pPr>
+              <a:defRPr sz="1200">
+                <a:solidFill>
+                  <a:srgbClr val="E2E8F0"/>
+                </a:solidFill>
+              </a:defRPr>
+            </a:pPr>
+            <a:r>
+              <a:rPr dirty="0"/>
+              <a:t>NodeJS 18</a:t>
+            </a:r>
+          </a:p>
+          <a:p>
+            <a:pPr>
+              <a:defRPr sz="1200">
+                <a:solidFill>
+                  <a:srgbClr val="E2E8F0"/>
+                </a:solidFill>
+              </a:defRPr>
+            </a:pPr>
+            <a:r>
+              <a:rPr dirty="0"/>
+              <a:t>ReactJS</a:t>
+            </a:r>
+          </a:p>
+          <a:p>
+            <a:pPr>
+              <a:defRPr sz="1200">
+                <a:solidFill>
+                  <a:srgbClr val="E2E8F0"/>
+                </a:solidFill>
+              </a:defRPr>
+            </a:pPr>
+            <a:r>
+              <a:rPr dirty="0"/>
+              <a:t>Axios</a:t>
+            </a:r>
+          </a:p>
+          <a:p>
+            <a:pPr>
+              <a:defRPr sz="1200">
+                <a:solidFill>
+                  <a:srgbClr val="E2E8F0"/>
+                </a:solidFill>
+              </a:defRPr>
+            </a:pPr>
+            <a:r>
+              <a:rPr dirty="0"/>
+              <a:t>Browser support: Chrome, Firefox, Edge</a:t>
+            </a:r>
+            <a:endParaRPr lang="en-US" dirty="0"/>
+          </a:p>
+          <a:p>
+            <a:pPr>
+              <a:defRPr sz="1200">
+                <a:solidFill>
+                  <a:srgbClr val="E2E8F0"/>
+                </a:solidFill>
+              </a:defRPr>
+            </a:pPr>
+            <a:r>
+              <a:rPr lang="en-IN" dirty="0"/>
+              <a:t>React rendered at localhost:3000</a:t>
+            </a:r>
+          </a:p>
+          <a:p>
+            <a:pPr>
+              <a:defRPr sz="1200">
+                <a:solidFill>
+                  <a:srgbClr val="E2E8F0"/>
+                </a:solidFill>
+              </a:defRPr>
+            </a:pPr>
+            <a:endParaRPr dirty="0"/>
+          </a:p>
+        </p:txBody>
+      </p:sp>
+      <p:sp>
+        <p:nvSpPr>
+          <p:cNvPr id="9" name="Rounded Rectangle 8"/>
+          <p:cNvSpPr/>
+          <p:nvPr/>
+        </p:nvSpPr>
+        <p:spPr>
+          <a:xfrm>
+            <a:off x="5852160" y="1371600"/>
+            <a:ext cx="2377440" cy="3474720"/>
+          </a:xfrm>
+          <a:prstGeom prst="roundRect">
+            <a:avLst/>
+          </a:prstGeom>
+          <a:solidFill>
+            <a:srgbClr val="1E293B"/>
+          </a:solidFill>
+          <a:ln w="19050">
+            <a:solidFill>
+              <a:srgbClr val="FBBF24"/>
+            </a:solidFill>
+          </a:ln>
+        </p:spPr>
+        <p:style>
+          <a:lnRef idx="1">
+            <a:schemeClr val="accent1"/>
+          </a:lnRef>
+          <a:fillRef idx="3">
+            <a:schemeClr val="accent1"/>
+          </a:fillRef>
+          <a:effectRef idx="2">
+            <a:schemeClr val="accent1"/>
+          </a:effectRef>
+          <a:fontRef idx="minor">
+            <a:schemeClr val="lt1"/>
+          </a:fontRef>
+        </p:style>
+        <p:txBody>
+          <a:bodyPr rtlCol="0" anchor="ctr"/>
+          <a:lstStyle/>
+          <a:p>
+            <a:pPr algn="ctr"/>
+            <a:endParaRPr/>
+          </a:p>
+        </p:txBody>
+      </p:sp>
+      <p:sp>
+        <p:nvSpPr>
+          <p:cNvPr id="10" name="TextBox 9"/>
+          <p:cNvSpPr txBox="1"/>
+          <p:nvPr/>
+        </p:nvSpPr>
+        <p:spPr>
+          <a:xfrm>
+            <a:off x="6016752" y="1481328"/>
+            <a:ext cx="2103120" cy="320040"/>
+          </a:xfrm>
+          <a:prstGeom prst="rect">
+            <a:avLst/>
+          </a:prstGeom>
+          <a:noFill/>
+        </p:spPr>
+        <p:txBody>
+          <a:bodyPr wrap="none">
+            <a:spAutoFit/>
+          </a:bodyPr>
+          <a:lstStyle/>
+          <a:p>
+            <a:pPr>
+              <a:defRPr sz="1600" b="1">
+                <a:solidFill>
+                  <a:srgbClr val="E2E8F0"/>
+                </a:solidFill>
+              </a:defRPr>
+            </a:pPr>
+            <a:r>
+              <a:t>Backend</a:t>
+            </a:r>
+          </a:p>
+        </p:txBody>
+      </p:sp>
+      <p:sp>
+        <p:nvSpPr>
+          <p:cNvPr id="11" name="TextBox 10"/>
+          <p:cNvSpPr txBox="1"/>
+          <p:nvPr/>
+        </p:nvSpPr>
+        <p:spPr>
+          <a:xfrm>
+            <a:off x="6016752" y="1828800"/>
+            <a:ext cx="2103120" cy="2926080"/>
+          </a:xfrm>
+          <a:prstGeom prst="rect">
+            <a:avLst/>
+          </a:prstGeom>
+          <a:noFill/>
+        </p:spPr>
+        <p:txBody>
+          <a:bodyPr wrap="square">
+            <a:spAutoFit/>
+          </a:bodyPr>
+          <a:lstStyle/>
+          <a:p>
+            <a:pPr>
+              <a:defRPr sz="1200">
+                <a:solidFill>
+                  <a:srgbClr val="E2E8F0"/>
+                </a:solidFill>
+              </a:defRPr>
+            </a:pPr>
+            <a:r>
+              <a:t>Python 3.11</a:t>
+            </a:r>
+          </a:p>
+          <a:p>
+            <a:pPr>
+              <a:defRPr sz="1200">
+                <a:solidFill>
+                  <a:srgbClr val="E2E8F0"/>
+                </a:solidFill>
+              </a:defRPr>
+            </a:pPr>
+            <a:r>
+              <a:t>FastAPI</a:t>
+            </a:r>
+          </a:p>
+          <a:p>
+            <a:pPr>
+              <a:defRPr sz="1200">
+                <a:solidFill>
+                  <a:srgbClr val="E2E8F0"/>
+                </a:solidFill>
+              </a:defRPr>
+            </a:pPr>
+            <a:r>
+              <a:t>Served at localhost:8000</a:t>
+            </a:r>
+          </a:p>
+        </p:txBody>
+      </p:sp>
+      <p:sp>
+        <p:nvSpPr>
+          <p:cNvPr id="12" name="Rounded Rectangle 11"/>
+          <p:cNvSpPr/>
+          <p:nvPr/>
+        </p:nvSpPr>
+        <p:spPr>
+          <a:xfrm>
+            <a:off x="8412480" y="1371600"/>
+            <a:ext cx="2743200" cy="3474720"/>
+          </a:xfrm>
+          <a:prstGeom prst="roundRect">
+            <a:avLst/>
+          </a:prstGeom>
+          <a:solidFill>
+            <a:srgbClr val="1E293B"/>
+          </a:solidFill>
+          <a:ln w="19050">
+            <a:solidFill>
+              <a:srgbClr val="A78BFA"/>
+            </a:solidFill>
+          </a:ln>
+        </p:spPr>
+        <p:style>
+          <a:lnRef idx="1">
+            <a:schemeClr val="accent1"/>
+          </a:lnRef>
+          <a:fillRef idx="3">
+            <a:schemeClr val="accent1"/>
+          </a:fillRef>
+          <a:effectRef idx="2">
+            <a:schemeClr val="accent1"/>
+          </a:effectRef>
+          <a:fontRef idx="minor">
+            <a:schemeClr val="lt1"/>
+          </a:fontRef>
+        </p:style>
+        <p:txBody>
+          <a:bodyPr rtlCol="0" anchor="ctr"/>
+          <a:lstStyle/>
+          <a:p>
+            <a:pPr algn="ctr"/>
+            <a:endParaRPr/>
+          </a:p>
+        </p:txBody>
+      </p:sp>
+      <p:sp>
+        <p:nvSpPr>
+          <p:cNvPr id="13" name="TextBox 12"/>
+          <p:cNvSpPr txBox="1"/>
+          <p:nvPr/>
+        </p:nvSpPr>
+        <p:spPr>
+          <a:xfrm>
+            <a:off x="8577072" y="1481328"/>
+            <a:ext cx="2468880" cy="320040"/>
+          </a:xfrm>
+          <a:prstGeom prst="rect">
+            <a:avLst/>
+          </a:prstGeom>
+          <a:noFill/>
+        </p:spPr>
+        <p:txBody>
+          <a:bodyPr wrap="none">
+            <a:spAutoFit/>
+          </a:bodyPr>
+          <a:lstStyle/>
+          <a:p>
+            <a:pPr>
+              <a:defRPr sz="1600" b="1">
+                <a:solidFill>
+                  <a:srgbClr val="E2E8F0"/>
+                </a:solidFill>
+              </a:defRPr>
+            </a:pPr>
+            <a:r>
+              <a:t>AI / Search</a:t>
+            </a:r>
+          </a:p>
+        </p:txBody>
+      </p:sp>
+      <p:sp>
+        <p:nvSpPr>
+          <p:cNvPr id="14" name="TextBox 13"/>
+          <p:cNvSpPr txBox="1"/>
+          <p:nvPr/>
+        </p:nvSpPr>
+        <p:spPr>
+          <a:xfrm>
+            <a:off x="8577072" y="1828800"/>
+            <a:ext cx="2468880" cy="830997"/>
+          </a:xfrm>
+          <a:prstGeom prst="rect">
+            <a:avLst/>
+          </a:prstGeom>
+          <a:noFill/>
+        </p:spPr>
+        <p:txBody>
+          <a:bodyPr wrap="square">
+            <a:spAutoFit/>
+          </a:bodyPr>
+          <a:lstStyle/>
+          <a:p>
+            <a:pPr>
+              <a:defRPr sz="1200">
+                <a:solidFill>
+                  <a:srgbClr val="E2E8F0"/>
+                </a:solidFill>
+              </a:defRPr>
+            </a:pPr>
+            <a:r>
+              <a:rPr dirty="0"/>
+              <a:t>Sentence Transformers</a:t>
+            </a:r>
+            <a:r>
+              <a:rPr lang="en-US" dirty="0"/>
+              <a:t> for </a:t>
+            </a:r>
+            <a:r>
+              <a:rPr lang="en-US" dirty="0" err="1"/>
+              <a:t>AgenticAI</a:t>
+            </a:r>
+            <a:endParaRPr lang="en-US" dirty="0"/>
+          </a:p>
+          <a:p>
+            <a:pPr>
+              <a:defRPr sz="1200">
+                <a:solidFill>
+                  <a:srgbClr val="E2E8F0"/>
+                </a:solidFill>
+              </a:defRPr>
+            </a:pPr>
+            <a:r>
+              <a:rPr lang="en-US" dirty="0"/>
+              <a:t>(</a:t>
+            </a:r>
+            <a:r>
+              <a:rPr dirty="0"/>
+              <a:t>Mini LM L5 v2</a:t>
+            </a:r>
+            <a:r>
+              <a:rPr lang="en-US" dirty="0"/>
+              <a:t>)</a:t>
+            </a:r>
+            <a:endParaRPr dirty="0"/>
+          </a:p>
+          <a:p>
+            <a:pPr>
+              <a:defRPr sz="1200">
+                <a:solidFill>
+                  <a:srgbClr val="E2E8F0"/>
+                </a:solidFill>
+              </a:defRPr>
+            </a:pPr>
+            <a:r>
+              <a:rPr dirty="0"/>
+              <a:t>FAISS-DB</a:t>
+            </a:r>
+          </a:p>
+          <a:p>
+            <a:pPr>
+              <a:defRPr sz="1200">
+                <a:solidFill>
+                  <a:srgbClr val="E2E8F0"/>
+                </a:solidFill>
+              </a:defRPr>
+            </a:pPr>
+            <a:r>
+              <a:rPr dirty="0"/>
+              <a:t>Qwen2.5 via </a:t>
+            </a:r>
+            <a:r>
+              <a:rPr dirty="0" err="1"/>
+              <a:t>vLLM</a:t>
+            </a:r>
+            <a:endParaRPr dirty="0"/>
+          </a:p>
+        </p:txBody>
+      </p:sp>
+      <p:sp>
+        <p:nvSpPr>
+          <p:cNvPr id="15" name="TextBox 14"/>
+          <p:cNvSpPr txBox="1"/>
+          <p:nvPr/>
+        </p:nvSpPr>
+        <p:spPr>
+          <a:xfrm>
+            <a:off x="548640" y="6400800"/>
+            <a:ext cx="10972800" cy="228600"/>
+          </a:xfrm>
+          <a:prstGeom prst="rect">
+            <a:avLst/>
+          </a:prstGeom>
+          <a:noFill/>
+        </p:spPr>
+        <p:txBody>
+          <a:bodyPr wrap="none">
+            <a:spAutoFit/>
+          </a:bodyPr>
+          <a:lstStyle/>
+          <a:p>
+            <a:pPr algn="r">
+              <a:defRPr sz="900">
+                <a:solidFill>
+                  <a:srgbClr val="94A3B8"/>
+                </a:solidFill>
+              </a:defRPr>
+            </a:pPr>
+            <a:r>
+              <a:t>Doc-Intelligence-PID | Architecture Presentation</a:t>
+            </a:r>
+          </a:p>
+        </p:txBody>
+      </p:sp>
+    </p:spTree>
+  </p:cSld>
+  <p:clrMapOvr>
+    <a:masterClrMapping/>
+  </p:clrMapOvr>
+</p:sld>
+</file>
+
+<file path=ppt/slides/slide9.xml><?xml version="1.0" encoding="utf-8"?>
 <p:sld xmlns:a="http://schemas.openxmlformats.org/drawingml/2006/main" xmlns:r="http://schemas.openxmlformats.org/officeDocument/2006/relationships" xmlns:p="http://schemas.openxmlformats.org/presentationml/2006/main">
   <p:cSld>
     <p:bg>
